--- a/2-seances/S04-le-jeu-compte/a-projeter/seance-4-projection.pptx
+++ b/2-seances/S04-le-jeu-compte/a-projeter/seance-4-projection.pptx
@@ -27,9 +27,10 @@
     <p:sldId id="275" r:id="rId21"/>
     <p:sldId id="276" r:id="rId22"/>
     <p:sldId id="277" r:id="rId23"/>
+    <p:sldId id="278" r:id="rId24"/>
   </p:sldIdLst>
   <p:notesMasterIdLst>
-    <p:notesMasterId r:id="rId24"/>
+    <p:notesMasterId r:id="rId25"/>
   </p:notesMasterIdLst>
   <p:sldSz cx="12192000" cy="6858000"/>
   <p:notesSz cx="6858000" cy="12192000"/>
@@ -1051,7 +1052,7 @@
           <a:p>
             <a:r>
               <a:rPr lang="en-US" dirty="0"/>
-              <a:t>AVANT DE LANCER : « qu'est-ce que ça peut bien afficher ? » Ils proposeront 8, oui, vrai… Les quatre cartes de réponse ne s'affichent qu'après leurs propositions — ou on les cache en lançant le code d'abord.</a:t>
+              <a:t>Deux minutes. Ils remplissent la colonne de gauche DE MÉMOIRE : ils utilisent le + depuis la séance 2. Le mot « opérateur » est le mot du jour — il resservira à chaque séance. Le tableau reste au tableau.</a:t>
             </a:r>
             <a:endParaRPr lang="en-US" dirty="0"/>
           </a:p>
@@ -1139,7 +1140,7 @@
           <a:p>
             <a:r>
               <a:rPr lang="en-US" dirty="0"/>
-              <a:t>À écrire au tableau, l'un sous l'autre, et à NE PAS EFFACER de toute la séance. C'est la première chose qu'on montrera à un élève bloqué sur un SyntaxError.</a:t>
+              <a:t>AVANT DE LANCER : « qu'est-ce que ça peut bien afficher ? » Ils proposeront 8, oui, vrai… Résultat : True, False, True, False. Insistez sur &gt;= : « plus grand OU ÉGAL », les deux signes dans cet ordre, sans espace. C'est celui qu'ils voudront pour le défi en carte bleue.</a:t>
             </a:r>
             <a:endParaRPr lang="en-US" dirty="0"/>
           </a:p>
@@ -1227,7 +1228,7 @@
           <a:p>
             <a:r>
               <a:rPr lang="en-US" dirty="0"/>
-              <a:t>On tape TRÈS lentement en nommant chaque geste : « if, deux-points, je passe à la ligne… et regardez : il m'a décalé de quatre espaces tout seul. Ce décalage n'est pas de la décoration. » Puis else, deux-points, et on redécale.</a:t>
+              <a:t>À écrire au tableau, l'un sous l'autre, et à NE PAS EFFACER de toute la séance. C'est la première chose qu'on montrera à un élève bloqué sur un SyntaxError.</a:t>
             </a:r>
             <a:endParaRPr lang="en-US" dirty="0"/>
           </a:p>
@@ -1315,7 +1316,7 @@
           <a:p>
             <a:r>
               <a:rPr lang="en-US" dirty="0"/>
-              <a:t>C'est l'erreur qu'ils verront le plus aujourd'hui : qu'ils la voient d'abord sur MON écran, calmement. On remet les 4 espaces devant eux, on relance, ça marche.</a:t>
+              <a:t>On tape TRÈS lentement en nommant chaque geste : « if, deux-points, je passe à la ligne… et regardez : il m'a décalé de quatre espaces tout seul. Ce décalage n'est pas de la décoration. » Puis else, deux-points, et on redécale.</a:t>
             </a:r>
             <a:endParaRPr lang="en-US" dirty="0"/>
           </a:p>
@@ -1403,7 +1404,7 @@
           <a:p>
             <a:r>
               <a:rPr lang="en-US" dirty="0"/>
-              <a:t>22 minutes. Le fichier est coupé en trois parties avec un arrêt après chacune. Le bloc if / else de l'étape 6 leur est DONNÉ écrit en commentaire : on ne leur demande pas de l'inventer, mais de le recopier correctement. À 13 h 50 : Ctrl + S tous ensemble, puis on ouvre xo_officiel devant eux.</a:t>
+              <a:t>C'est l'erreur qu'ils verront le plus aujourd'hui : qu'ils la voient d'abord sur MON écran, calmement. On remet les 4 espaces devant eux, on relance, ça marche.</a:t>
             </a:r>
             <a:endParaRPr lang="en-US" dirty="0"/>
           </a:p>
@@ -1579,7 +1580,7 @@
           <a:p>
             <a:r>
               <a:rPr lang="en-US" dirty="0"/>
-              <a:t>Diapo à laisser affichée pendant tout l'atelier. Devant un message rouge : on le lit AVEC l'élève, et on demande « qu'est-ce qu'il te dit ? ». On ne touche jamais son clavier.</a:t>
+              <a:t>22 minutes. Le fichier est coupé en trois parties avec un arrêt après chacune. Le bloc if / else de l'étape 6 leur est DONNÉ écrit en commentaire : on ne leur demande pas de l'inventer, mais de le recopier correctement. À 13 h 50 : Ctrl + S tous ensemble, puis on ouvre xo_officiel devant eux.</a:t>
             </a:r>
             <a:endParaRPr lang="en-US" dirty="0"/>
           </a:p>
@@ -1667,7 +1668,7 @@
           <a:p>
             <a:r>
               <a:rPr lang="en-US" dirty="0"/>
-              <a:t>3 minutes de Mur de Mission, 3 minutes de question. Le soir même, dans l'onglet Journal : combien ont écrit un if / else qui marche sans aide.</a:t>
+              <a:t>Diapo à laisser affichée pendant tout l'atelier. Devant un message rouge : on le lit AVEC l'élève, et on demande « qu'est-ce qu'il te dit ? ». On ne touche jamais son clavier.</a:t>
             </a:r>
             <a:endParaRPr lang="en-US" dirty="0"/>
           </a:p>
@@ -1755,7 +1756,7 @@
           <a:p>
             <a:r>
               <a:rPr lang="en-US" dirty="0"/>
-              <a:t>Dernière phrase. On laisse la diapo affichée pendant la sortie.</a:t>
+              <a:t>3 minutes de Mur de Mission, 3 minutes de question. Le soir même, dans l'onglet Journal : combien ont écrit un if / else qui marche sans aide.</a:t>
             </a:r>
             <a:endParaRPr lang="en-US" dirty="0"/>
           </a:p>
@@ -1779,6 +1780,94 @@
             <a:fld id="{F7021451-1387-4CA6-816F-3879F97B5CBC}" type="slidenum">
               <a:rPr lang="en-US"/>
               <a:t>22</a:t>
+            </a:fld>
+            <a:endParaRPr lang="en-US"/>
+          </a:p>
+        </p:txBody>
+      </p:sp>
+    </p:spTree>
+    <p:extLst>
+      <p:ext uri="{BB962C8B-B14F-4D97-AF65-F5344CB8AC3E}">
+        <p14:creationId xmlns:p14="http://schemas.microsoft.com/office/powerpoint/2010/main" val="1024086991"/>
+      </p:ext>
+    </p:extLst>
+  </p:cSld>
+  <p:clrMapOvr>
+    <a:masterClrMapping/>
+  </p:clrMapOvr>
+</p:notes>
+</file>
+
+<file path=ppt/notesSlides/notesSlide23.xml><?xml version="1.0" encoding="utf-8"?>
+<p:notes xmlns:a="http://schemas.openxmlformats.org/drawingml/2006/main" xmlns:r="http://schemas.openxmlformats.org/officeDocument/2006/relationships" xmlns:p="http://schemas.openxmlformats.org/presentationml/2006/main">
+  <p:cSld>
+    <p:spTree>
+      <p:nvGrpSpPr>
+        <p:cNvPr id="1" name=""/>
+        <p:cNvGrpSpPr/>
+        <p:nvPr/>
+      </p:nvGrpSpPr>
+      <p:grpSpPr>
+        <a:xfrm>
+          <a:off x="0" y="0"/>
+          <a:ext cx="0" cy="0"/>
+          <a:chOff x="0" y="0"/>
+          <a:chExt cx="0" cy="0"/>
+        </a:xfrm>
+      </p:grpSpPr>
+      <p:sp>
+        <p:nvSpPr>
+          <p:cNvPr id="2" name="Slide Image Placeholder 1"/>
+          <p:cNvSpPr>
+            <a:spLocks noGrp="1" noRot="1" noChangeAspect="1"/>
+          </p:cNvSpPr>
+          <p:nvPr>
+            <p:ph type="sldImg"/>
+          </p:nvPr>
+        </p:nvSpPr>
+        <p:spPr/>
+      </p:sp>
+      <p:sp>
+        <p:nvSpPr>
+          <p:cNvPr id="3" name="Notes Placeholder 2"/>
+          <p:cNvSpPr>
+            <a:spLocks noGrp="1"/>
+          </p:cNvSpPr>
+          <p:nvPr>
+            <p:ph type="body" idx="1"/>
+          </p:nvPr>
+        </p:nvSpPr>
+        <p:spPr/>
+        <p:txBody>
+          <a:bodyPr/>
+          <a:lstStyle/>
+          <a:p>
+            <a:r>
+              <a:rPr lang="en-US" dirty="0"/>
+              <a:t>Dernière phrase. On laisse la diapo affichée pendant la sortie.</a:t>
+            </a:r>
+            <a:endParaRPr lang="en-US" dirty="0"/>
+          </a:p>
+        </p:txBody>
+      </p:sp>
+      <p:sp>
+        <p:nvSpPr>
+          <p:cNvPr id="4" name="Slide Number Placeholder 3"/>
+          <p:cNvSpPr>
+            <a:spLocks noGrp="1"/>
+          </p:cNvSpPr>
+          <p:nvPr>
+            <p:ph type="sldNum" sz="quarter" idx="10"/>
+          </p:nvPr>
+        </p:nvSpPr>
+        <p:spPr/>
+        <p:txBody>
+          <a:bodyPr/>
+          <a:lstStyle/>
+          <a:p>
+            <a:fld id="{F7021451-1387-4CA6-816F-3879F97B5CBC}" type="slidenum">
+              <a:rPr lang="en-US"/>
+              <a:t>23</a:t>
             </a:fld>
             <a:endParaRPr lang="en-US"/>
           </a:p>
@@ -6650,7 +6739,7 @@
                 <a:ea typeface="Calibri" pitchFamily="34" charset="-122"/>
                 <a:cs typeface="Calibri" pitchFamily="34" charset="-120"/>
               </a:rPr>
-              <a:t>COMPARER, PUIS DÉCIDER</a:t>
+              <a:t>LES OPÉRATEURS</a:t>
             </a:r>
             <a:endParaRPr lang="en-US" sz="4000" dirty="0"/>
           </a:p>
@@ -6689,7 +6778,7 @@
                 <a:ea typeface="Calibri" pitchFamily="34" charset="-122"/>
                 <a:cs typeface="Calibri" pitchFamily="34" charset="-120"/>
               </a:rPr>
-              <a:t>Le moment où votre programme se met à réfléchir.</a:t>
+              <a:t>Les petits signes qui travaillent — et celui qui fait décider.</a:t>
             </a:r>
             <a:endParaRPr lang="en-US" sz="1900" dirty="0"/>
           </a:p>
@@ -7009,13 +7098,13 @@
             <a:r>
               <a:rPr lang="en-US" sz="1300" b="1" spc="300" kern="0" dirty="0">
                 <a:solidFill>
-                  <a:srgbClr val="13678F"/>
+                  <a:srgbClr val="6B2D8F"/>
                 </a:solidFill>
                 <a:latin typeface="Calibri" pitchFamily="34" charset="0"/>
                 <a:ea typeface="Calibri" pitchFamily="34" charset="-122"/>
                 <a:cs typeface="Calibri" pitchFamily="34" charset="-120"/>
               </a:rPr>
-              <a:t>COMPARER</a:t>
+              <a:t>LE MOT DU JOUR</a:t>
             </a:r>
             <a:endParaRPr lang="en-US" sz="1300" dirty="0"/>
           </a:p>
@@ -7057,6 +7146,1261 @@
                 <a:ea typeface="Calibri" pitchFamily="34" charset="-122"/>
                 <a:cs typeface="Calibri" pitchFamily="34" charset="-120"/>
               </a:rPr>
+              <a:t>Un opérateur travaille sur ce qui l'entoure.</a:t>
+            </a:r>
+            <a:endParaRPr lang="en-US" sz="4000" dirty="0"/>
+          </a:p>
+        </p:txBody>
+      </p:sp>
+      <p:sp>
+        <p:nvSpPr>
+          <p:cNvPr id="14" name="Shape 12"/>
+          <p:cNvSpPr/>
+          <p:nvPr/>
+        </p:nvSpPr>
+        <p:spPr>
+          <a:xfrm>
+            <a:off x="640080" y="2057400"/>
+            <a:ext cx="5257800" cy="3200400"/>
+          </a:xfrm>
+          <a:prstGeom prst="roundRect">
+            <a:avLst>
+              <a:gd name="adj" fmla="val 2286"/>
+            </a:avLst>
+          </a:prstGeom>
+          <a:solidFill>
+            <a:srgbClr val="E8F4FD"/>
+          </a:solidFill>
+          <a:ln w="19050">
+            <a:solidFill>
+              <a:srgbClr val="B3DDF5"/>
+            </a:solidFill>
+            <a:prstDash val="solid"/>
+          </a:ln>
+          <a:effectLst>
+            <a:outerShdw sx="100000" sy="100000" kx="0" ky="0" algn="bl" rotWithShape="0" blurRad="127000" dist="25400" dir="5400000">
+              <a:srgbClr val="20204A">
+                <a:alpha val="12000"/>
+              </a:srgbClr>
+            </a:outerShdw>
+          </a:effectLst>
+        </p:spPr>
+      </p:sp>
+      <p:sp>
+        <p:nvSpPr>
+          <p:cNvPr id="15" name="Text 13"/>
+          <p:cNvSpPr txBox="1"/>
+          <p:nvPr/>
+        </p:nvSpPr>
+        <p:spPr>
+          <a:xfrm>
+            <a:off x="914400" y="2240280"/>
+            <a:ext cx="4709160" cy="365760"/>
+          </a:xfrm>
+          <a:prstGeom prst="rect">
+            <a:avLst/>
+          </a:prstGeom>
+          <a:noFill/>
+          <a:ln/>
+        </p:spPr>
+        <p:txBody>
+          <a:bodyPr wrap="square" lIns="0" tIns="0" rIns="0" bIns="0" rtlCol="0" anchor="t"/>
+          <a:lstStyle/>
+          <a:p>
+            <a:pPr indent="0" marL="0">
+              <a:buNone/>
+            </a:pPr>
+            <a:r>
+              <a:rPr lang="en-US" sz="1300" b="1" spc="200" kern="0" dirty="0">
+                <a:solidFill>
+                  <a:srgbClr val="13678F"/>
+                </a:solidFill>
+                <a:latin typeface="Calibri" pitchFamily="34" charset="0"/>
+                <a:ea typeface="Calibri" pitchFamily="34" charset="-122"/>
+                <a:cs typeface="Calibri" pitchFamily="34" charset="-120"/>
+              </a:rPr>
+              <a:t>LES OPÉRATEURS DE CALCUL</a:t>
+            </a:r>
+            <a:endParaRPr lang="en-US" sz="1300" dirty="0"/>
+          </a:p>
+        </p:txBody>
+      </p:sp>
+      <p:sp>
+        <p:nvSpPr>
+          <p:cNvPr id="16" name="Text 14"/>
+          <p:cNvSpPr txBox="1"/>
+          <p:nvPr/>
+        </p:nvSpPr>
+        <p:spPr>
+          <a:xfrm>
+            <a:off x="914400" y="2743200"/>
+            <a:ext cx="1600200" cy="411480"/>
+          </a:xfrm>
+          <a:prstGeom prst="rect">
+            <a:avLst/>
+          </a:prstGeom>
+          <a:noFill/>
+          <a:ln/>
+        </p:spPr>
+        <p:txBody>
+          <a:bodyPr wrap="square" lIns="0" tIns="0" rIns="0" bIns="0" rtlCol="0" anchor="t"/>
+          <a:lstStyle/>
+          <a:p>
+            <a:pPr indent="0" marL="0">
+              <a:buNone/>
+            </a:pPr>
+            <a:r>
+              <a:rPr lang="en-US" sz="1900" b="1" dirty="0">
+                <a:solidFill>
+                  <a:srgbClr val="14142B"/>
+                </a:solidFill>
+                <a:latin typeface="Courier New" pitchFamily="34" charset="0"/>
+                <a:ea typeface="Courier New" pitchFamily="34" charset="-122"/>
+                <a:cs typeface="Courier New" pitchFamily="34" charset="-120"/>
+              </a:rPr>
+              <a:t>+</a:t>
+            </a:r>
+            <a:endParaRPr lang="en-US" sz="1900" dirty="0"/>
+          </a:p>
+        </p:txBody>
+      </p:sp>
+      <p:sp>
+        <p:nvSpPr>
+          <p:cNvPr id="17" name="Text 15"/>
+          <p:cNvSpPr txBox="1"/>
+          <p:nvPr/>
+        </p:nvSpPr>
+        <p:spPr>
+          <a:xfrm>
+            <a:off x="2560320" y="2816352"/>
+            <a:ext cx="3063240" cy="411480"/>
+          </a:xfrm>
+          <a:prstGeom prst="rect">
+            <a:avLst/>
+          </a:prstGeom>
+          <a:noFill/>
+          <a:ln/>
+        </p:spPr>
+        <p:txBody>
+          <a:bodyPr wrap="square" lIns="0" tIns="0" rIns="0" bIns="0" rtlCol="0" anchor="t"/>
+          <a:lstStyle/>
+          <a:p>
+            <a:pPr indent="0" marL="0">
+              <a:buNone/>
+            </a:pPr>
+            <a:r>
+              <a:rPr lang="en-US" sz="1300" dirty="0">
+                <a:solidFill>
+                  <a:srgbClr val="5A5A72"/>
+                </a:solidFill>
+                <a:latin typeface="Calibri" pitchFamily="34" charset="0"/>
+                <a:ea typeface="Calibri" pitchFamily="34" charset="-122"/>
+                <a:cs typeface="Calibri" pitchFamily="34" charset="-120"/>
+              </a:rPr>
+              <a:t>additionner, ou coller du texte</a:t>
+            </a:r>
+            <a:endParaRPr lang="en-US" sz="1300" dirty="0"/>
+          </a:p>
+        </p:txBody>
+      </p:sp>
+      <p:sp>
+        <p:nvSpPr>
+          <p:cNvPr id="18" name="Text 16"/>
+          <p:cNvSpPr txBox="1"/>
+          <p:nvPr/>
+        </p:nvSpPr>
+        <p:spPr>
+          <a:xfrm>
+            <a:off x="914400" y="3310128"/>
+            <a:ext cx="1600200" cy="411480"/>
+          </a:xfrm>
+          <a:prstGeom prst="rect">
+            <a:avLst/>
+          </a:prstGeom>
+          <a:noFill/>
+          <a:ln/>
+        </p:spPr>
+        <p:txBody>
+          <a:bodyPr wrap="square" lIns="0" tIns="0" rIns="0" bIns="0" rtlCol="0" anchor="t"/>
+          <a:lstStyle/>
+          <a:p>
+            <a:pPr indent="0" marL="0">
+              <a:buNone/>
+            </a:pPr>
+            <a:r>
+              <a:rPr lang="en-US" sz="1900" b="1" dirty="0">
+                <a:solidFill>
+                  <a:srgbClr val="14142B"/>
+                </a:solidFill>
+                <a:latin typeface="Courier New" pitchFamily="34" charset="0"/>
+                <a:ea typeface="Courier New" pitchFamily="34" charset="-122"/>
+                <a:cs typeface="Courier New" pitchFamily="34" charset="-120"/>
+              </a:rPr>
+              <a:t>-</a:t>
+            </a:r>
+            <a:endParaRPr lang="en-US" sz="1900" dirty="0"/>
+          </a:p>
+        </p:txBody>
+      </p:sp>
+      <p:sp>
+        <p:nvSpPr>
+          <p:cNvPr id="19" name="Text 17"/>
+          <p:cNvSpPr txBox="1"/>
+          <p:nvPr/>
+        </p:nvSpPr>
+        <p:spPr>
+          <a:xfrm>
+            <a:off x="2560320" y="3383280"/>
+            <a:ext cx="3063240" cy="411480"/>
+          </a:xfrm>
+          <a:prstGeom prst="rect">
+            <a:avLst/>
+          </a:prstGeom>
+          <a:noFill/>
+          <a:ln/>
+        </p:spPr>
+        <p:txBody>
+          <a:bodyPr wrap="square" lIns="0" tIns="0" rIns="0" bIns="0" rtlCol="0" anchor="t"/>
+          <a:lstStyle/>
+          <a:p>
+            <a:pPr indent="0" marL="0">
+              <a:buNone/>
+            </a:pPr>
+            <a:r>
+              <a:rPr lang="en-US" sz="1300" dirty="0">
+                <a:solidFill>
+                  <a:srgbClr val="5A5A72"/>
+                </a:solidFill>
+                <a:latin typeface="Calibri" pitchFamily="34" charset="0"/>
+                <a:ea typeface="Calibri" pitchFamily="34" charset="-122"/>
+                <a:cs typeface="Calibri" pitchFamily="34" charset="-120"/>
+              </a:rPr>
+              <a:t>soustraire</a:t>
+            </a:r>
+            <a:endParaRPr lang="en-US" sz="1300" dirty="0"/>
+          </a:p>
+        </p:txBody>
+      </p:sp>
+      <p:sp>
+        <p:nvSpPr>
+          <p:cNvPr id="20" name="Text 18"/>
+          <p:cNvSpPr txBox="1"/>
+          <p:nvPr/>
+        </p:nvSpPr>
+        <p:spPr>
+          <a:xfrm>
+            <a:off x="914400" y="3877056"/>
+            <a:ext cx="1600200" cy="411480"/>
+          </a:xfrm>
+          <a:prstGeom prst="rect">
+            <a:avLst/>
+          </a:prstGeom>
+          <a:noFill/>
+          <a:ln/>
+        </p:spPr>
+        <p:txBody>
+          <a:bodyPr wrap="square" lIns="0" tIns="0" rIns="0" bIns="0" rtlCol="0" anchor="t"/>
+          <a:lstStyle/>
+          <a:p>
+            <a:pPr indent="0" marL="0">
+              <a:buNone/>
+            </a:pPr>
+            <a:r>
+              <a:rPr lang="en-US" sz="1900" b="1" dirty="0">
+                <a:solidFill>
+                  <a:srgbClr val="14142B"/>
+                </a:solidFill>
+                <a:latin typeface="Courier New" pitchFamily="34" charset="0"/>
+                <a:ea typeface="Courier New" pitchFamily="34" charset="-122"/>
+                <a:cs typeface="Courier New" pitchFamily="34" charset="-120"/>
+              </a:rPr>
+              <a:t>*</a:t>
+            </a:r>
+            <a:endParaRPr lang="en-US" sz="1900" dirty="0"/>
+          </a:p>
+        </p:txBody>
+      </p:sp>
+      <p:sp>
+        <p:nvSpPr>
+          <p:cNvPr id="21" name="Text 19"/>
+          <p:cNvSpPr txBox="1"/>
+          <p:nvPr/>
+        </p:nvSpPr>
+        <p:spPr>
+          <a:xfrm>
+            <a:off x="2560320" y="3950208"/>
+            <a:ext cx="3063240" cy="411480"/>
+          </a:xfrm>
+          <a:prstGeom prst="rect">
+            <a:avLst/>
+          </a:prstGeom>
+          <a:noFill/>
+          <a:ln/>
+        </p:spPr>
+        <p:txBody>
+          <a:bodyPr wrap="square" lIns="0" tIns="0" rIns="0" bIns="0" rtlCol="0" anchor="t"/>
+          <a:lstStyle/>
+          <a:p>
+            <a:pPr indent="0" marL="0">
+              <a:buNone/>
+            </a:pPr>
+            <a:r>
+              <a:rPr lang="en-US" sz="1300" dirty="0">
+                <a:solidFill>
+                  <a:srgbClr val="5A5A72"/>
+                </a:solidFill>
+                <a:latin typeface="Calibri" pitchFamily="34" charset="0"/>
+                <a:ea typeface="Calibri" pitchFamily="34" charset="-122"/>
+                <a:cs typeface="Calibri" pitchFamily="34" charset="-120"/>
+              </a:rPr>
+              <a:t>multiplier</a:t>
+            </a:r>
+            <a:endParaRPr lang="en-US" sz="1300" dirty="0"/>
+          </a:p>
+        </p:txBody>
+      </p:sp>
+      <p:sp>
+        <p:nvSpPr>
+          <p:cNvPr id="22" name="Text 20"/>
+          <p:cNvSpPr txBox="1"/>
+          <p:nvPr/>
+        </p:nvSpPr>
+        <p:spPr>
+          <a:xfrm>
+            <a:off x="914400" y="4443984"/>
+            <a:ext cx="1600200" cy="411480"/>
+          </a:xfrm>
+          <a:prstGeom prst="rect">
+            <a:avLst/>
+          </a:prstGeom>
+          <a:noFill/>
+          <a:ln/>
+        </p:spPr>
+        <p:txBody>
+          <a:bodyPr wrap="square" lIns="0" tIns="0" rIns="0" bIns="0" rtlCol="0" anchor="t"/>
+          <a:lstStyle/>
+          <a:p>
+            <a:pPr indent="0" marL="0">
+              <a:buNone/>
+            </a:pPr>
+            <a:r>
+              <a:rPr lang="en-US" sz="1900" b="1" dirty="0">
+                <a:solidFill>
+                  <a:srgbClr val="14142B"/>
+                </a:solidFill>
+                <a:latin typeface="Courier New" pitchFamily="34" charset="0"/>
+                <a:ea typeface="Courier New" pitchFamily="34" charset="-122"/>
+                <a:cs typeface="Courier New" pitchFamily="34" charset="-120"/>
+              </a:rPr>
+              <a:t>/</a:t>
+            </a:r>
+            <a:endParaRPr lang="en-US" sz="1900" dirty="0"/>
+          </a:p>
+        </p:txBody>
+      </p:sp>
+      <p:sp>
+        <p:nvSpPr>
+          <p:cNvPr id="23" name="Text 21"/>
+          <p:cNvSpPr txBox="1"/>
+          <p:nvPr/>
+        </p:nvSpPr>
+        <p:spPr>
+          <a:xfrm>
+            <a:off x="2560320" y="4517136"/>
+            <a:ext cx="3063240" cy="411480"/>
+          </a:xfrm>
+          <a:prstGeom prst="rect">
+            <a:avLst/>
+          </a:prstGeom>
+          <a:noFill/>
+          <a:ln/>
+        </p:spPr>
+        <p:txBody>
+          <a:bodyPr wrap="square" lIns="0" tIns="0" rIns="0" bIns="0" rtlCol="0" anchor="t"/>
+          <a:lstStyle/>
+          <a:p>
+            <a:pPr indent="0" marL="0">
+              <a:buNone/>
+            </a:pPr>
+            <a:r>
+              <a:rPr lang="en-US" sz="1300" dirty="0">
+                <a:solidFill>
+                  <a:srgbClr val="5A5A72"/>
+                </a:solidFill>
+                <a:latin typeface="Calibri" pitchFamily="34" charset="0"/>
+                <a:ea typeface="Calibri" pitchFamily="34" charset="-122"/>
+                <a:cs typeface="Calibri" pitchFamily="34" charset="-120"/>
+              </a:rPr>
+              <a:t>diviser</a:t>
+            </a:r>
+            <a:endParaRPr lang="en-US" sz="1300" dirty="0"/>
+          </a:p>
+        </p:txBody>
+      </p:sp>
+      <p:sp>
+        <p:nvSpPr>
+          <p:cNvPr id="24" name="Text 22"/>
+          <p:cNvSpPr txBox="1"/>
+          <p:nvPr/>
+        </p:nvSpPr>
+        <p:spPr>
+          <a:xfrm>
+            <a:off x="914400" y="4956048"/>
+            <a:ext cx="4709160" cy="320040"/>
+          </a:xfrm>
+          <a:prstGeom prst="rect">
+            <a:avLst/>
+          </a:prstGeom>
+          <a:noFill/>
+          <a:ln/>
+        </p:spPr>
+        <p:txBody>
+          <a:bodyPr wrap="square" lIns="0" tIns="0" rIns="0" bIns="0" rtlCol="0" anchor="t"/>
+          <a:lstStyle/>
+          <a:p>
+            <a:pPr indent="0" marL="0">
+              <a:buNone/>
+            </a:pPr>
+            <a:r>
+              <a:rPr lang="en-US" sz="1300" b="1" dirty="0">
+                <a:solidFill>
+                  <a:srgbClr val="13678F"/>
+                </a:solidFill>
+                <a:latin typeface="Calibri" pitchFamily="34" charset="0"/>
+                <a:ea typeface="Calibri" pitchFamily="34" charset="-122"/>
+                <a:cs typeface="Calibri" pitchFamily="34" charset="-120"/>
+              </a:rPr>
+              <a:t>Ils donnent un RÉSULTAT :  7, 12, 2.5</a:t>
+            </a:r>
+            <a:endParaRPr lang="en-US" sz="1300" dirty="0"/>
+          </a:p>
+        </p:txBody>
+      </p:sp>
+      <p:sp>
+        <p:nvSpPr>
+          <p:cNvPr id="25" name="Shape 23"/>
+          <p:cNvSpPr/>
+          <p:nvPr/>
+        </p:nvSpPr>
+        <p:spPr>
+          <a:xfrm>
+            <a:off x="6263640" y="2057400"/>
+            <a:ext cx="5257800" cy="3200400"/>
+          </a:xfrm>
+          <a:prstGeom prst="roundRect">
+            <a:avLst>
+              <a:gd name="adj" fmla="val 2286"/>
+            </a:avLst>
+          </a:prstGeom>
+          <a:solidFill>
+            <a:srgbClr val="F3E9FA"/>
+          </a:solidFill>
+          <a:ln w="19050">
+            <a:solidFill>
+              <a:srgbClr val="D9B8EC"/>
+            </a:solidFill>
+            <a:prstDash val="solid"/>
+          </a:ln>
+          <a:effectLst>
+            <a:outerShdw sx="100000" sy="100000" kx="0" ky="0" algn="bl" rotWithShape="0" blurRad="127000" dist="25400" dir="5400000">
+              <a:srgbClr val="20204A">
+                <a:alpha val="12000"/>
+              </a:srgbClr>
+            </a:outerShdw>
+          </a:effectLst>
+        </p:spPr>
+      </p:sp>
+      <p:sp>
+        <p:nvSpPr>
+          <p:cNvPr id="26" name="Text 24"/>
+          <p:cNvSpPr txBox="1"/>
+          <p:nvPr/>
+        </p:nvSpPr>
+        <p:spPr>
+          <a:xfrm>
+            <a:off x="6537960" y="2240280"/>
+            <a:ext cx="4709160" cy="365760"/>
+          </a:xfrm>
+          <a:prstGeom prst="rect">
+            <a:avLst/>
+          </a:prstGeom>
+          <a:noFill/>
+          <a:ln/>
+        </p:spPr>
+        <p:txBody>
+          <a:bodyPr wrap="square" lIns="0" tIns="0" rIns="0" bIns="0" rtlCol="0" anchor="t"/>
+          <a:lstStyle/>
+          <a:p>
+            <a:pPr indent="0" marL="0">
+              <a:buNone/>
+            </a:pPr>
+            <a:r>
+              <a:rPr lang="en-US" sz="1300" b="1" spc="200" kern="0" dirty="0">
+                <a:solidFill>
+                  <a:srgbClr val="6B2D8F"/>
+                </a:solidFill>
+                <a:latin typeface="Calibri" pitchFamily="34" charset="0"/>
+                <a:ea typeface="Calibri" pitchFamily="34" charset="-122"/>
+                <a:cs typeface="Calibri" pitchFamily="34" charset="-120"/>
+              </a:rPr>
+              <a:t>LES OPÉRATEURS DE COMPARAISON</a:t>
+            </a:r>
+            <a:endParaRPr lang="en-US" sz="1300" dirty="0"/>
+          </a:p>
+        </p:txBody>
+      </p:sp>
+      <p:sp>
+        <p:nvSpPr>
+          <p:cNvPr id="27" name="Text 25"/>
+          <p:cNvSpPr txBox="1"/>
+          <p:nvPr/>
+        </p:nvSpPr>
+        <p:spPr>
+          <a:xfrm>
+            <a:off x="6537960" y="2743200"/>
+            <a:ext cx="1600200" cy="411480"/>
+          </a:xfrm>
+          <a:prstGeom prst="rect">
+            <a:avLst/>
+          </a:prstGeom>
+          <a:noFill/>
+          <a:ln/>
+        </p:spPr>
+        <p:txBody>
+          <a:bodyPr wrap="square" lIns="0" tIns="0" rIns="0" bIns="0" rtlCol="0" anchor="t"/>
+          <a:lstStyle/>
+          <a:p>
+            <a:pPr indent="0" marL="0">
+              <a:buNone/>
+            </a:pPr>
+            <a:r>
+              <a:rPr lang="en-US" sz="1900" b="1" dirty="0">
+                <a:solidFill>
+                  <a:srgbClr val="14142B"/>
+                </a:solidFill>
+                <a:latin typeface="Courier New" pitchFamily="34" charset="0"/>
+                <a:ea typeface="Courier New" pitchFamily="34" charset="-122"/>
+                <a:cs typeface="Courier New" pitchFamily="34" charset="-120"/>
+              </a:rPr>
+              <a:t>&gt;   &lt;</a:t>
+            </a:r>
+            <a:endParaRPr lang="en-US" sz="1900" dirty="0"/>
+          </a:p>
+        </p:txBody>
+      </p:sp>
+      <p:sp>
+        <p:nvSpPr>
+          <p:cNvPr id="28" name="Text 26"/>
+          <p:cNvSpPr txBox="1"/>
+          <p:nvPr/>
+        </p:nvSpPr>
+        <p:spPr>
+          <a:xfrm>
+            <a:off x="8183880" y="2816352"/>
+            <a:ext cx="3063240" cy="411480"/>
+          </a:xfrm>
+          <a:prstGeom prst="rect">
+            <a:avLst/>
+          </a:prstGeom>
+          <a:noFill/>
+          <a:ln/>
+        </p:spPr>
+        <p:txBody>
+          <a:bodyPr wrap="square" lIns="0" tIns="0" rIns="0" bIns="0" rtlCol="0" anchor="t"/>
+          <a:lstStyle/>
+          <a:p>
+            <a:pPr indent="0" marL="0">
+              <a:buNone/>
+            </a:pPr>
+            <a:r>
+              <a:rPr lang="en-US" sz="1300" dirty="0">
+                <a:solidFill>
+                  <a:srgbClr val="5A5A72"/>
+                </a:solidFill>
+                <a:latin typeface="Calibri" pitchFamily="34" charset="0"/>
+                <a:ea typeface="Calibri" pitchFamily="34" charset="-122"/>
+                <a:cs typeface="Calibri" pitchFamily="34" charset="-120"/>
+              </a:rPr>
+              <a:t>plus grand que · plus petit que</a:t>
+            </a:r>
+            <a:endParaRPr lang="en-US" sz="1300" dirty="0"/>
+          </a:p>
+        </p:txBody>
+      </p:sp>
+      <p:sp>
+        <p:nvSpPr>
+          <p:cNvPr id="29" name="Text 27"/>
+          <p:cNvSpPr txBox="1"/>
+          <p:nvPr/>
+        </p:nvSpPr>
+        <p:spPr>
+          <a:xfrm>
+            <a:off x="6537960" y="3310128"/>
+            <a:ext cx="1600200" cy="411480"/>
+          </a:xfrm>
+          <a:prstGeom prst="rect">
+            <a:avLst/>
+          </a:prstGeom>
+          <a:noFill/>
+          <a:ln/>
+        </p:spPr>
+        <p:txBody>
+          <a:bodyPr wrap="square" lIns="0" tIns="0" rIns="0" bIns="0" rtlCol="0" anchor="t"/>
+          <a:lstStyle/>
+          <a:p>
+            <a:pPr indent="0" marL="0">
+              <a:buNone/>
+            </a:pPr>
+            <a:r>
+              <a:rPr lang="en-US" sz="1900" b="1" dirty="0">
+                <a:solidFill>
+                  <a:srgbClr val="14142B"/>
+                </a:solidFill>
+                <a:latin typeface="Courier New" pitchFamily="34" charset="0"/>
+                <a:ea typeface="Courier New" pitchFamily="34" charset="-122"/>
+                <a:cs typeface="Courier New" pitchFamily="34" charset="-120"/>
+              </a:rPr>
+              <a:t>&gt;=   &lt;=</a:t>
+            </a:r>
+            <a:endParaRPr lang="en-US" sz="1900" dirty="0"/>
+          </a:p>
+        </p:txBody>
+      </p:sp>
+      <p:sp>
+        <p:nvSpPr>
+          <p:cNvPr id="30" name="Text 28"/>
+          <p:cNvSpPr txBox="1"/>
+          <p:nvPr/>
+        </p:nvSpPr>
+        <p:spPr>
+          <a:xfrm>
+            <a:off x="8183880" y="3383280"/>
+            <a:ext cx="3063240" cy="411480"/>
+          </a:xfrm>
+          <a:prstGeom prst="rect">
+            <a:avLst/>
+          </a:prstGeom>
+          <a:noFill/>
+          <a:ln/>
+        </p:spPr>
+        <p:txBody>
+          <a:bodyPr wrap="square" lIns="0" tIns="0" rIns="0" bIns="0" rtlCol="0" anchor="t"/>
+          <a:lstStyle/>
+          <a:p>
+            <a:pPr indent="0" marL="0">
+              <a:buNone/>
+            </a:pPr>
+            <a:r>
+              <a:rPr lang="en-US" sz="1300" dirty="0">
+                <a:solidFill>
+                  <a:srgbClr val="5A5A72"/>
+                </a:solidFill>
+                <a:latin typeface="Calibri" pitchFamily="34" charset="0"/>
+                <a:ea typeface="Calibri" pitchFamily="34" charset="-122"/>
+                <a:cs typeface="Calibri" pitchFamily="34" charset="-120"/>
+              </a:rPr>
+              <a:t>plus grand ou égal · plus petit ou égal</a:t>
+            </a:r>
+            <a:endParaRPr lang="en-US" sz="1300" dirty="0"/>
+          </a:p>
+        </p:txBody>
+      </p:sp>
+      <p:sp>
+        <p:nvSpPr>
+          <p:cNvPr id="31" name="Text 29"/>
+          <p:cNvSpPr txBox="1"/>
+          <p:nvPr/>
+        </p:nvSpPr>
+        <p:spPr>
+          <a:xfrm>
+            <a:off x="6537960" y="3877056"/>
+            <a:ext cx="1600200" cy="411480"/>
+          </a:xfrm>
+          <a:prstGeom prst="rect">
+            <a:avLst/>
+          </a:prstGeom>
+          <a:noFill/>
+          <a:ln/>
+        </p:spPr>
+        <p:txBody>
+          <a:bodyPr wrap="square" lIns="0" tIns="0" rIns="0" bIns="0" rtlCol="0" anchor="t"/>
+          <a:lstStyle/>
+          <a:p>
+            <a:pPr indent="0" marL="0">
+              <a:buNone/>
+            </a:pPr>
+            <a:r>
+              <a:rPr lang="en-US" sz="1900" b="1" dirty="0">
+                <a:solidFill>
+                  <a:srgbClr val="14142B"/>
+                </a:solidFill>
+                <a:latin typeface="Courier New" pitchFamily="34" charset="0"/>
+                <a:ea typeface="Courier New" pitchFamily="34" charset="-122"/>
+                <a:cs typeface="Courier New" pitchFamily="34" charset="-120"/>
+              </a:rPr>
+              <a:t>==</a:t>
+            </a:r>
+            <a:endParaRPr lang="en-US" sz="1900" dirty="0"/>
+          </a:p>
+        </p:txBody>
+      </p:sp>
+      <p:sp>
+        <p:nvSpPr>
+          <p:cNvPr id="32" name="Text 30"/>
+          <p:cNvSpPr txBox="1"/>
+          <p:nvPr/>
+        </p:nvSpPr>
+        <p:spPr>
+          <a:xfrm>
+            <a:off x="8183880" y="3950208"/>
+            <a:ext cx="3063240" cy="411480"/>
+          </a:xfrm>
+          <a:prstGeom prst="rect">
+            <a:avLst/>
+          </a:prstGeom>
+          <a:noFill/>
+          <a:ln/>
+        </p:spPr>
+        <p:txBody>
+          <a:bodyPr wrap="square" lIns="0" tIns="0" rIns="0" bIns="0" rtlCol="0" anchor="t"/>
+          <a:lstStyle/>
+          <a:p>
+            <a:pPr indent="0" marL="0">
+              <a:buNone/>
+            </a:pPr>
+            <a:r>
+              <a:rPr lang="en-US" sz="1300" dirty="0">
+                <a:solidFill>
+                  <a:srgbClr val="5A5A72"/>
+                </a:solidFill>
+                <a:latin typeface="Calibri" pitchFamily="34" charset="0"/>
+                <a:ea typeface="Calibri" pitchFamily="34" charset="-122"/>
+                <a:cs typeface="Calibri" pitchFamily="34" charset="-120"/>
+              </a:rPr>
+              <a:t>est égal à</a:t>
+            </a:r>
+            <a:endParaRPr lang="en-US" sz="1300" dirty="0"/>
+          </a:p>
+        </p:txBody>
+      </p:sp>
+      <p:sp>
+        <p:nvSpPr>
+          <p:cNvPr id="33" name="Text 31"/>
+          <p:cNvSpPr txBox="1"/>
+          <p:nvPr/>
+        </p:nvSpPr>
+        <p:spPr>
+          <a:xfrm>
+            <a:off x="6537960" y="4443984"/>
+            <a:ext cx="1600200" cy="411480"/>
+          </a:xfrm>
+          <a:prstGeom prst="rect">
+            <a:avLst/>
+          </a:prstGeom>
+          <a:noFill/>
+          <a:ln/>
+        </p:spPr>
+        <p:txBody>
+          <a:bodyPr wrap="square" lIns="0" tIns="0" rIns="0" bIns="0" rtlCol="0" anchor="t"/>
+          <a:lstStyle/>
+          <a:p>
+            <a:pPr indent="0" marL="0">
+              <a:buNone/>
+            </a:pPr>
+            <a:r>
+              <a:rPr lang="en-US" sz="1900" b="1" dirty="0">
+                <a:solidFill>
+                  <a:srgbClr val="14142B"/>
+                </a:solidFill>
+                <a:latin typeface="Courier New" pitchFamily="34" charset="0"/>
+                <a:ea typeface="Courier New" pitchFamily="34" charset="-122"/>
+                <a:cs typeface="Courier New" pitchFamily="34" charset="-120"/>
+              </a:rPr>
+              <a:t>!=</a:t>
+            </a:r>
+            <a:endParaRPr lang="en-US" sz="1900" dirty="0"/>
+          </a:p>
+        </p:txBody>
+      </p:sp>
+      <p:sp>
+        <p:nvSpPr>
+          <p:cNvPr id="34" name="Text 32"/>
+          <p:cNvSpPr txBox="1"/>
+          <p:nvPr/>
+        </p:nvSpPr>
+        <p:spPr>
+          <a:xfrm>
+            <a:off x="8183880" y="4517136"/>
+            <a:ext cx="3063240" cy="411480"/>
+          </a:xfrm>
+          <a:prstGeom prst="rect">
+            <a:avLst/>
+          </a:prstGeom>
+          <a:noFill/>
+          <a:ln/>
+        </p:spPr>
+        <p:txBody>
+          <a:bodyPr wrap="square" lIns="0" tIns="0" rIns="0" bIns="0" rtlCol="0" anchor="t"/>
+          <a:lstStyle/>
+          <a:p>
+            <a:pPr indent="0" marL="0">
+              <a:buNone/>
+            </a:pPr>
+            <a:r>
+              <a:rPr lang="en-US" sz="1300" dirty="0">
+                <a:solidFill>
+                  <a:srgbClr val="5A5A72"/>
+                </a:solidFill>
+                <a:latin typeface="Calibri" pitchFamily="34" charset="0"/>
+                <a:ea typeface="Calibri" pitchFamily="34" charset="-122"/>
+                <a:cs typeface="Calibri" pitchFamily="34" charset="-120"/>
+              </a:rPr>
+              <a:t>est différent de</a:t>
+            </a:r>
+            <a:endParaRPr lang="en-US" sz="1300" dirty="0"/>
+          </a:p>
+        </p:txBody>
+      </p:sp>
+      <p:sp>
+        <p:nvSpPr>
+          <p:cNvPr id="35" name="Text 33"/>
+          <p:cNvSpPr txBox="1"/>
+          <p:nvPr/>
+        </p:nvSpPr>
+        <p:spPr>
+          <a:xfrm>
+            <a:off x="6537960" y="4956048"/>
+            <a:ext cx="4709160" cy="320040"/>
+          </a:xfrm>
+          <a:prstGeom prst="rect">
+            <a:avLst/>
+          </a:prstGeom>
+          <a:noFill/>
+          <a:ln/>
+        </p:spPr>
+        <p:txBody>
+          <a:bodyPr wrap="square" lIns="0" tIns="0" rIns="0" bIns="0" rtlCol="0" anchor="t"/>
+          <a:lstStyle/>
+          <a:p>
+            <a:pPr indent="0" marL="0">
+              <a:buNone/>
+            </a:pPr>
+            <a:r>
+              <a:rPr lang="en-US" sz="1300" b="1" dirty="0">
+                <a:solidFill>
+                  <a:srgbClr val="6B2D8F"/>
+                </a:solidFill>
+                <a:latin typeface="Calibri" pitchFamily="34" charset="0"/>
+                <a:ea typeface="Calibri" pitchFamily="34" charset="-122"/>
+                <a:cs typeface="Calibri" pitchFamily="34" charset="-120"/>
+              </a:rPr>
+              <a:t>Ils donnent une RÉPONSE :  True ou False</a:t>
+            </a:r>
+            <a:endParaRPr lang="en-US" sz="1300" dirty="0"/>
+          </a:p>
+        </p:txBody>
+      </p:sp>
+      <p:sp>
+        <p:nvSpPr>
+          <p:cNvPr id="36" name="Text 34"/>
+          <p:cNvSpPr txBox="1"/>
+          <p:nvPr/>
+        </p:nvSpPr>
+        <p:spPr>
+          <a:xfrm>
+            <a:off x="640080" y="5440680"/>
+            <a:ext cx="10881360" cy="640080"/>
+          </a:xfrm>
+          <a:prstGeom prst="rect">
+            <a:avLst/>
+          </a:prstGeom>
+          <a:noFill/>
+          <a:ln/>
+        </p:spPr>
+        <p:txBody>
+          <a:bodyPr wrap="square" lIns="0" tIns="0" rIns="0" bIns="0" rtlCol="0" anchor="t"/>
+          <a:lstStyle/>
+          <a:p>
+            <a:pPr indent="0" marL="0">
+              <a:buNone/>
+            </a:pPr>
+            <a:r>
+              <a:rPr lang="en-US" sz="2100" b="1" dirty="0">
+                <a:solidFill>
+                  <a:srgbClr val="6B2D8F"/>
+                </a:solidFill>
+                <a:latin typeface="Calibri" pitchFamily="34" charset="0"/>
+                <a:ea typeface="Calibri" pitchFamily="34" charset="-122"/>
+                <a:cs typeface="Calibri" pitchFamily="34" charset="-120"/>
+              </a:rPr>
+              <a:t>Les uns donnent un résultat. Les autres donnent une réponse.</a:t>
+            </a:r>
+            <a:endParaRPr lang="en-US" sz="2100" dirty="0"/>
+          </a:p>
+        </p:txBody>
+      </p:sp>
+    </p:spTree>
+  </p:cSld>
+  <p:clrMapOvr>
+    <a:masterClrMapping/>
+  </p:clrMapOvr>
+</p:sld>
+</file>
+
+<file path=ppt/slides/slide16.xml><?xml version="1.0" encoding="utf-8"?>
+<p:sld xmlns:a="http://schemas.openxmlformats.org/drawingml/2006/main" xmlns:r="http://schemas.openxmlformats.org/officeDocument/2006/relationships" xmlns:p="http://schemas.openxmlformats.org/presentationml/2006/main">
+  <p:cSld name="Slide 16">
+    <p:bg>
+      <p:bgPr>
+        <a:solidFill>
+          <a:srgbClr val="F7F7FB"/>
+        </a:solidFill>
+      </p:bgPr>
+    </p:bg>
+    <p:spTree>
+      <p:nvGrpSpPr>
+        <p:cNvPr id="1" name=""/>
+        <p:cNvGrpSpPr/>
+        <p:nvPr/>
+      </p:nvGrpSpPr>
+      <p:grpSpPr>
+        <a:xfrm>
+          <a:off x="0" y="0"/>
+          <a:ext cx="0" cy="0"/>
+          <a:chOff x="0" y="0"/>
+          <a:chExt cx="0" cy="0"/>
+        </a:xfrm>
+      </p:grpSpPr>
+      <p:sp>
+        <p:nvSpPr>
+          <p:cNvPr id="2" name="Text 0"/>
+          <p:cNvSpPr txBox="1"/>
+          <p:nvPr/>
+        </p:nvSpPr>
+        <p:spPr>
+          <a:xfrm>
+            <a:off x="9509760" y="6181344"/>
+            <a:ext cx="2011680" cy="310896"/>
+          </a:xfrm>
+          <a:prstGeom prst="rect">
+            <a:avLst/>
+          </a:prstGeom>
+          <a:noFill/>
+          <a:ln/>
+        </p:spPr>
+        <p:txBody>
+          <a:bodyPr wrap="square" lIns="0" tIns="0" rIns="0" bIns="0" rtlCol="0" anchor="ctr"/>
+          <a:lstStyle/>
+          <a:p>
+            <a:pPr algn="r" indent="0" marL="0">
+              <a:buNone/>
+            </a:pPr>
+            <a:r>
+              <a:rPr lang="en-US" sz="1100" dirty="0">
+                <a:solidFill>
+                  <a:srgbClr val="5A5A72"/>
+                </a:solidFill>
+                <a:latin typeface="Courier New" pitchFamily="34" charset="0"/>
+                <a:ea typeface="Courier New" pitchFamily="34" charset="-122"/>
+                <a:cs typeface="Courier New" pitchFamily="34" charset="-120"/>
+              </a:rPr>
+              <a:t>13 h 12</a:t>
+            </a:r>
+            <a:endParaRPr lang="en-US" sz="1100" dirty="0"/>
+          </a:p>
+        </p:txBody>
+      </p:sp>
+      <p:sp>
+        <p:nvSpPr>
+          <p:cNvPr id="3" name="Shape 1"/>
+          <p:cNvSpPr/>
+          <p:nvPr/>
+        </p:nvSpPr>
+        <p:spPr>
+          <a:xfrm>
+            <a:off x="11558016" y="6217920"/>
+            <a:ext cx="68580" cy="68580"/>
+          </a:xfrm>
+          <a:prstGeom prst="roundRect">
+            <a:avLst>
+              <a:gd name="adj" fmla="val 26667"/>
+            </a:avLst>
+          </a:prstGeom>
+          <a:solidFill>
+            <a:srgbClr val="6B2D8F">
+              <a:alpha val="30000"/>
+            </a:srgbClr>
+          </a:solidFill>
+          <a:ln/>
+        </p:spPr>
+      </p:sp>
+      <p:sp>
+        <p:nvSpPr>
+          <p:cNvPr id="4" name="Shape 2"/>
+          <p:cNvSpPr/>
+          <p:nvPr/>
+        </p:nvSpPr>
+        <p:spPr>
+          <a:xfrm>
+            <a:off x="11650599" y="6217920"/>
+            <a:ext cx="68580" cy="68580"/>
+          </a:xfrm>
+          <a:prstGeom prst="roundRect">
+            <a:avLst>
+              <a:gd name="adj" fmla="val 26667"/>
+            </a:avLst>
+          </a:prstGeom>
+          <a:solidFill>
+            <a:srgbClr val="6B2D8F">
+              <a:alpha val="30000"/>
+            </a:srgbClr>
+          </a:solidFill>
+          <a:ln/>
+        </p:spPr>
+      </p:sp>
+      <p:sp>
+        <p:nvSpPr>
+          <p:cNvPr id="5" name="Shape 3"/>
+          <p:cNvSpPr/>
+          <p:nvPr/>
+        </p:nvSpPr>
+        <p:spPr>
+          <a:xfrm>
+            <a:off x="11743182" y="6217920"/>
+            <a:ext cx="68580" cy="68580"/>
+          </a:xfrm>
+          <a:prstGeom prst="roundRect">
+            <a:avLst>
+              <a:gd name="adj" fmla="val 26667"/>
+            </a:avLst>
+          </a:prstGeom>
+          <a:solidFill>
+            <a:srgbClr val="6B2D8F">
+              <a:alpha val="30000"/>
+            </a:srgbClr>
+          </a:solidFill>
+          <a:ln/>
+        </p:spPr>
+      </p:sp>
+      <p:sp>
+        <p:nvSpPr>
+          <p:cNvPr id="6" name="Shape 4"/>
+          <p:cNvSpPr/>
+          <p:nvPr/>
+        </p:nvSpPr>
+        <p:spPr>
+          <a:xfrm>
+            <a:off x="11558016" y="6310503"/>
+            <a:ext cx="68580" cy="68580"/>
+          </a:xfrm>
+          <a:prstGeom prst="roundRect">
+            <a:avLst>
+              <a:gd name="adj" fmla="val 26667"/>
+            </a:avLst>
+          </a:prstGeom>
+          <a:solidFill>
+            <a:srgbClr val="6B2D8F">
+              <a:alpha val="30000"/>
+            </a:srgbClr>
+          </a:solidFill>
+          <a:ln/>
+        </p:spPr>
+      </p:sp>
+      <p:sp>
+        <p:nvSpPr>
+          <p:cNvPr id="7" name="Shape 5"/>
+          <p:cNvSpPr/>
+          <p:nvPr/>
+        </p:nvSpPr>
+        <p:spPr>
+          <a:xfrm>
+            <a:off x="11650599" y="6310503"/>
+            <a:ext cx="68580" cy="68580"/>
+          </a:xfrm>
+          <a:prstGeom prst="roundRect">
+            <a:avLst>
+              <a:gd name="adj" fmla="val 26667"/>
+            </a:avLst>
+          </a:prstGeom>
+          <a:solidFill>
+            <a:srgbClr val="6B2D8F">
+              <a:alpha val="30000"/>
+            </a:srgbClr>
+          </a:solidFill>
+          <a:ln/>
+        </p:spPr>
+      </p:sp>
+      <p:sp>
+        <p:nvSpPr>
+          <p:cNvPr id="8" name="Shape 6"/>
+          <p:cNvSpPr/>
+          <p:nvPr/>
+        </p:nvSpPr>
+        <p:spPr>
+          <a:xfrm>
+            <a:off x="11743182" y="6310503"/>
+            <a:ext cx="68580" cy="68580"/>
+          </a:xfrm>
+          <a:prstGeom prst="roundRect">
+            <a:avLst>
+              <a:gd name="adj" fmla="val 26667"/>
+            </a:avLst>
+          </a:prstGeom>
+          <a:solidFill>
+            <a:srgbClr val="6B2D8F">
+              <a:alpha val="30000"/>
+            </a:srgbClr>
+          </a:solidFill>
+          <a:ln/>
+        </p:spPr>
+      </p:sp>
+      <p:sp>
+        <p:nvSpPr>
+          <p:cNvPr id="9" name="Shape 7"/>
+          <p:cNvSpPr/>
+          <p:nvPr/>
+        </p:nvSpPr>
+        <p:spPr>
+          <a:xfrm>
+            <a:off x="11558016" y="6403086"/>
+            <a:ext cx="68580" cy="68580"/>
+          </a:xfrm>
+          <a:prstGeom prst="roundRect">
+            <a:avLst>
+              <a:gd name="adj" fmla="val 26667"/>
+            </a:avLst>
+          </a:prstGeom>
+          <a:solidFill>
+            <a:srgbClr val="6B2D8F">
+              <a:alpha val="30000"/>
+            </a:srgbClr>
+          </a:solidFill>
+          <a:ln/>
+        </p:spPr>
+      </p:sp>
+      <p:sp>
+        <p:nvSpPr>
+          <p:cNvPr id="10" name="Shape 8"/>
+          <p:cNvSpPr/>
+          <p:nvPr/>
+        </p:nvSpPr>
+        <p:spPr>
+          <a:xfrm>
+            <a:off x="11650599" y="6403086"/>
+            <a:ext cx="68580" cy="68580"/>
+          </a:xfrm>
+          <a:prstGeom prst="roundRect">
+            <a:avLst>
+              <a:gd name="adj" fmla="val 26667"/>
+            </a:avLst>
+          </a:prstGeom>
+          <a:solidFill>
+            <a:srgbClr val="6B2D8F">
+              <a:alpha val="30000"/>
+            </a:srgbClr>
+          </a:solidFill>
+          <a:ln/>
+        </p:spPr>
+      </p:sp>
+      <p:sp>
+        <p:nvSpPr>
+          <p:cNvPr id="11" name="Shape 9"/>
+          <p:cNvSpPr/>
+          <p:nvPr/>
+        </p:nvSpPr>
+        <p:spPr>
+          <a:xfrm>
+            <a:off x="11743182" y="6403086"/>
+            <a:ext cx="68580" cy="68580"/>
+          </a:xfrm>
+          <a:prstGeom prst="roundRect">
+            <a:avLst>
+              <a:gd name="adj" fmla="val 26667"/>
+            </a:avLst>
+          </a:prstGeom>
+          <a:solidFill>
+            <a:srgbClr val="6B2D8F">
+              <a:alpha val="30000"/>
+            </a:srgbClr>
+          </a:solidFill>
+          <a:ln/>
+        </p:spPr>
+      </p:sp>
+      <p:sp>
+        <p:nvSpPr>
+          <p:cNvPr id="12" name="Text 10"/>
+          <p:cNvSpPr txBox="1"/>
+          <p:nvPr/>
+        </p:nvSpPr>
+        <p:spPr>
+          <a:xfrm>
+            <a:off x="640080" y="457200"/>
+            <a:ext cx="10881360" cy="310896"/>
+          </a:xfrm>
+          <a:prstGeom prst="rect">
+            <a:avLst/>
+          </a:prstGeom>
+          <a:noFill/>
+          <a:ln/>
+        </p:spPr>
+        <p:txBody>
+          <a:bodyPr wrap="square" lIns="0" tIns="0" rIns="0" bIns="0" rtlCol="0" anchor="ctr"/>
+          <a:lstStyle/>
+          <a:p>
+            <a:pPr indent="0" marL="0">
+              <a:buNone/>
+            </a:pPr>
+            <a:r>
+              <a:rPr lang="en-US" sz="1300" b="1" spc="300" kern="0" dirty="0">
+                <a:solidFill>
+                  <a:srgbClr val="13678F"/>
+                </a:solidFill>
+                <a:latin typeface="Calibri" pitchFamily="34" charset="0"/>
+                <a:ea typeface="Calibri" pitchFamily="34" charset="-122"/>
+                <a:cs typeface="Calibri" pitchFamily="34" charset="-120"/>
+              </a:rPr>
+              <a:t>ON LES ESSAIE</a:t>
+            </a:r>
+            <a:endParaRPr lang="en-US" sz="1300" dirty="0"/>
+          </a:p>
+        </p:txBody>
+      </p:sp>
+      <p:sp>
+        <p:nvSpPr>
+          <p:cNvPr id="13" name="Text 11"/>
+          <p:cNvSpPr txBox="1"/>
+          <p:nvPr/>
+        </p:nvSpPr>
+        <p:spPr>
+          <a:xfrm>
+            <a:off x="640080" y="868680"/>
+            <a:ext cx="10881360" cy="914400"/>
+          </a:xfrm>
+          <a:prstGeom prst="rect">
+            <a:avLst/>
+          </a:prstGeom>
+          <a:noFill/>
+          <a:ln/>
+        </p:spPr>
+        <p:txBody>
+          <a:bodyPr wrap="square" lIns="0" tIns="0" rIns="0" bIns="0" rtlCol="0" anchor="t"/>
+          <a:lstStyle/>
+          <a:p>
+            <a:pPr indent="0" marL="0">
+              <a:lnSpc>
+                <a:spcPts val="4400"/>
+              </a:lnSpc>
+              <a:buNone/>
+            </a:pPr>
+            <a:r>
+              <a:rPr lang="en-US" sz="4000" b="1" dirty="0">
+                <a:solidFill>
+                  <a:srgbClr val="14142B"/>
+                </a:solidFill>
+                <a:latin typeface="Calibri" pitchFamily="34" charset="0"/>
+                <a:ea typeface="Calibri" pitchFamily="34" charset="-122"/>
+                <a:cs typeface="Calibri" pitchFamily="34" charset="-120"/>
+              </a:rPr>
               <a:t>Une question qui n'a que deux réponses.</a:t>
             </a:r>
             <a:endParaRPr lang="en-US" sz="4000" dirty="0"/>
@@ -7121,7 +8465,7 @@
                 <a:ea typeface="Courier New" pitchFamily="34" charset="-122"/>
                 <a:cs typeface="Courier New" pitchFamily="34" charset="-120"/>
               </a:rPr>
-              <a:t>print(5 &gt; 3)      print(5 == 5)</a:t>
+              <a:t>print(5 &gt; 3)      print(5 &gt;= 5)</a:t>
             </a:r>
             <a:endParaRPr lang="en-US" sz="2100" dirty="0"/>
           </a:p>
@@ -7525,9 +8869,9 @@
 </p:sld>
 </file>
 
-<file path=ppt/slides/slide16.xml><?xml version="1.0" encoding="utf-8"?>
+<file path=ppt/slides/slide17.xml><?xml version="1.0" encoding="utf-8"?>
 <p:sld xmlns:a="http://schemas.openxmlformats.org/drawingml/2006/main" xmlns:r="http://schemas.openxmlformats.org/officeDocument/2006/relationships" xmlns:p="http://schemas.openxmlformats.org/presentationml/2006/main">
-  <p:cSld name="Slide 16">
+  <p:cSld name="Slide 17">
     <p:bg>
       <p:bgPr>
         <a:solidFill>
@@ -8076,7 +9420,7 @@
                 <a:ea typeface="Calibri" pitchFamily="34" charset="-122"/>
                 <a:cs typeface="Calibri" pitchFamily="34" charset="-120"/>
               </a:rPr>
-              <a:t>DEUX  ==</a:t>
+              <a:t>L'OPÉRATEUR  ==</a:t>
             </a:r>
             <a:endParaRPr lang="en-US" sz="1500" dirty="0"/>
           </a:p>
@@ -8168,9 +9512,9 @@
 </p:sld>
 </file>
 
-<file path=ppt/slides/slide17.xml><?xml version="1.0" encoding="utf-8"?>
+<file path=ppt/slides/slide18.xml><?xml version="1.0" encoding="utf-8"?>
 <p:sld xmlns:a="http://schemas.openxmlformats.org/drawingml/2006/main" xmlns:r="http://schemas.openxmlformats.org/officeDocument/2006/relationships" xmlns:p="http://schemas.openxmlformats.org/presentationml/2006/main">
-  <p:cSld name="Slide 17">
+  <p:cSld name="Slide 18">
     <p:bg>
       <p:bgPr>
         <a:solidFill>
@@ -9064,9 +10408,9 @@
 </p:sld>
 </file>
 
-<file path=ppt/slides/slide18.xml><?xml version="1.0" encoding="utf-8"?>
+<file path=ppt/slides/slide19.xml><?xml version="1.0" encoding="utf-8"?>
 <p:sld xmlns:a="http://schemas.openxmlformats.org/drawingml/2006/main" xmlns:r="http://schemas.openxmlformats.org/officeDocument/2006/relationships" xmlns:p="http://schemas.openxmlformats.org/presentationml/2006/main">
-  <p:cSld name="Slide 18">
+  <p:cSld name="Slide 19">
     <p:bg>
       <p:bgPr>
         <a:solidFill>
@@ -9630,723 +10974,6 @@
               <a:t>Sans le décalage, il ne sait pas ce qui appartient au if. »</a:t>
             </a:r>
             <a:endParaRPr lang="en-US" sz="2100" dirty="0"/>
-          </a:p>
-        </p:txBody>
-      </p:sp>
-    </p:spTree>
-  </p:cSld>
-  <p:clrMapOvr>
-    <a:masterClrMapping/>
-  </p:clrMapOvr>
-</p:sld>
-</file>
-
-<file path=ppt/slides/slide19.xml><?xml version="1.0" encoding="utf-8"?>
-<p:sld xmlns:a="http://schemas.openxmlformats.org/drawingml/2006/main" xmlns:r="http://schemas.openxmlformats.org/officeDocument/2006/relationships" xmlns:p="http://schemas.openxmlformats.org/presentationml/2006/main">
-  <p:cSld name="Slide 19">
-    <p:bg>
-      <p:bgPr>
-        <a:solidFill>
-          <a:srgbClr val="F7F7FB"/>
-        </a:solidFill>
-      </p:bgPr>
-    </p:bg>
-    <p:spTree>
-      <p:nvGrpSpPr>
-        <p:cNvPr id="1" name=""/>
-        <p:cNvGrpSpPr/>
-        <p:nvPr/>
-      </p:nvGrpSpPr>
-      <p:grpSpPr>
-        <a:xfrm>
-          <a:off x="0" y="0"/>
-          <a:ext cx="0" cy="0"/>
-          <a:chOff x="0" y="0"/>
-          <a:chExt cx="0" cy="0"/>
-        </a:xfrm>
-      </p:grpSpPr>
-      <p:sp>
-        <p:nvSpPr>
-          <p:cNvPr id="2" name="Text 0"/>
-          <p:cNvSpPr txBox="1"/>
-          <p:nvPr/>
-        </p:nvSpPr>
-        <p:spPr>
-          <a:xfrm>
-            <a:off x="9509760" y="6181344"/>
-            <a:ext cx="2011680" cy="310896"/>
-          </a:xfrm>
-          <a:prstGeom prst="rect">
-            <a:avLst/>
-          </a:prstGeom>
-          <a:noFill/>
-          <a:ln/>
-        </p:spPr>
-        <p:txBody>
-          <a:bodyPr wrap="square" lIns="0" tIns="0" rIns="0" bIns="0" rtlCol="0" anchor="ctr"/>
-          <a:lstStyle/>
-          <a:p>
-            <a:pPr algn="r" indent="0" marL="0">
-              <a:buNone/>
-            </a:pPr>
-            <a:r>
-              <a:rPr lang="en-US" sz="1100" dirty="0">
-                <a:solidFill>
-                  <a:srgbClr val="5A5A72"/>
-                </a:solidFill>
-                <a:latin typeface="Courier New" pitchFamily="34" charset="0"/>
-                <a:ea typeface="Courier New" pitchFamily="34" charset="-122"/>
-                <a:cs typeface="Courier New" pitchFamily="34" charset="-120"/>
-              </a:rPr>
-              <a:t>13 h 30</a:t>
-            </a:r>
-            <a:endParaRPr lang="en-US" sz="1100" dirty="0"/>
-          </a:p>
-        </p:txBody>
-      </p:sp>
-      <p:sp>
-        <p:nvSpPr>
-          <p:cNvPr id="3" name="Shape 1"/>
-          <p:cNvSpPr/>
-          <p:nvPr/>
-        </p:nvSpPr>
-        <p:spPr>
-          <a:xfrm>
-            <a:off x="11558016" y="6217920"/>
-            <a:ext cx="68580" cy="68580"/>
-          </a:xfrm>
-          <a:prstGeom prst="roundRect">
-            <a:avLst>
-              <a:gd name="adj" fmla="val 26667"/>
-            </a:avLst>
-          </a:prstGeom>
-          <a:solidFill>
-            <a:srgbClr val="6B2D8F">
-              <a:alpha val="30000"/>
-            </a:srgbClr>
-          </a:solidFill>
-          <a:ln/>
-        </p:spPr>
-      </p:sp>
-      <p:sp>
-        <p:nvSpPr>
-          <p:cNvPr id="4" name="Shape 2"/>
-          <p:cNvSpPr/>
-          <p:nvPr/>
-        </p:nvSpPr>
-        <p:spPr>
-          <a:xfrm>
-            <a:off x="11650599" y="6217920"/>
-            <a:ext cx="68580" cy="68580"/>
-          </a:xfrm>
-          <a:prstGeom prst="roundRect">
-            <a:avLst>
-              <a:gd name="adj" fmla="val 26667"/>
-            </a:avLst>
-          </a:prstGeom>
-          <a:solidFill>
-            <a:srgbClr val="6B2D8F">
-              <a:alpha val="30000"/>
-            </a:srgbClr>
-          </a:solidFill>
-          <a:ln/>
-        </p:spPr>
-      </p:sp>
-      <p:sp>
-        <p:nvSpPr>
-          <p:cNvPr id="5" name="Shape 3"/>
-          <p:cNvSpPr/>
-          <p:nvPr/>
-        </p:nvSpPr>
-        <p:spPr>
-          <a:xfrm>
-            <a:off x="11743182" y="6217920"/>
-            <a:ext cx="68580" cy="68580"/>
-          </a:xfrm>
-          <a:prstGeom prst="roundRect">
-            <a:avLst>
-              <a:gd name="adj" fmla="val 26667"/>
-            </a:avLst>
-          </a:prstGeom>
-          <a:solidFill>
-            <a:srgbClr val="6B2D8F">
-              <a:alpha val="30000"/>
-            </a:srgbClr>
-          </a:solidFill>
-          <a:ln/>
-        </p:spPr>
-      </p:sp>
-      <p:sp>
-        <p:nvSpPr>
-          <p:cNvPr id="6" name="Shape 4"/>
-          <p:cNvSpPr/>
-          <p:nvPr/>
-        </p:nvSpPr>
-        <p:spPr>
-          <a:xfrm>
-            <a:off x="11558016" y="6310503"/>
-            <a:ext cx="68580" cy="68580"/>
-          </a:xfrm>
-          <a:prstGeom prst="roundRect">
-            <a:avLst>
-              <a:gd name="adj" fmla="val 26667"/>
-            </a:avLst>
-          </a:prstGeom>
-          <a:solidFill>
-            <a:srgbClr val="6B2D8F">
-              <a:alpha val="30000"/>
-            </a:srgbClr>
-          </a:solidFill>
-          <a:ln/>
-        </p:spPr>
-      </p:sp>
-      <p:sp>
-        <p:nvSpPr>
-          <p:cNvPr id="7" name="Shape 5"/>
-          <p:cNvSpPr/>
-          <p:nvPr/>
-        </p:nvSpPr>
-        <p:spPr>
-          <a:xfrm>
-            <a:off x="11650599" y="6310503"/>
-            <a:ext cx="68580" cy="68580"/>
-          </a:xfrm>
-          <a:prstGeom prst="roundRect">
-            <a:avLst>
-              <a:gd name="adj" fmla="val 26667"/>
-            </a:avLst>
-          </a:prstGeom>
-          <a:solidFill>
-            <a:srgbClr val="6B2D8F">
-              <a:alpha val="30000"/>
-            </a:srgbClr>
-          </a:solidFill>
-          <a:ln/>
-        </p:spPr>
-      </p:sp>
-      <p:sp>
-        <p:nvSpPr>
-          <p:cNvPr id="8" name="Shape 6"/>
-          <p:cNvSpPr/>
-          <p:nvPr/>
-        </p:nvSpPr>
-        <p:spPr>
-          <a:xfrm>
-            <a:off x="11743182" y="6310503"/>
-            <a:ext cx="68580" cy="68580"/>
-          </a:xfrm>
-          <a:prstGeom prst="roundRect">
-            <a:avLst>
-              <a:gd name="adj" fmla="val 26667"/>
-            </a:avLst>
-          </a:prstGeom>
-          <a:solidFill>
-            <a:srgbClr val="6B2D8F">
-              <a:alpha val="30000"/>
-            </a:srgbClr>
-          </a:solidFill>
-          <a:ln/>
-        </p:spPr>
-      </p:sp>
-      <p:sp>
-        <p:nvSpPr>
-          <p:cNvPr id="9" name="Shape 7"/>
-          <p:cNvSpPr/>
-          <p:nvPr/>
-        </p:nvSpPr>
-        <p:spPr>
-          <a:xfrm>
-            <a:off x="11558016" y="6403086"/>
-            <a:ext cx="68580" cy="68580"/>
-          </a:xfrm>
-          <a:prstGeom prst="roundRect">
-            <a:avLst>
-              <a:gd name="adj" fmla="val 26667"/>
-            </a:avLst>
-          </a:prstGeom>
-          <a:solidFill>
-            <a:srgbClr val="6B2D8F">
-              <a:alpha val="30000"/>
-            </a:srgbClr>
-          </a:solidFill>
-          <a:ln/>
-        </p:spPr>
-      </p:sp>
-      <p:sp>
-        <p:nvSpPr>
-          <p:cNvPr id="10" name="Shape 8"/>
-          <p:cNvSpPr/>
-          <p:nvPr/>
-        </p:nvSpPr>
-        <p:spPr>
-          <a:xfrm>
-            <a:off x="11650599" y="6403086"/>
-            <a:ext cx="68580" cy="68580"/>
-          </a:xfrm>
-          <a:prstGeom prst="roundRect">
-            <a:avLst>
-              <a:gd name="adj" fmla="val 26667"/>
-            </a:avLst>
-          </a:prstGeom>
-          <a:solidFill>
-            <a:srgbClr val="6B2D8F">
-              <a:alpha val="30000"/>
-            </a:srgbClr>
-          </a:solidFill>
-          <a:ln/>
-        </p:spPr>
-      </p:sp>
-      <p:sp>
-        <p:nvSpPr>
-          <p:cNvPr id="11" name="Shape 9"/>
-          <p:cNvSpPr/>
-          <p:nvPr/>
-        </p:nvSpPr>
-        <p:spPr>
-          <a:xfrm>
-            <a:off x="11743182" y="6403086"/>
-            <a:ext cx="68580" cy="68580"/>
-          </a:xfrm>
-          <a:prstGeom prst="roundRect">
-            <a:avLst>
-              <a:gd name="adj" fmla="val 26667"/>
-            </a:avLst>
-          </a:prstGeom>
-          <a:solidFill>
-            <a:srgbClr val="6B2D8F">
-              <a:alpha val="30000"/>
-            </a:srgbClr>
-          </a:solidFill>
-          <a:ln/>
-        </p:spPr>
-      </p:sp>
-      <p:sp>
-        <p:nvSpPr>
-          <p:cNvPr id="12" name="Text 10"/>
-          <p:cNvSpPr txBox="1"/>
-          <p:nvPr/>
-        </p:nvSpPr>
-        <p:spPr>
-          <a:xfrm>
-            <a:off x="640080" y="457200"/>
-            <a:ext cx="10881360" cy="310896"/>
-          </a:xfrm>
-          <a:prstGeom prst="rect">
-            <a:avLst/>
-          </a:prstGeom>
-          <a:noFill/>
-          <a:ln/>
-        </p:spPr>
-        <p:txBody>
-          <a:bodyPr wrap="square" lIns="0" tIns="0" rIns="0" bIns="0" rtlCol="0" anchor="ctr"/>
-          <a:lstStyle/>
-          <a:p>
-            <a:pPr indent="0" marL="0">
-              <a:buNone/>
-            </a:pPr>
-            <a:r>
-              <a:rPr lang="en-US" sz="1300" b="1" spc="300" kern="0" dirty="0">
-                <a:solidFill>
-                  <a:srgbClr val="0C5C29"/>
-                </a:solidFill>
-                <a:latin typeface="Calibri" pitchFamily="34" charset="0"/>
-                <a:ea typeface="Calibri" pitchFamily="34" charset="-122"/>
-                <a:cs typeface="Calibri" pitchFamily="34" charset="-120"/>
-              </a:rPr>
-              <a:t>À VOUS — LE PROJET</a:t>
-            </a:r>
-            <a:endParaRPr lang="en-US" sz="1300" dirty="0"/>
-          </a:p>
-        </p:txBody>
-      </p:sp>
-      <p:sp>
-        <p:nvSpPr>
-          <p:cNvPr id="13" name="Text 11"/>
-          <p:cNvSpPr txBox="1"/>
-          <p:nvPr/>
-        </p:nvSpPr>
-        <p:spPr>
-          <a:xfrm>
-            <a:off x="640080" y="868680"/>
-            <a:ext cx="10881360" cy="914400"/>
-          </a:xfrm>
-          <a:prstGeom prst="rect">
-            <a:avLst/>
-          </a:prstGeom>
-          <a:noFill/>
-          <a:ln/>
-        </p:spPr>
-        <p:txBody>
-          <a:bodyPr wrap="square" lIns="0" tIns="0" rIns="0" bIns="0" rtlCol="0" anchor="t"/>
-          <a:lstStyle/>
-          <a:p>
-            <a:pPr indent="0" marL="0">
-              <a:lnSpc>
-                <a:spcPts val="4400"/>
-              </a:lnSpc>
-              <a:buNone/>
-            </a:pPr>
-            <a:r>
-              <a:rPr lang="en-US" sz="4000" b="1" dirty="0">
-                <a:solidFill>
-                  <a:srgbClr val="14142B"/>
-                </a:solidFill>
-                <a:latin typeface="Calibri" pitchFamily="34" charset="0"/>
-                <a:ea typeface="Calibri" pitchFamily="34" charset="-122"/>
-                <a:cs typeface="Calibri" pitchFamily="34" charset="-120"/>
-              </a:rPr>
-              <a:t>Numéroter, compter… et refuser.</a:t>
-            </a:r>
-            <a:endParaRPr lang="en-US" sz="4000" dirty="0"/>
-          </a:p>
-        </p:txBody>
-      </p:sp>
-      <p:sp>
-        <p:nvSpPr>
-          <p:cNvPr id="14" name="Text 12"/>
-          <p:cNvSpPr txBox="1"/>
-          <p:nvPr/>
-        </p:nvSpPr>
-        <p:spPr>
-          <a:xfrm>
-            <a:off x="640080" y="1755648"/>
-            <a:ext cx="10881360" cy="365760"/>
-          </a:xfrm>
-          <a:prstGeom prst="rect">
-            <a:avLst/>
-          </a:prstGeom>
-          <a:noFill/>
-          <a:ln/>
-        </p:spPr>
-        <p:txBody>
-          <a:bodyPr wrap="square" lIns="0" tIns="0" rIns="0" bIns="0" rtlCol="0" anchor="t"/>
-          <a:lstStyle/>
-          <a:p>
-            <a:pPr indent="0" marL="0">
-              <a:buNone/>
-            </a:pPr>
-            <a:r>
-              <a:rPr lang="en-US" sz="1600" b="1" dirty="0">
-                <a:solidFill>
-                  <a:srgbClr val="0C5C29"/>
-                </a:solidFill>
-                <a:latin typeface="Calibri" pitchFamily="34" charset="0"/>
-                <a:ea typeface="Calibri" pitchFamily="34" charset="-122"/>
-                <a:cs typeface="Calibri" pitchFamily="34" charset="-120"/>
-              </a:rPr>
-              <a:t>Teste les DEUX chemins : une fois la case 5, une fois la case 12.</a:t>
-            </a:r>
-            <a:endParaRPr lang="en-US" sz="1600" dirty="0"/>
-          </a:p>
-        </p:txBody>
-      </p:sp>
-      <p:sp>
-        <p:nvSpPr>
-          <p:cNvPr id="15" name="Shape 13"/>
-          <p:cNvSpPr/>
-          <p:nvPr/>
-        </p:nvSpPr>
-        <p:spPr>
-          <a:xfrm>
-            <a:off x="640080" y="2194560"/>
-            <a:ext cx="10881360" cy="2651760"/>
-          </a:xfrm>
-          <a:prstGeom prst="roundRect">
-            <a:avLst>
-              <a:gd name="adj" fmla="val 2759"/>
-            </a:avLst>
-          </a:prstGeom>
-          <a:solidFill>
-            <a:srgbClr val="12122A"/>
-          </a:solidFill>
-          <a:ln/>
-        </p:spPr>
-      </p:sp>
-      <p:sp>
-        <p:nvSpPr>
-          <p:cNvPr id="16" name="Text 14"/>
-          <p:cNvSpPr txBox="1"/>
-          <p:nvPr/>
-        </p:nvSpPr>
-        <p:spPr>
-          <a:xfrm>
-            <a:off x="960120" y="2423160"/>
-            <a:ext cx="10241280" cy="2194560"/>
-          </a:xfrm>
-          <a:prstGeom prst="rect">
-            <a:avLst/>
-          </a:prstGeom>
-          <a:noFill/>
-          <a:ln/>
-        </p:spPr>
-        <p:txBody>
-          <a:bodyPr wrap="square" lIns="0" tIns="0" rIns="0" bIns="0" rtlCol="0" anchor="t"/>
-          <a:lstStyle/>
-          <a:p>
-            <a:pPr indent="0" marL="0">
-              <a:lnSpc>
-                <a:spcPts val="2100"/>
-              </a:lnSpc>
-              <a:buNone/>
-            </a:pPr>
-            <a:r>
-              <a:rPr lang="en-US" sz="1300" dirty="0">
-                <a:solidFill>
-                  <a:srgbClr val="4FC3F7"/>
-                </a:solidFill>
-                <a:latin typeface="Courier New" pitchFamily="34" charset="0"/>
-                <a:ea typeface="Courier New" pitchFamily="34" charset="-122"/>
-                <a:cs typeface="Courier New" pitchFamily="34" charset="-120"/>
-              </a:rPr>
-              <a:t> 1 | 2 | 3            Joyce, quelle case ? 5</a:t>
-            </a:r>
-            <a:endParaRPr lang="en-US" sz="1300" dirty="0"/>
-          </a:p>
-          <a:p>
-            <a:pPr indent="0" marL="0">
-              <a:lnSpc>
-                <a:spcPts val="2100"/>
-              </a:lnSpc>
-              <a:buNone/>
-            </a:pPr>
-            <a:r>
-              <a:rPr lang="en-US" sz="1300" dirty="0">
-                <a:solidFill>
-                  <a:srgbClr val="4FC3F7"/>
-                </a:solidFill>
-                <a:latin typeface="Courier New" pitchFamily="34" charset="0"/>
-                <a:ea typeface="Courier New" pitchFamily="34" charset="-122"/>
-                <a:cs typeface="Courier New" pitchFamily="34" charset="-120"/>
-              </a:rPr>
-              <a:t>---+---+---           Joyce joue la case 5   (tour numero 1)</a:t>
-            </a:r>
-            <a:endParaRPr lang="en-US" sz="1300" dirty="0"/>
-          </a:p>
-          <a:p>
-            <a:pPr indent="0" marL="0">
-              <a:lnSpc>
-                <a:spcPts val="2100"/>
-              </a:lnSpc>
-              <a:buNone/>
-            </a:pPr>
-            <a:r>
-              <a:rPr lang="en-US" sz="1300" dirty="0">
-                <a:solidFill>
-                  <a:srgbClr val="4FC3F7"/>
-                </a:solidFill>
-                <a:latin typeface="Courier New" pitchFamily="34" charset="0"/>
-                <a:ea typeface="Courier New" pitchFamily="34" charset="-122"/>
-                <a:cs typeface="Courier New" pitchFamily="34" charset="-120"/>
-              </a:rPr>
-              <a:t> 4 | 5 | 6</a:t>
-            </a:r>
-            <a:endParaRPr lang="en-US" sz="1300" dirty="0"/>
-          </a:p>
-          <a:p>
-            <a:pPr indent="0" marL="0">
-              <a:lnSpc>
-                <a:spcPts val="2100"/>
-              </a:lnSpc>
-              <a:buNone/>
-            </a:pPr>
-            <a:r>
-              <a:rPr lang="en-US" sz="1300" dirty="0">
-                <a:solidFill>
-                  <a:srgbClr val="4FC3F7"/>
-                </a:solidFill>
-                <a:latin typeface="Courier New" pitchFamily="34" charset="0"/>
-                <a:ea typeface="Courier New" pitchFamily="34" charset="-122"/>
-                <a:cs typeface="Courier New" pitchFamily="34" charset="-120"/>
-              </a:rPr>
-              <a:t>---+---+---           Gedeon, quelle case ? 12</a:t>
-            </a:r>
-            <a:endParaRPr lang="en-US" sz="1300" dirty="0"/>
-          </a:p>
-          <a:p>
-            <a:pPr indent="0" marL="0">
-              <a:lnSpc>
-                <a:spcPts val="2100"/>
-              </a:lnSpc>
-              <a:buNone/>
-            </a:pPr>
-            <a:r>
-              <a:rPr lang="en-US" sz="1300" dirty="0">
-                <a:solidFill>
-                  <a:srgbClr val="4FC3F7"/>
-                </a:solidFill>
-                <a:latin typeface="Courier New" pitchFamily="34" charset="0"/>
-                <a:ea typeface="Courier New" pitchFamily="34" charset="-122"/>
-                <a:cs typeface="Courier New" pitchFamily="34" charset="-120"/>
-              </a:rPr>
-              <a:t> 7 | 8 | 9            La case 12 n'existe pas ! Choisis entre 1 et 9.</a:t>
-            </a:r>
-            <a:endParaRPr lang="en-US" sz="1300" dirty="0"/>
-          </a:p>
-          <a:p>
-            <a:pPr indent="0" marL="0">
-              <a:lnSpc>
-                <a:spcPts val="2100"/>
-              </a:lnSpc>
-              <a:buNone/>
-            </a:pPr>
-            <a:endParaRPr lang="en-US" sz="1300" dirty="0"/>
-          </a:p>
-          <a:p>
-            <a:pPr indent="0" marL="0">
-              <a:lnSpc>
-                <a:spcPts val="2100"/>
-              </a:lnSpc>
-              <a:buNone/>
-            </a:pPr>
-            <a:r>
-              <a:rPr lang="en-US" sz="1300" dirty="0">
-                <a:solidFill>
-                  <a:srgbClr val="4FC3F7"/>
-                </a:solidFill>
-                <a:latin typeface="Courier New" pitchFamily="34" charset="0"/>
-                <a:ea typeface="Courier New" pitchFamily="34" charset="-122"/>
-                <a:cs typeface="Courier New" pitchFamily="34" charset="-120"/>
-              </a:rPr>
-              <a:t>                      Coups valides joues : 1</a:t>
-            </a:r>
-            <a:endParaRPr lang="en-US" sz="1300" dirty="0"/>
-          </a:p>
-          <a:p>
-            <a:pPr indent="0" marL="0">
-              <a:lnSpc>
-                <a:spcPts val="2100"/>
-              </a:lnSpc>
-              <a:buNone/>
-            </a:pPr>
-            <a:r>
-              <a:rPr lang="en-US" sz="1300" dirty="0">
-                <a:solidFill>
-                  <a:srgbClr val="4FC3F7"/>
-                </a:solidFill>
-                <a:latin typeface="Courier New" pitchFamily="34" charset="0"/>
-                <a:ea typeface="Courier New" pitchFamily="34" charset="-122"/>
-                <a:cs typeface="Courier New" pitchFamily="34" charset="-120"/>
-              </a:rPr>
-              <a:t>                      Il reste 8 cases libres.</a:t>
-            </a:r>
-            <a:endParaRPr lang="en-US" sz="1300" dirty="0"/>
-          </a:p>
-        </p:txBody>
-      </p:sp>
-      <p:sp>
-        <p:nvSpPr>
-          <p:cNvPr id="17" name="Text 15"/>
-          <p:cNvSpPr txBox="1"/>
-          <p:nvPr/>
-        </p:nvSpPr>
-        <p:spPr>
-          <a:xfrm>
-            <a:off x="640080" y="4983480"/>
-            <a:ext cx="10881360" cy="365760"/>
-          </a:xfrm>
-          <a:prstGeom prst="rect">
-            <a:avLst/>
-          </a:prstGeom>
-          <a:noFill/>
-          <a:ln/>
-        </p:spPr>
-        <p:txBody>
-          <a:bodyPr wrap="square" lIns="0" tIns="0" rIns="0" bIns="0" rtlCol="0" anchor="t"/>
-          <a:lstStyle/>
-          <a:p>
-            <a:pPr indent="0" marL="0">
-              <a:buNone/>
-            </a:pPr>
-            <a:r>
-              <a:rPr lang="en-US" sz="1400" dirty="0">
-                <a:solidFill>
-                  <a:srgbClr val="14142B"/>
-                </a:solidFill>
-                <a:latin typeface="Calibri" pitchFamily="34" charset="0"/>
-                <a:ea typeface="Calibri" pitchFamily="34" charset="-122"/>
-                <a:cs typeface="Calibri" pitchFamily="34" charset="-120"/>
-              </a:rPr>
-              <a:t>PARTIE 1   ① ton prénom   ② les numéros 1 à 9 dans la grille      → carte verte, tu m'attends</a:t>
-            </a:r>
-            <a:endParaRPr lang="en-US" sz="1400" dirty="0"/>
-          </a:p>
-        </p:txBody>
-      </p:sp>
-      <p:sp>
-        <p:nvSpPr>
-          <p:cNvPr id="18" name="Text 16"/>
-          <p:cNvSpPr txBox="1"/>
-          <p:nvPr/>
-        </p:nvSpPr>
-        <p:spPr>
-          <a:xfrm>
-            <a:off x="640080" y="5367528"/>
-            <a:ext cx="10881360" cy="365760"/>
-          </a:xfrm>
-          <a:prstGeom prst="rect">
-            <a:avLst/>
-          </a:prstGeom>
-          <a:noFill/>
-          <a:ln/>
-        </p:spPr>
-        <p:txBody>
-          <a:bodyPr wrap="square" lIns="0" tIns="0" rIns="0" bIns="0" rtlCol="0" anchor="t"/>
-          <a:lstStyle/>
-          <a:p>
-            <a:pPr indent="0" marL="0">
-              <a:buNone/>
-            </a:pPr>
-            <a:r>
-              <a:rPr lang="en-US" sz="1400" dirty="0">
-                <a:solidFill>
-                  <a:srgbClr val="14142B"/>
-                </a:solidFill>
-                <a:latin typeface="Calibri" pitchFamily="34" charset="0"/>
-                <a:ea typeface="Calibri" pitchFamily="34" charset="-122"/>
-                <a:cs typeface="Calibri" pitchFamily="34" charset="-120"/>
-              </a:rPr>
-              <a:t>PARTIE 2   ③ tour = 0   ④ la case devient un nombre   ⑤ ajoute 1   → carte verte, tu m'attends</a:t>
-            </a:r>
-            <a:endParaRPr lang="en-US" sz="1400" dirty="0"/>
-          </a:p>
-        </p:txBody>
-      </p:sp>
-      <p:sp>
-        <p:nvSpPr>
-          <p:cNvPr id="19" name="Text 17"/>
-          <p:cNvSpPr txBox="1"/>
-          <p:nvPr/>
-        </p:nvSpPr>
-        <p:spPr>
-          <a:xfrm>
-            <a:off x="640080" y="5751576"/>
-            <a:ext cx="10881360" cy="365760"/>
-          </a:xfrm>
-          <a:prstGeom prst="rect">
-            <a:avLst/>
-          </a:prstGeom>
-          <a:noFill/>
-          <a:ln/>
-        </p:spPr>
-        <p:txBody>
-          <a:bodyPr wrap="square" lIns="0" tIns="0" rIns="0" bIns="0" rtlCol="0" anchor="t"/>
-          <a:lstStyle/>
-          <a:p>
-            <a:pPr indent="0" marL="0">
-              <a:buNone/>
-            </a:pPr>
-            <a:r>
-              <a:rPr lang="en-US" sz="1400" b="1" dirty="0">
-                <a:solidFill>
-                  <a:srgbClr val="14142B"/>
-                </a:solidFill>
-                <a:latin typeface="Calibri" pitchFamily="34" charset="0"/>
-                <a:ea typeface="Calibri" pitchFamily="34" charset="-122"/>
-                <a:cs typeface="Calibri" pitchFamily="34" charset="-120"/>
-              </a:rPr>
-              <a:t>PARTIE 3   ⑥ le if / else : la case au-dessus de 9 est refusée   ⑦ le joueur 2   ⑧ le bilan</a:t>
-            </a:r>
-            <a:endParaRPr lang="en-US" sz="1400" dirty="0"/>
           </a:p>
         </p:txBody>
       </p:sp>
@@ -10819,7 +11446,7 @@
                 <a:ea typeface="Courier New" pitchFamily="34" charset="-122"/>
                 <a:cs typeface="Courier New" pitchFamily="34" charset="-120"/>
               </a:rPr>
-              <a:t>13 h 32</a:t>
+              <a:t>13 h 30</a:t>
             </a:r>
             <a:endParaRPr lang="en-US" sz="1100" dirty="0"/>
           </a:p>
@@ -11068,13 +11695,13 @@
             <a:r>
               <a:rPr lang="en-US" sz="1300" b="1" spc="300" kern="0" dirty="0">
                 <a:solidFill>
-                  <a:srgbClr val="A65D00"/>
+                  <a:srgbClr val="0C5C29"/>
                 </a:solidFill>
                 <a:latin typeface="Calibri" pitchFamily="34" charset="0"/>
                 <a:ea typeface="Calibri" pitchFamily="34" charset="-122"/>
                 <a:cs typeface="Calibri" pitchFamily="34" charset="-120"/>
               </a:rPr>
-              <a:t>SI L'ÉCRAN DEVIENT ROUGE</a:t>
+              <a:t>À VOUS — LE PROJET</a:t>
             </a:r>
             <a:endParaRPr lang="en-US" sz="1300" dirty="0"/>
           </a:p>
@@ -11116,7 +11743,7 @@
                 <a:ea typeface="Calibri" pitchFamily="34" charset="-122"/>
                 <a:cs typeface="Calibri" pitchFamily="34" charset="-120"/>
               </a:rPr>
-              <a:t>Les erreurs du jour.</a:t>
+              <a:t>Numéroter, compter… et refuser.</a:t>
             </a:r>
             <a:endParaRPr lang="en-US" sz="4000" dirty="0"/>
           </a:p>
@@ -11130,7 +11757,7 @@
         </p:nvSpPr>
         <p:spPr>
           <a:xfrm>
-            <a:off x="640080" y="1783080"/>
+            <a:off x="640080" y="1755648"/>
             <a:ext cx="10881360" cy="365760"/>
           </a:xfrm>
           <a:prstGeom prst="rect">
@@ -11149,13 +11776,13 @@
             <a:r>
               <a:rPr lang="en-US" sz="1600" b="1" dirty="0">
                 <a:solidFill>
-                  <a:srgbClr val="A65D00"/>
+                  <a:srgbClr val="0C5C29"/>
                 </a:solidFill>
                 <a:latin typeface="Calibri" pitchFamily="34" charset="0"/>
                 <a:ea typeface="Calibri" pitchFamily="34" charset="-122"/>
                 <a:cs typeface="Calibri" pitchFamily="34" charset="-120"/>
               </a:rPr>
-              <a:t>Le rouge est une information. Lis-le, il te dit où chercher.</a:t>
+              <a:t>Teste les DEUX chemins : une fois la case 5, une fois la case 12.</a:t>
             </a:r>
             <a:endParaRPr lang="en-US" sz="1600" dirty="0"/>
           </a:p>
@@ -11169,30 +11796,18 @@
         </p:nvSpPr>
         <p:spPr>
           <a:xfrm>
-            <a:off x="640080" y="2212848"/>
-            <a:ext cx="10881360" cy="475488"/>
-          </a:xfrm>
-          <a:prstGeom prst="roundRect">
-            <a:avLst>
-              <a:gd name="adj" fmla="val 15385"/>
-            </a:avLst>
-          </a:prstGeom>
-          <a:solidFill>
-            <a:srgbClr val="FFFFFF"/>
-          </a:solidFill>
-          <a:ln w="19050">
-            <a:solidFill>
-              <a:srgbClr val="E4E4EE"/>
-            </a:solidFill>
-            <a:prstDash val="solid"/>
-          </a:ln>
-          <a:effectLst>
-            <a:outerShdw sx="100000" sy="100000" kx="0" ky="0" algn="bl" rotWithShape="0" blurRad="127000" dist="25400" dir="5400000">
-              <a:srgbClr val="20204A">
-                <a:alpha val="12000"/>
-              </a:srgbClr>
-            </a:outerShdw>
-          </a:effectLst>
+            <a:off x="640080" y="2194560"/>
+            <a:ext cx="10881360" cy="2651760"/>
+          </a:xfrm>
+          <a:prstGeom prst="roundRect">
+            <a:avLst>
+              <a:gd name="adj" fmla="val 2759"/>
+            </a:avLst>
+          </a:prstGeom>
+          <a:solidFill>
+            <a:srgbClr val="12122A"/>
+          </a:solidFill>
+          <a:ln/>
         </p:spPr>
       </p:sp>
       <p:sp>
@@ -11203,8 +11818,8 @@
         </p:nvSpPr>
         <p:spPr>
           <a:xfrm>
-            <a:off x="914400" y="2313432"/>
-            <a:ext cx="3200400" cy="320040"/>
+            <a:off x="960120" y="2423160"/>
+            <a:ext cx="10241280" cy="2194560"/>
           </a:xfrm>
           <a:prstGeom prst="rect">
             <a:avLst/>
@@ -11217,20 +11832,152 @@
           <a:lstStyle/>
           <a:p>
             <a:pPr indent="0" marL="0">
-              <a:buNone/>
-            </a:pPr>
-            <a:r>
-              <a:rPr lang="en-US" sz="1400" b="1" dirty="0">
-                <a:solidFill>
-                  <a:srgbClr val="B01B20"/>
+              <a:lnSpc>
+                <a:spcPts val="2100"/>
+              </a:lnSpc>
+              <a:buNone/>
+            </a:pPr>
+            <a:r>
+              <a:rPr lang="en-US" sz="1300" dirty="0">
+                <a:solidFill>
+                  <a:srgbClr val="4FC3F7"/>
                 </a:solidFill>
                 <a:latin typeface="Courier New" pitchFamily="34" charset="0"/>
                 <a:ea typeface="Courier New" pitchFamily="34" charset="-122"/>
                 <a:cs typeface="Courier New" pitchFamily="34" charset="-120"/>
               </a:rPr>
-              <a:t>IndentationError</a:t>
-            </a:r>
-            <a:endParaRPr lang="en-US" sz="1400" dirty="0"/>
+              <a:t> 1 | 2 | 3            Joyce, quelle case ? 5</a:t>
+            </a:r>
+            <a:endParaRPr lang="en-US" sz="1300" dirty="0"/>
+          </a:p>
+          <a:p>
+            <a:pPr indent="0" marL="0">
+              <a:lnSpc>
+                <a:spcPts val="2100"/>
+              </a:lnSpc>
+              <a:buNone/>
+            </a:pPr>
+            <a:r>
+              <a:rPr lang="en-US" sz="1300" dirty="0">
+                <a:solidFill>
+                  <a:srgbClr val="4FC3F7"/>
+                </a:solidFill>
+                <a:latin typeface="Courier New" pitchFamily="34" charset="0"/>
+                <a:ea typeface="Courier New" pitchFamily="34" charset="-122"/>
+                <a:cs typeface="Courier New" pitchFamily="34" charset="-120"/>
+              </a:rPr>
+              <a:t>---+---+---           Joyce joue la case 5   (tour numero 1)</a:t>
+            </a:r>
+            <a:endParaRPr lang="en-US" sz="1300" dirty="0"/>
+          </a:p>
+          <a:p>
+            <a:pPr indent="0" marL="0">
+              <a:lnSpc>
+                <a:spcPts val="2100"/>
+              </a:lnSpc>
+              <a:buNone/>
+            </a:pPr>
+            <a:r>
+              <a:rPr lang="en-US" sz="1300" dirty="0">
+                <a:solidFill>
+                  <a:srgbClr val="4FC3F7"/>
+                </a:solidFill>
+                <a:latin typeface="Courier New" pitchFamily="34" charset="0"/>
+                <a:ea typeface="Courier New" pitchFamily="34" charset="-122"/>
+                <a:cs typeface="Courier New" pitchFamily="34" charset="-120"/>
+              </a:rPr>
+              <a:t> 4 | 5 | 6</a:t>
+            </a:r>
+            <a:endParaRPr lang="en-US" sz="1300" dirty="0"/>
+          </a:p>
+          <a:p>
+            <a:pPr indent="0" marL="0">
+              <a:lnSpc>
+                <a:spcPts val="2100"/>
+              </a:lnSpc>
+              <a:buNone/>
+            </a:pPr>
+            <a:r>
+              <a:rPr lang="en-US" sz="1300" dirty="0">
+                <a:solidFill>
+                  <a:srgbClr val="4FC3F7"/>
+                </a:solidFill>
+                <a:latin typeface="Courier New" pitchFamily="34" charset="0"/>
+                <a:ea typeface="Courier New" pitchFamily="34" charset="-122"/>
+                <a:cs typeface="Courier New" pitchFamily="34" charset="-120"/>
+              </a:rPr>
+              <a:t>---+---+---           Gedeon, quelle case ? 12</a:t>
+            </a:r>
+            <a:endParaRPr lang="en-US" sz="1300" dirty="0"/>
+          </a:p>
+          <a:p>
+            <a:pPr indent="0" marL="0">
+              <a:lnSpc>
+                <a:spcPts val="2100"/>
+              </a:lnSpc>
+              <a:buNone/>
+            </a:pPr>
+            <a:r>
+              <a:rPr lang="en-US" sz="1300" dirty="0">
+                <a:solidFill>
+                  <a:srgbClr val="4FC3F7"/>
+                </a:solidFill>
+                <a:latin typeface="Courier New" pitchFamily="34" charset="0"/>
+                <a:ea typeface="Courier New" pitchFamily="34" charset="-122"/>
+                <a:cs typeface="Courier New" pitchFamily="34" charset="-120"/>
+              </a:rPr>
+              <a:t> 7 | 8 | 9            La case 12 n'existe pas ! Choisis entre 1 et 9.</a:t>
+            </a:r>
+            <a:endParaRPr lang="en-US" sz="1300" dirty="0"/>
+          </a:p>
+          <a:p>
+            <a:pPr indent="0" marL="0">
+              <a:lnSpc>
+                <a:spcPts val="2100"/>
+              </a:lnSpc>
+              <a:buNone/>
+            </a:pPr>
+            <a:endParaRPr lang="en-US" sz="1300" dirty="0"/>
+          </a:p>
+          <a:p>
+            <a:pPr indent="0" marL="0">
+              <a:lnSpc>
+                <a:spcPts val="2100"/>
+              </a:lnSpc>
+              <a:buNone/>
+            </a:pPr>
+            <a:r>
+              <a:rPr lang="en-US" sz="1300" dirty="0">
+                <a:solidFill>
+                  <a:srgbClr val="4FC3F7"/>
+                </a:solidFill>
+                <a:latin typeface="Courier New" pitchFamily="34" charset="0"/>
+                <a:ea typeface="Courier New" pitchFamily="34" charset="-122"/>
+                <a:cs typeface="Courier New" pitchFamily="34" charset="-120"/>
+              </a:rPr>
+              <a:t>                      Coups valides joues : 1</a:t>
+            </a:r>
+            <a:endParaRPr lang="en-US" sz="1300" dirty="0"/>
+          </a:p>
+          <a:p>
+            <a:pPr indent="0" marL="0">
+              <a:lnSpc>
+                <a:spcPts val="2100"/>
+              </a:lnSpc>
+              <a:buNone/>
+            </a:pPr>
+            <a:r>
+              <a:rPr lang="en-US" sz="1300" dirty="0">
+                <a:solidFill>
+                  <a:srgbClr val="4FC3F7"/>
+                </a:solidFill>
+                <a:latin typeface="Courier New" pitchFamily="34" charset="0"/>
+                <a:ea typeface="Courier New" pitchFamily="34" charset="-122"/>
+                <a:cs typeface="Courier New" pitchFamily="34" charset="-120"/>
+              </a:rPr>
+              <a:t>                      Il reste 8 cases libres.</a:t>
+            </a:r>
+            <a:endParaRPr lang="en-US" sz="1300" dirty="0"/>
           </a:p>
         </p:txBody>
       </p:sp>
@@ -11242,8 +11989,8 @@
         </p:nvSpPr>
         <p:spPr>
           <a:xfrm>
-            <a:off x="4251960" y="2322576"/>
-            <a:ext cx="3931920" cy="320040"/>
+            <a:off x="640080" y="4983480"/>
+            <a:ext cx="10881360" cy="365760"/>
           </a:xfrm>
           <a:prstGeom prst="rect">
             <a:avLst/>
@@ -11259,17 +12006,17 @@
               <a:buNone/>
             </a:pPr>
             <a:r>
-              <a:rPr lang="en-US" sz="1300" dirty="0">
-                <a:solidFill>
-                  <a:srgbClr val="5A5A72"/>
+              <a:rPr lang="en-US" sz="1400" dirty="0">
+                <a:solidFill>
+                  <a:srgbClr val="14142B"/>
                 </a:solidFill>
                 <a:latin typeface="Calibri" pitchFamily="34" charset="0"/>
                 <a:ea typeface="Calibri" pitchFamily="34" charset="-122"/>
                 <a:cs typeface="Calibri" pitchFamily="34" charset="-120"/>
               </a:rPr>
-              <a:t>Il manque les 4 espaces</a:t>
-            </a:r>
-            <a:endParaRPr lang="en-US" sz="1300" dirty="0"/>
+              <a:t>PARTIE 1   ① ton prénom   ② les numéros 1 à 9 dans la grille      → carte verte, tu m'attends</a:t>
+            </a:r>
+            <a:endParaRPr lang="en-US" sz="1400" dirty="0"/>
           </a:p>
         </p:txBody>
       </p:sp>
@@ -11281,8 +12028,8 @@
         </p:nvSpPr>
         <p:spPr>
           <a:xfrm>
-            <a:off x="8275320" y="2313432"/>
-            <a:ext cx="3291840" cy="320040"/>
+            <a:off x="640080" y="5367528"/>
+            <a:ext cx="10881360" cy="365760"/>
           </a:xfrm>
           <a:prstGeom prst="rect">
             <a:avLst/>
@@ -11298,64 +12045,30 @@
               <a:buNone/>
             </a:pPr>
             <a:r>
-              <a:rPr lang="en-US" sz="1300" b="1" dirty="0">
-                <a:solidFill>
-                  <a:srgbClr val="0C5C29"/>
+              <a:rPr lang="en-US" sz="1400" dirty="0">
+                <a:solidFill>
+                  <a:srgbClr val="14142B"/>
                 </a:solidFill>
                 <a:latin typeface="Calibri" pitchFamily="34" charset="0"/>
                 <a:ea typeface="Calibri" pitchFamily="34" charset="-122"/>
                 <a:cs typeface="Calibri" pitchFamily="34" charset="-120"/>
               </a:rPr>
-              <a:t>→  Après deux-points, on décale</a:t>
-            </a:r>
-            <a:endParaRPr lang="en-US" sz="1300" dirty="0"/>
-          </a:p>
-        </p:txBody>
-      </p:sp>
-      <p:sp>
-        <p:nvSpPr>
-          <p:cNvPr id="19" name="Shape 17"/>
-          <p:cNvSpPr/>
-          <p:nvPr/>
-        </p:nvSpPr>
-        <p:spPr>
-          <a:xfrm>
-            <a:off x="640080" y="2761488"/>
-            <a:ext cx="10881360" cy="475488"/>
-          </a:xfrm>
-          <a:prstGeom prst="roundRect">
-            <a:avLst>
-              <a:gd name="adj" fmla="val 15385"/>
-            </a:avLst>
-          </a:prstGeom>
-          <a:solidFill>
-            <a:srgbClr val="FFFFFF"/>
-          </a:solidFill>
-          <a:ln w="19050">
-            <a:solidFill>
-              <a:srgbClr val="E4E4EE"/>
-            </a:solidFill>
-            <a:prstDash val="solid"/>
-          </a:ln>
-          <a:effectLst>
-            <a:outerShdw sx="100000" sy="100000" kx="0" ky="0" algn="bl" rotWithShape="0" blurRad="127000" dist="25400" dir="5400000">
-              <a:srgbClr val="20204A">
-                <a:alpha val="12000"/>
-              </a:srgbClr>
-            </a:outerShdw>
-          </a:effectLst>
-        </p:spPr>
-      </p:sp>
-      <p:sp>
-        <p:nvSpPr>
-          <p:cNvPr id="20" name="Text 18"/>
-          <p:cNvSpPr txBox="1"/>
-          <p:nvPr/>
-        </p:nvSpPr>
-        <p:spPr>
-          <a:xfrm>
-            <a:off x="914400" y="2862072"/>
-            <a:ext cx="3200400" cy="320040"/>
+              <a:t>PARTIE 2   ③ tour = 0   ④ la case devient un nombre   ⑤ ajoute 1   → carte verte, tu m'attends</a:t>
+            </a:r>
+            <a:endParaRPr lang="en-US" sz="1400" dirty="0"/>
+          </a:p>
+        </p:txBody>
+      </p:sp>
+      <p:sp>
+        <p:nvSpPr>
+          <p:cNvPr id="19" name="Text 17"/>
+          <p:cNvSpPr txBox="1"/>
+          <p:nvPr/>
+        </p:nvSpPr>
+        <p:spPr>
+          <a:xfrm>
+            <a:off x="640080" y="5751576"/>
+            <a:ext cx="10881360" cy="365760"/>
           </a:xfrm>
           <a:prstGeom prst="rect">
             <a:avLst/>
@@ -11373,848 +12086,15 @@
             <a:r>
               <a:rPr lang="en-US" sz="1400" b="1" dirty="0">
                 <a:solidFill>
-                  <a:srgbClr val="B01B20"/>
-                </a:solidFill>
-                <a:latin typeface="Courier New" pitchFamily="34" charset="0"/>
-                <a:ea typeface="Courier New" pitchFamily="34" charset="-122"/>
-                <a:cs typeface="Courier New" pitchFamily="34" charset="-120"/>
-              </a:rPr>
-              <a:t>SyntaxError</a:t>
-            </a:r>
-            <a:endParaRPr lang="en-US" sz="1400" dirty="0"/>
-          </a:p>
-        </p:txBody>
-      </p:sp>
-      <p:sp>
-        <p:nvSpPr>
-          <p:cNvPr id="21" name="Text 19"/>
-          <p:cNvSpPr txBox="1"/>
-          <p:nvPr/>
-        </p:nvSpPr>
-        <p:spPr>
-          <a:xfrm>
-            <a:off x="4251960" y="2871216"/>
-            <a:ext cx="3931920" cy="320040"/>
-          </a:xfrm>
-          <a:prstGeom prst="rect">
-            <a:avLst/>
-          </a:prstGeom>
-          <a:noFill/>
-          <a:ln/>
-        </p:spPr>
-        <p:txBody>
-          <a:bodyPr wrap="square" lIns="0" tIns="0" rIns="0" bIns="0" rtlCol="0" anchor="t"/>
-          <a:lstStyle/>
-          <a:p>
-            <a:pPr indent="0" marL="0">
-              <a:buNone/>
-            </a:pPr>
-            <a:r>
-              <a:rPr lang="en-US" sz="1300" dirty="0">
-                <a:solidFill>
-                  <a:srgbClr val="5A5A72"/>
+                  <a:srgbClr val="14142B"/>
                 </a:solidFill>
                 <a:latin typeface="Calibri" pitchFamily="34" charset="0"/>
                 <a:ea typeface="Calibri" pitchFamily="34" charset="-122"/>
                 <a:cs typeface="Calibri" pitchFamily="34" charset="-120"/>
               </a:rPr>
-              <a:t>Deux-points oubliés, ou = au lieu de ==</a:t>
-            </a:r>
-            <a:endParaRPr lang="en-US" sz="1300" dirty="0"/>
-          </a:p>
-        </p:txBody>
-      </p:sp>
-      <p:sp>
-        <p:nvSpPr>
-          <p:cNvPr id="22" name="Text 20"/>
-          <p:cNvSpPr txBox="1"/>
-          <p:nvPr/>
-        </p:nvSpPr>
-        <p:spPr>
-          <a:xfrm>
-            <a:off x="8275320" y="2862072"/>
-            <a:ext cx="3291840" cy="320040"/>
-          </a:xfrm>
-          <a:prstGeom prst="rect">
-            <a:avLst/>
-          </a:prstGeom>
-          <a:noFill/>
-          <a:ln/>
-        </p:spPr>
-        <p:txBody>
-          <a:bodyPr wrap="square" lIns="0" tIns="0" rIns="0" bIns="0" rtlCol="0" anchor="t"/>
-          <a:lstStyle/>
-          <a:p>
-            <a:pPr indent="0" marL="0">
-              <a:buNone/>
-            </a:pPr>
-            <a:r>
-              <a:rPr lang="en-US" sz="1300" b="1" dirty="0">
-                <a:solidFill>
-                  <a:srgbClr val="0C5C29"/>
-                </a:solidFill>
-                <a:latin typeface="Calibri" pitchFamily="34" charset="0"/>
-                <a:ea typeface="Calibri" pitchFamily="34" charset="-122"/>
-                <a:cs typeface="Calibri" pitchFamily="34" charset="-120"/>
-              </a:rPr>
-              <a:t>→  Un ordre, ou une question ?</a:t>
-            </a:r>
-            <a:endParaRPr lang="en-US" sz="1300" dirty="0"/>
-          </a:p>
-        </p:txBody>
-      </p:sp>
-      <p:sp>
-        <p:nvSpPr>
-          <p:cNvPr id="23" name="Shape 21"/>
-          <p:cNvSpPr/>
-          <p:nvPr/>
-        </p:nvSpPr>
-        <p:spPr>
-          <a:xfrm>
-            <a:off x="640080" y="3310128"/>
-            <a:ext cx="10881360" cy="475488"/>
-          </a:xfrm>
-          <a:prstGeom prst="roundRect">
-            <a:avLst>
-              <a:gd name="adj" fmla="val 15385"/>
-            </a:avLst>
-          </a:prstGeom>
-          <a:solidFill>
-            <a:srgbClr val="FFFFFF"/>
-          </a:solidFill>
-          <a:ln w="19050">
-            <a:solidFill>
-              <a:srgbClr val="E4E4EE"/>
-            </a:solidFill>
-            <a:prstDash val="solid"/>
-          </a:ln>
-          <a:effectLst>
-            <a:outerShdw sx="100000" sy="100000" kx="0" ky="0" algn="bl" rotWithShape="0" blurRad="127000" dist="25400" dir="5400000">
-              <a:srgbClr val="20204A">
-                <a:alpha val="12000"/>
-              </a:srgbClr>
-            </a:outerShdw>
-          </a:effectLst>
-        </p:spPr>
-      </p:sp>
-      <p:sp>
-        <p:nvSpPr>
-          <p:cNvPr id="24" name="Text 22"/>
-          <p:cNvSpPr txBox="1"/>
-          <p:nvPr/>
-        </p:nvSpPr>
-        <p:spPr>
-          <a:xfrm>
-            <a:off x="914400" y="3410712"/>
-            <a:ext cx="3200400" cy="320040"/>
-          </a:xfrm>
-          <a:prstGeom prst="rect">
-            <a:avLst/>
-          </a:prstGeom>
-          <a:noFill/>
-          <a:ln/>
-        </p:spPr>
-        <p:txBody>
-          <a:bodyPr wrap="square" lIns="0" tIns="0" rIns="0" bIns="0" rtlCol="0" anchor="t"/>
-          <a:lstStyle/>
-          <a:p>
-            <a:pPr indent="0" marL="0">
-              <a:buNone/>
-            </a:pPr>
-            <a:r>
-              <a:rPr lang="en-US" sz="1400" b="1" dirty="0">
-                <a:solidFill>
-                  <a:srgbClr val="B01B20"/>
-                </a:solidFill>
-                <a:latin typeface="Courier New" pitchFamily="34" charset="0"/>
-                <a:ea typeface="Courier New" pitchFamily="34" charset="-122"/>
-                <a:cs typeface="Courier New" pitchFamily="34" charset="-120"/>
-              </a:rPr>
-              <a:t>Les DEUX messages</a:t>
+              <a:t>PARTIE 3   ⑥ le if / else : la case au-dessus de 9 est refusée   ⑦ le joueur 2   ⑧ le bilan</a:t>
             </a:r>
             <a:endParaRPr lang="en-US" sz="1400" dirty="0"/>
-          </a:p>
-        </p:txBody>
-      </p:sp>
-      <p:sp>
-        <p:nvSpPr>
-          <p:cNvPr id="25" name="Text 23"/>
-          <p:cNvSpPr txBox="1"/>
-          <p:nvPr/>
-        </p:nvSpPr>
-        <p:spPr>
-          <a:xfrm>
-            <a:off x="4251960" y="3419856"/>
-            <a:ext cx="3931920" cy="320040"/>
-          </a:xfrm>
-          <a:prstGeom prst="rect">
-            <a:avLst/>
-          </a:prstGeom>
-          <a:noFill/>
-          <a:ln/>
-        </p:spPr>
-        <p:txBody>
-          <a:bodyPr wrap="square" lIns="0" tIns="0" rIns="0" bIns="0" rtlCol="0" anchor="t"/>
-          <a:lstStyle/>
-          <a:p>
-            <a:pPr indent="0" marL="0">
-              <a:buNone/>
-            </a:pPr>
-            <a:r>
-              <a:rPr lang="en-US" sz="1300" dirty="0">
-                <a:solidFill>
-                  <a:srgbClr val="5A5A72"/>
-                </a:solidFill>
-                <a:latin typeface="Calibri" pitchFamily="34" charset="0"/>
-                <a:ea typeface="Calibri" pitchFamily="34" charset="-122"/>
-                <a:cs typeface="Calibri" pitchFamily="34" charset="-120"/>
-              </a:rPr>
-              <a:t>Deux print dans le if, zéro dans le else</a:t>
-            </a:r>
-            <a:endParaRPr lang="en-US" sz="1300" dirty="0"/>
-          </a:p>
-        </p:txBody>
-      </p:sp>
-      <p:sp>
-        <p:nvSpPr>
-          <p:cNvPr id="26" name="Text 24"/>
-          <p:cNvSpPr txBox="1"/>
-          <p:nvPr/>
-        </p:nvSpPr>
-        <p:spPr>
-          <a:xfrm>
-            <a:off x="8275320" y="3410712"/>
-            <a:ext cx="3291840" cy="320040"/>
-          </a:xfrm>
-          <a:prstGeom prst="rect">
-            <a:avLst/>
-          </a:prstGeom>
-          <a:noFill/>
-          <a:ln/>
-        </p:spPr>
-        <p:txBody>
-          <a:bodyPr wrap="square" lIns="0" tIns="0" rIns="0" bIns="0" rtlCol="0" anchor="t"/>
-          <a:lstStyle/>
-          <a:p>
-            <a:pPr indent="0" marL="0">
-              <a:buNone/>
-            </a:pPr>
-            <a:r>
-              <a:rPr lang="en-US" sz="1300" b="1" dirty="0">
-                <a:solidFill>
-                  <a:srgbClr val="0C5C29"/>
-                </a:solidFill>
-                <a:latin typeface="Calibri" pitchFamily="34" charset="0"/>
-                <a:ea typeface="Calibri" pitchFamily="34" charset="-122"/>
-                <a:cs typeface="Calibri" pitchFamily="34" charset="-120"/>
-              </a:rPr>
-              <a:t>→  Relis le décalage</a:t>
-            </a:r>
-            <a:endParaRPr lang="en-US" sz="1300" dirty="0"/>
-          </a:p>
-        </p:txBody>
-      </p:sp>
-      <p:sp>
-        <p:nvSpPr>
-          <p:cNvPr id="27" name="Shape 25"/>
-          <p:cNvSpPr/>
-          <p:nvPr/>
-        </p:nvSpPr>
-        <p:spPr>
-          <a:xfrm>
-            <a:off x="640080" y="3858768"/>
-            <a:ext cx="10881360" cy="475488"/>
-          </a:xfrm>
-          <a:prstGeom prst="roundRect">
-            <a:avLst>
-              <a:gd name="adj" fmla="val 15385"/>
-            </a:avLst>
-          </a:prstGeom>
-          <a:solidFill>
-            <a:srgbClr val="FFFFFF"/>
-          </a:solidFill>
-          <a:ln w="19050">
-            <a:solidFill>
-              <a:srgbClr val="E4E4EE"/>
-            </a:solidFill>
-            <a:prstDash val="solid"/>
-          </a:ln>
-          <a:effectLst>
-            <a:outerShdw sx="100000" sy="100000" kx="0" ky="0" algn="bl" rotWithShape="0" blurRad="127000" dist="25400" dir="5400000">
-              <a:srgbClr val="20204A">
-                <a:alpha val="12000"/>
-              </a:srgbClr>
-            </a:outerShdw>
-          </a:effectLst>
-        </p:spPr>
-      </p:sp>
-      <p:sp>
-        <p:nvSpPr>
-          <p:cNvPr id="28" name="Text 26"/>
-          <p:cNvSpPr txBox="1"/>
-          <p:nvPr/>
-        </p:nvSpPr>
-        <p:spPr>
-          <a:xfrm>
-            <a:off x="914400" y="3959352"/>
-            <a:ext cx="3200400" cy="320040"/>
-          </a:xfrm>
-          <a:prstGeom prst="rect">
-            <a:avLst/>
-          </a:prstGeom>
-          <a:noFill/>
-          <a:ln/>
-        </p:spPr>
-        <p:txBody>
-          <a:bodyPr wrap="square" lIns="0" tIns="0" rIns="0" bIns="0" rtlCol="0" anchor="t"/>
-          <a:lstStyle/>
-          <a:p>
-            <a:pPr indent="0" marL="0">
-              <a:buNone/>
-            </a:pPr>
-            <a:r>
-              <a:rPr lang="en-US" sz="1400" b="1" dirty="0">
-                <a:solidFill>
-                  <a:srgbClr val="B01B20"/>
-                </a:solidFill>
-                <a:latin typeface="Courier New" pitchFamily="34" charset="0"/>
-                <a:ea typeface="Courier New" pitchFamily="34" charset="-122"/>
-                <a:cs typeface="Courier New" pitchFamily="34" charset="-120"/>
-              </a:rPr>
-              <a:t>TypeError</a:t>
-            </a:r>
-            <a:endParaRPr lang="en-US" sz="1400" dirty="0"/>
-          </a:p>
-        </p:txBody>
-      </p:sp>
-      <p:sp>
-        <p:nvSpPr>
-          <p:cNvPr id="29" name="Text 27"/>
-          <p:cNvSpPr txBox="1"/>
-          <p:nvPr/>
-        </p:nvSpPr>
-        <p:spPr>
-          <a:xfrm>
-            <a:off x="4251960" y="3968496"/>
-            <a:ext cx="3931920" cy="320040"/>
-          </a:xfrm>
-          <a:prstGeom prst="rect">
-            <a:avLst/>
-          </a:prstGeom>
-          <a:noFill/>
-          <a:ln/>
-        </p:spPr>
-        <p:txBody>
-          <a:bodyPr wrap="square" lIns="0" tIns="0" rIns="0" bIns="0" rtlCol="0" anchor="t"/>
-          <a:lstStyle/>
-          <a:p>
-            <a:pPr indent="0" marL="0">
-              <a:buNone/>
-            </a:pPr>
-            <a:r>
-              <a:rPr lang="en-US" sz="1300" dirty="0">
-                <a:solidFill>
-                  <a:srgbClr val="5A5A72"/>
-                </a:solidFill>
-                <a:latin typeface="Calibri" pitchFamily="34" charset="0"/>
-                <a:ea typeface="Calibri" pitchFamily="34" charset="-122"/>
-                <a:cs typeface="Calibri" pitchFamily="34" charset="-120"/>
-              </a:rPr>
-              <a:t>Du texte et un nombre mélangés</a:t>
-            </a:r>
-            <a:endParaRPr lang="en-US" sz="1300" dirty="0"/>
-          </a:p>
-        </p:txBody>
-      </p:sp>
-      <p:sp>
-        <p:nvSpPr>
-          <p:cNvPr id="30" name="Text 28"/>
-          <p:cNvSpPr txBox="1"/>
-          <p:nvPr/>
-        </p:nvSpPr>
-        <p:spPr>
-          <a:xfrm>
-            <a:off x="8275320" y="3959352"/>
-            <a:ext cx="3291840" cy="320040"/>
-          </a:xfrm>
-          <a:prstGeom prst="rect">
-            <a:avLst/>
-          </a:prstGeom>
-          <a:noFill/>
-          <a:ln/>
-        </p:spPr>
-        <p:txBody>
-          <a:bodyPr wrap="square" lIns="0" tIns="0" rIns="0" bIns="0" rtlCol="0" anchor="t"/>
-          <a:lstStyle/>
-          <a:p>
-            <a:pPr indent="0" marL="0">
-              <a:buNone/>
-            </a:pPr>
-            <a:r>
-              <a:rPr lang="en-US" sz="1300" b="1" dirty="0">
-                <a:solidFill>
-                  <a:srgbClr val="0C5C29"/>
-                </a:solidFill>
-                <a:latin typeface="Calibri" pitchFamily="34" charset="0"/>
-                <a:ea typeface="Calibri" pitchFamily="34" charset="-122"/>
-                <a:cs typeface="Calibri" pitchFamily="34" charset="-120"/>
-              </a:rPr>
-              <a:t>→  int() pour calculer · str() pour coller</a:t>
-            </a:r>
-            <a:endParaRPr lang="en-US" sz="1300" dirty="0"/>
-          </a:p>
-        </p:txBody>
-      </p:sp>
-      <p:sp>
-        <p:nvSpPr>
-          <p:cNvPr id="31" name="Shape 29"/>
-          <p:cNvSpPr/>
-          <p:nvPr/>
-        </p:nvSpPr>
-        <p:spPr>
-          <a:xfrm>
-            <a:off x="640080" y="4407408"/>
-            <a:ext cx="10881360" cy="475488"/>
-          </a:xfrm>
-          <a:prstGeom prst="roundRect">
-            <a:avLst>
-              <a:gd name="adj" fmla="val 15385"/>
-            </a:avLst>
-          </a:prstGeom>
-          <a:solidFill>
-            <a:srgbClr val="FFFFFF"/>
-          </a:solidFill>
-          <a:ln w="19050">
-            <a:solidFill>
-              <a:srgbClr val="E4E4EE"/>
-            </a:solidFill>
-            <a:prstDash val="solid"/>
-          </a:ln>
-          <a:effectLst>
-            <a:outerShdw sx="100000" sy="100000" kx="0" ky="0" algn="bl" rotWithShape="0" blurRad="127000" dist="25400" dir="5400000">
-              <a:srgbClr val="20204A">
-                <a:alpha val="12000"/>
-              </a:srgbClr>
-            </a:outerShdw>
-          </a:effectLst>
-        </p:spPr>
-      </p:sp>
-      <p:sp>
-        <p:nvSpPr>
-          <p:cNvPr id="32" name="Text 30"/>
-          <p:cNvSpPr txBox="1"/>
-          <p:nvPr/>
-        </p:nvSpPr>
-        <p:spPr>
-          <a:xfrm>
-            <a:off x="914400" y="4507992"/>
-            <a:ext cx="3200400" cy="320040"/>
-          </a:xfrm>
-          <a:prstGeom prst="rect">
-            <a:avLst/>
-          </a:prstGeom>
-          <a:noFill/>
-          <a:ln/>
-        </p:spPr>
-        <p:txBody>
-          <a:bodyPr wrap="square" lIns="0" tIns="0" rIns="0" bIns="0" rtlCol="0" anchor="t"/>
-          <a:lstStyle/>
-          <a:p>
-            <a:pPr indent="0" marL="0">
-              <a:buNone/>
-            </a:pPr>
-            <a:r>
-              <a:rPr lang="en-US" sz="1400" b="1" dirty="0">
-                <a:solidFill>
-                  <a:srgbClr val="B01B20"/>
-                </a:solidFill>
-                <a:latin typeface="Courier New" pitchFamily="34" charset="0"/>
-                <a:ea typeface="Courier New" pitchFamily="34" charset="-122"/>
-                <a:cs typeface="Courier New" pitchFamily="34" charset="-120"/>
-              </a:rPr>
-              <a:t>ValueError</a:t>
-            </a:r>
-            <a:endParaRPr lang="en-US" sz="1400" dirty="0"/>
-          </a:p>
-        </p:txBody>
-      </p:sp>
-      <p:sp>
-        <p:nvSpPr>
-          <p:cNvPr id="33" name="Text 31"/>
-          <p:cNvSpPr txBox="1"/>
-          <p:nvPr/>
-        </p:nvSpPr>
-        <p:spPr>
-          <a:xfrm>
-            <a:off x="4251960" y="4517136"/>
-            <a:ext cx="3931920" cy="320040"/>
-          </a:xfrm>
-          <a:prstGeom prst="rect">
-            <a:avLst/>
-          </a:prstGeom>
-          <a:noFill/>
-          <a:ln/>
-        </p:spPr>
-        <p:txBody>
-          <a:bodyPr wrap="square" lIns="0" tIns="0" rIns="0" bIns="0" rtlCol="0" anchor="t"/>
-          <a:lstStyle/>
-          <a:p>
-            <a:pPr indent="0" marL="0">
-              <a:buNone/>
-            </a:pPr>
-            <a:r>
-              <a:rPr lang="en-US" sz="1300" dirty="0">
-                <a:solidFill>
-                  <a:srgbClr val="5A5A72"/>
-                </a:solidFill>
-                <a:latin typeface="Calibri" pitchFamily="34" charset="0"/>
-                <a:ea typeface="Calibri" pitchFamily="34" charset="-122"/>
-                <a:cs typeface="Calibri" pitchFamily="34" charset="-120"/>
-              </a:rPr>
-              <a:t>int() sur autre chose qu'un nombre</a:t>
-            </a:r>
-            <a:endParaRPr lang="en-US" sz="1300" dirty="0"/>
-          </a:p>
-        </p:txBody>
-      </p:sp>
-      <p:sp>
-        <p:nvSpPr>
-          <p:cNvPr id="34" name="Text 32"/>
-          <p:cNvSpPr txBox="1"/>
-          <p:nvPr/>
-        </p:nvSpPr>
-        <p:spPr>
-          <a:xfrm>
-            <a:off x="8275320" y="4507992"/>
-            <a:ext cx="3291840" cy="320040"/>
-          </a:xfrm>
-          <a:prstGeom prst="rect">
-            <a:avLst/>
-          </a:prstGeom>
-          <a:noFill/>
-          <a:ln/>
-        </p:spPr>
-        <p:txBody>
-          <a:bodyPr wrap="square" lIns="0" tIns="0" rIns="0" bIns="0" rtlCol="0" anchor="t"/>
-          <a:lstStyle/>
-          <a:p>
-            <a:pPr indent="0" marL="0">
-              <a:buNone/>
-            </a:pPr>
-            <a:r>
-              <a:rPr lang="en-US" sz="1300" b="1" dirty="0">
-                <a:solidFill>
-                  <a:srgbClr val="0C5C29"/>
-                </a:solidFill>
-                <a:latin typeface="Calibri" pitchFamily="34" charset="0"/>
-                <a:ea typeface="Calibri" pitchFamily="34" charset="-122"/>
-                <a:cs typeface="Calibri" pitchFamily="34" charset="-120"/>
-              </a:rPr>
-              <a:t>→  Relance, et tape un chiffre</a:t>
-            </a:r>
-            <a:endParaRPr lang="en-US" sz="1300" dirty="0"/>
-          </a:p>
-        </p:txBody>
-      </p:sp>
-      <p:sp>
-        <p:nvSpPr>
-          <p:cNvPr id="35" name="Shape 33"/>
-          <p:cNvSpPr/>
-          <p:nvPr/>
-        </p:nvSpPr>
-        <p:spPr>
-          <a:xfrm>
-            <a:off x="640080" y="4956048"/>
-            <a:ext cx="10881360" cy="475488"/>
-          </a:xfrm>
-          <a:prstGeom prst="roundRect">
-            <a:avLst>
-              <a:gd name="adj" fmla="val 15385"/>
-            </a:avLst>
-          </a:prstGeom>
-          <a:solidFill>
-            <a:srgbClr val="FFFFFF"/>
-          </a:solidFill>
-          <a:ln w="19050">
-            <a:solidFill>
-              <a:srgbClr val="E4E4EE"/>
-            </a:solidFill>
-            <a:prstDash val="solid"/>
-          </a:ln>
-          <a:effectLst>
-            <a:outerShdw sx="100000" sy="100000" kx="0" ky="0" algn="bl" rotWithShape="0" blurRad="127000" dist="25400" dir="5400000">
-              <a:srgbClr val="20204A">
-                <a:alpha val="12000"/>
-              </a:srgbClr>
-            </a:outerShdw>
-          </a:effectLst>
-        </p:spPr>
-      </p:sp>
-      <p:sp>
-        <p:nvSpPr>
-          <p:cNvPr id="36" name="Text 34"/>
-          <p:cNvSpPr txBox="1"/>
-          <p:nvPr/>
-        </p:nvSpPr>
-        <p:spPr>
-          <a:xfrm>
-            <a:off x="914400" y="5056632"/>
-            <a:ext cx="3200400" cy="320040"/>
-          </a:xfrm>
-          <a:prstGeom prst="rect">
-            <a:avLst/>
-          </a:prstGeom>
-          <a:noFill/>
-          <a:ln/>
-        </p:spPr>
-        <p:txBody>
-          <a:bodyPr wrap="square" lIns="0" tIns="0" rIns="0" bIns="0" rtlCol="0" anchor="t"/>
-          <a:lstStyle/>
-          <a:p>
-            <a:pPr indent="0" marL="0">
-              <a:buNone/>
-            </a:pPr>
-            <a:r>
-              <a:rPr lang="en-US" sz="1400" b="1" dirty="0">
-                <a:solidFill>
-                  <a:srgbClr val="B01B20"/>
-                </a:solidFill>
-                <a:latin typeface="Courier New" pitchFamily="34" charset="0"/>
-                <a:ea typeface="Courier New" pitchFamily="34" charset="-122"/>
-                <a:cs typeface="Courier New" pitchFamily="34" charset="-120"/>
-              </a:rPr>
-              <a:t>Le compteur reste à 1</a:t>
-            </a:r>
-            <a:endParaRPr lang="en-US" sz="1400" dirty="0"/>
-          </a:p>
-        </p:txBody>
-      </p:sp>
-      <p:sp>
-        <p:nvSpPr>
-          <p:cNvPr id="37" name="Text 35"/>
-          <p:cNvSpPr txBox="1"/>
-          <p:nvPr/>
-        </p:nvSpPr>
-        <p:spPr>
-          <a:xfrm>
-            <a:off x="4251960" y="5065776"/>
-            <a:ext cx="3931920" cy="320040"/>
-          </a:xfrm>
-          <a:prstGeom prst="rect">
-            <a:avLst/>
-          </a:prstGeom>
-          <a:noFill/>
-          <a:ln/>
-        </p:spPr>
-        <p:txBody>
-          <a:bodyPr wrap="square" lIns="0" tIns="0" rIns="0" bIns="0" rtlCol="0" anchor="t"/>
-          <a:lstStyle/>
-          <a:p>
-            <a:pPr indent="0" marL="0">
-              <a:buNone/>
-            </a:pPr>
-            <a:r>
-              <a:rPr lang="en-US" sz="1300" dirty="0">
-                <a:solidFill>
-                  <a:srgbClr val="5A5A72"/>
-                </a:solidFill>
-                <a:latin typeface="Calibri" pitchFamily="34" charset="0"/>
-                <a:ea typeface="Calibri" pitchFamily="34" charset="-122"/>
-                <a:cs typeface="Calibri" pitchFamily="34" charset="-120"/>
-              </a:rPr>
-              <a:t>Tu as écrit  tour = 1</a:t>
-            </a:r>
-            <a:endParaRPr lang="en-US" sz="1300" dirty="0"/>
-          </a:p>
-        </p:txBody>
-      </p:sp>
-      <p:sp>
-        <p:nvSpPr>
-          <p:cNvPr id="38" name="Text 36"/>
-          <p:cNvSpPr txBox="1"/>
-          <p:nvPr/>
-        </p:nvSpPr>
-        <p:spPr>
-          <a:xfrm>
-            <a:off x="8275320" y="5056632"/>
-            <a:ext cx="3291840" cy="320040"/>
-          </a:xfrm>
-          <a:prstGeom prst="rect">
-            <a:avLst/>
-          </a:prstGeom>
-          <a:noFill/>
-          <a:ln/>
-        </p:spPr>
-        <p:txBody>
-          <a:bodyPr wrap="square" lIns="0" tIns="0" rIns="0" bIns="0" rtlCol="0" anchor="t"/>
-          <a:lstStyle/>
-          <a:p>
-            <a:pPr indent="0" marL="0">
-              <a:buNone/>
-            </a:pPr>
-            <a:r>
-              <a:rPr lang="en-US" sz="1300" b="1" dirty="0">
-                <a:solidFill>
-                  <a:srgbClr val="0C5C29"/>
-                </a:solidFill>
-                <a:latin typeface="Calibri" pitchFamily="34" charset="0"/>
-                <a:ea typeface="Calibri" pitchFamily="34" charset="-122"/>
-                <a:cs typeface="Calibri" pitchFamily="34" charset="-120"/>
-              </a:rPr>
-              <a:t>→  C'est  tour = tour + 1</a:t>
-            </a:r>
-            <a:endParaRPr lang="en-US" sz="1300" dirty="0"/>
-          </a:p>
-        </p:txBody>
-      </p:sp>
-      <p:sp>
-        <p:nvSpPr>
-          <p:cNvPr id="39" name="Shape 37"/>
-          <p:cNvSpPr/>
-          <p:nvPr/>
-        </p:nvSpPr>
-        <p:spPr>
-          <a:xfrm>
-            <a:off x="640080" y="5504688"/>
-            <a:ext cx="10881360" cy="475488"/>
-          </a:xfrm>
-          <a:prstGeom prst="roundRect">
-            <a:avLst>
-              <a:gd name="adj" fmla="val 15385"/>
-            </a:avLst>
-          </a:prstGeom>
-          <a:solidFill>
-            <a:srgbClr val="FFFFFF"/>
-          </a:solidFill>
-          <a:ln w="19050">
-            <a:solidFill>
-              <a:srgbClr val="E4E4EE"/>
-            </a:solidFill>
-            <a:prstDash val="solid"/>
-          </a:ln>
-          <a:effectLst>
-            <a:outerShdw sx="100000" sy="100000" kx="0" ky="0" algn="bl" rotWithShape="0" blurRad="127000" dist="25400" dir="5400000">
-              <a:srgbClr val="20204A">
-                <a:alpha val="12000"/>
-              </a:srgbClr>
-            </a:outerShdw>
-          </a:effectLst>
-        </p:spPr>
-      </p:sp>
-      <p:sp>
-        <p:nvSpPr>
-          <p:cNvPr id="40" name="Text 38"/>
-          <p:cNvSpPr txBox="1"/>
-          <p:nvPr/>
-        </p:nvSpPr>
-        <p:spPr>
-          <a:xfrm>
-            <a:off x="914400" y="5605272"/>
-            <a:ext cx="3200400" cy="320040"/>
-          </a:xfrm>
-          <a:prstGeom prst="rect">
-            <a:avLst/>
-          </a:prstGeom>
-          <a:noFill/>
-          <a:ln/>
-        </p:spPr>
-        <p:txBody>
-          <a:bodyPr wrap="square" lIns="0" tIns="0" rIns="0" bIns="0" rtlCol="0" anchor="t"/>
-          <a:lstStyle/>
-          <a:p>
-            <a:pPr indent="0" marL="0">
-              <a:buNone/>
-            </a:pPr>
-            <a:r>
-              <a:rPr lang="en-US" sz="1400" b="1" dirty="0">
-                <a:solidFill>
-                  <a:srgbClr val="B01B20"/>
-                </a:solidFill>
-                <a:latin typeface="Courier New" pitchFamily="34" charset="0"/>
-                <a:ea typeface="Courier New" pitchFamily="34" charset="-122"/>
-                <a:cs typeface="Courier New" pitchFamily="34" charset="-120"/>
-              </a:rPr>
-              <a:t>Le coup refusé est compté</a:t>
-            </a:r>
-            <a:endParaRPr lang="en-US" sz="1400" dirty="0"/>
-          </a:p>
-        </p:txBody>
-      </p:sp>
-      <p:sp>
-        <p:nvSpPr>
-          <p:cNvPr id="41" name="Text 39"/>
-          <p:cNvSpPr txBox="1"/>
-          <p:nvPr/>
-        </p:nvSpPr>
-        <p:spPr>
-          <a:xfrm>
-            <a:off x="4251960" y="5614416"/>
-            <a:ext cx="3931920" cy="320040"/>
-          </a:xfrm>
-          <a:prstGeom prst="rect">
-            <a:avLst/>
-          </a:prstGeom>
-          <a:noFill/>
-          <a:ln/>
-        </p:spPr>
-        <p:txBody>
-          <a:bodyPr wrap="square" lIns="0" tIns="0" rIns="0" bIns="0" rtlCol="0" anchor="t"/>
-          <a:lstStyle/>
-          <a:p>
-            <a:pPr indent="0" marL="0">
-              <a:buNone/>
-            </a:pPr>
-            <a:r>
-              <a:rPr lang="en-US" sz="1300" dirty="0">
-                <a:solidFill>
-                  <a:srgbClr val="5A5A72"/>
-                </a:solidFill>
-                <a:latin typeface="Calibri" pitchFamily="34" charset="0"/>
-                <a:ea typeface="Calibri" pitchFamily="34" charset="-122"/>
-                <a:cs typeface="Calibri" pitchFamily="34" charset="-120"/>
-              </a:rPr>
-              <a:t>tour = tour + 1 est au-dessus du if</a:t>
-            </a:r>
-            <a:endParaRPr lang="en-US" sz="1300" dirty="0"/>
-          </a:p>
-        </p:txBody>
-      </p:sp>
-      <p:sp>
-        <p:nvSpPr>
-          <p:cNvPr id="42" name="Text 40"/>
-          <p:cNvSpPr txBox="1"/>
-          <p:nvPr/>
-        </p:nvSpPr>
-        <p:spPr>
-          <a:xfrm>
-            <a:off x="8275320" y="5605272"/>
-            <a:ext cx="3291840" cy="320040"/>
-          </a:xfrm>
-          <a:prstGeom prst="rect">
-            <a:avLst/>
-          </a:prstGeom>
-          <a:noFill/>
-          <a:ln/>
-        </p:spPr>
-        <p:txBody>
-          <a:bodyPr wrap="square" lIns="0" tIns="0" rIns="0" bIns="0" rtlCol="0" anchor="t"/>
-          <a:lstStyle/>
-          <a:p>
-            <a:pPr indent="0" marL="0">
-              <a:buNone/>
-            </a:pPr>
-            <a:r>
-              <a:rPr lang="en-US" sz="1300" b="1" dirty="0">
-                <a:solidFill>
-                  <a:srgbClr val="0C5C29"/>
-                </a:solidFill>
-                <a:latin typeface="Calibri" pitchFamily="34" charset="0"/>
-                <a:ea typeface="Calibri" pitchFamily="34" charset="-122"/>
-                <a:cs typeface="Calibri" pitchFamily="34" charset="-120"/>
-              </a:rPr>
-              <a:t>→  Il va DANS le else, décalé</a:t>
-            </a:r>
-            <a:endParaRPr lang="en-US" sz="1300" dirty="0"/>
           </a:p>
         </p:txBody>
       </p:sp>
@@ -12283,7 +12163,7 @@
                 <a:ea typeface="Courier New" pitchFamily="34" charset="-122"/>
                 <a:cs typeface="Courier New" pitchFamily="34" charset="-120"/>
               </a:rPr>
-              <a:t>13 h 52</a:t>
+              <a:t>13 h 32</a:t>
             </a:r>
             <a:endParaRPr lang="en-US" sz="1100" dirty="0"/>
           </a:p>
@@ -12532,13 +12412,13 @@
             <a:r>
               <a:rPr lang="en-US" sz="1300" b="1" spc="300" kern="0" dirty="0">
                 <a:solidFill>
-                  <a:srgbClr val="6B2D8F"/>
+                  <a:srgbClr val="A65D00"/>
                 </a:solidFill>
                 <a:latin typeface="Calibri" pitchFamily="34" charset="0"/>
                 <a:ea typeface="Calibri" pitchFamily="34" charset="-122"/>
                 <a:cs typeface="Calibri" pitchFamily="34" charset="-120"/>
               </a:rPr>
-              <a:t>CLÔTURE</a:t>
+              <a:t>SI L'ÉCRAN DEVIENT ROUGE</a:t>
             </a:r>
             <a:endParaRPr lang="en-US" sz="1300" dirty="0"/>
           </a:p>
@@ -12580,7 +12460,7 @@
                 <a:ea typeface="Calibri" pitchFamily="34" charset="-122"/>
                 <a:cs typeface="Calibri" pitchFamily="34" charset="-120"/>
               </a:rPr>
-              <a:t>Votre jeu sait compter, et il sait refuser.</a:t>
+              <a:t>Les erreurs du jour.</a:t>
             </a:r>
             <a:endParaRPr lang="en-US" sz="4000" dirty="0"/>
           </a:p>
@@ -12588,24 +12468,68 @@
       </p:sp>
       <p:sp>
         <p:nvSpPr>
-          <p:cNvPr id="14" name="Shape 12"/>
-          <p:cNvSpPr/>
-          <p:nvPr/>
-        </p:nvSpPr>
-        <p:spPr>
-          <a:xfrm>
-            <a:off x="640080" y="2377440"/>
-            <a:ext cx="5303520" cy="2377440"/>
-          </a:xfrm>
-          <a:prstGeom prst="roundRect">
-            <a:avLst>
-              <a:gd name="adj" fmla="val 3077"/>
+          <p:cNvPr id="14" name="Text 12"/>
+          <p:cNvSpPr txBox="1"/>
+          <p:nvPr/>
+        </p:nvSpPr>
+        <p:spPr>
+          <a:xfrm>
+            <a:off x="640080" y="1783080"/>
+            <a:ext cx="10881360" cy="365760"/>
+          </a:xfrm>
+          <a:prstGeom prst="rect">
+            <a:avLst/>
+          </a:prstGeom>
+          <a:noFill/>
+          <a:ln/>
+        </p:spPr>
+        <p:txBody>
+          <a:bodyPr wrap="square" lIns="0" tIns="0" rIns="0" bIns="0" rtlCol="0" anchor="t"/>
+          <a:lstStyle/>
+          <a:p>
+            <a:pPr indent="0" marL="0">
+              <a:buNone/>
+            </a:pPr>
+            <a:r>
+              <a:rPr lang="en-US" sz="1600" b="1" dirty="0">
+                <a:solidFill>
+                  <a:srgbClr val="A65D00"/>
+                </a:solidFill>
+                <a:latin typeface="Calibri" pitchFamily="34" charset="0"/>
+                <a:ea typeface="Calibri" pitchFamily="34" charset="-122"/>
+                <a:cs typeface="Calibri" pitchFamily="34" charset="-120"/>
+              </a:rPr>
+              <a:t>Le rouge est une information. Lis-le, il te dit où chercher.</a:t>
+            </a:r>
+            <a:endParaRPr lang="en-US" sz="1600" dirty="0"/>
+          </a:p>
+        </p:txBody>
+      </p:sp>
+      <p:sp>
+        <p:nvSpPr>
+          <p:cNvPr id="15" name="Shape 13"/>
+          <p:cNvSpPr/>
+          <p:nvPr/>
+        </p:nvSpPr>
+        <p:spPr>
+          <a:xfrm>
+            <a:off x="640080" y="2212848"/>
+            <a:ext cx="10881360" cy="475488"/>
+          </a:xfrm>
+          <a:prstGeom prst="roundRect">
+            <a:avLst>
+              <a:gd name="adj" fmla="val 15385"/>
             </a:avLst>
           </a:prstGeom>
           <a:solidFill>
             <a:srgbClr val="FFFFFF"/>
           </a:solidFill>
-          <a:ln/>
+          <a:ln w="19050">
+            <a:solidFill>
+              <a:srgbClr val="E4E4EE"/>
+            </a:solidFill>
+            <a:prstDash val="solid"/>
+          </a:ln>
           <a:effectLst>
             <a:outerShdw sx="100000" sy="100000" kx="0" ky="0" algn="bl" rotWithShape="0" blurRad="127000" dist="25400" dir="5400000">
               <a:srgbClr val="20204A">
@@ -12617,73 +12541,92 @@
       </p:sp>
       <p:sp>
         <p:nvSpPr>
-          <p:cNvPr id="15" name="Shape 13"/>
-          <p:cNvSpPr/>
-          <p:nvPr/>
-        </p:nvSpPr>
-        <p:spPr>
-          <a:xfrm>
-            <a:off x="868680" y="2606040"/>
-            <a:ext cx="566928" cy="566928"/>
-          </a:xfrm>
-          <a:prstGeom prst="ellipse">
-            <a:avLst/>
-          </a:prstGeom>
-          <a:solidFill>
-            <a:srgbClr val="6B2D8F"/>
-          </a:solidFill>
-          <a:ln/>
-        </p:spPr>
-      </p:sp>
-      <p:sp>
-        <p:nvSpPr>
           <p:cNvPr id="16" name="Text 14"/>
           <p:cNvSpPr txBox="1"/>
           <p:nvPr/>
         </p:nvSpPr>
         <p:spPr>
           <a:xfrm>
-            <a:off x="868680" y="2606040"/>
-            <a:ext cx="566928" cy="566928"/>
-          </a:xfrm>
-          <a:prstGeom prst="rect">
-            <a:avLst/>
-          </a:prstGeom>
-          <a:noFill/>
-          <a:ln/>
-        </p:spPr>
-        <p:txBody>
-          <a:bodyPr wrap="square" lIns="0" tIns="0" rIns="0" bIns="0" rtlCol="0" anchor="ctr"/>
-          <a:lstStyle/>
-          <a:p>
-            <a:pPr algn="ctr" indent="0" marL="0">
-              <a:buNone/>
-            </a:pPr>
-            <a:r>
-              <a:rPr lang="en-US" sz="2200" b="1" dirty="0">
-                <a:solidFill>
-                  <a:srgbClr val="FFFFFF"/>
+            <a:off x="914400" y="2313432"/>
+            <a:ext cx="3200400" cy="320040"/>
+          </a:xfrm>
+          <a:prstGeom prst="rect">
+            <a:avLst/>
+          </a:prstGeom>
+          <a:noFill/>
+          <a:ln/>
+        </p:spPr>
+        <p:txBody>
+          <a:bodyPr wrap="square" lIns="0" tIns="0" rIns="0" bIns="0" rtlCol="0" anchor="t"/>
+          <a:lstStyle/>
+          <a:p>
+            <a:pPr indent="0" marL="0">
+              <a:buNone/>
+            </a:pPr>
+            <a:r>
+              <a:rPr lang="en-US" sz="1400" b="1" dirty="0">
+                <a:solidFill>
+                  <a:srgbClr val="B01B20"/>
+                </a:solidFill>
+                <a:latin typeface="Courier New" pitchFamily="34" charset="0"/>
+                <a:ea typeface="Courier New" pitchFamily="34" charset="-122"/>
+                <a:cs typeface="Courier New" pitchFamily="34" charset="-120"/>
+              </a:rPr>
+              <a:t>IndentationError</a:t>
+            </a:r>
+            <a:endParaRPr lang="en-US" sz="1400" dirty="0"/>
+          </a:p>
+        </p:txBody>
+      </p:sp>
+      <p:sp>
+        <p:nvSpPr>
+          <p:cNvPr id="17" name="Text 15"/>
+          <p:cNvSpPr txBox="1"/>
+          <p:nvPr/>
+        </p:nvSpPr>
+        <p:spPr>
+          <a:xfrm>
+            <a:off x="4251960" y="2322576"/>
+            <a:ext cx="3931920" cy="320040"/>
+          </a:xfrm>
+          <a:prstGeom prst="rect">
+            <a:avLst/>
+          </a:prstGeom>
+          <a:noFill/>
+          <a:ln/>
+        </p:spPr>
+        <p:txBody>
+          <a:bodyPr wrap="square" lIns="0" tIns="0" rIns="0" bIns="0" rtlCol="0" anchor="t"/>
+          <a:lstStyle/>
+          <a:p>
+            <a:pPr indent="0" marL="0">
+              <a:buNone/>
+            </a:pPr>
+            <a:r>
+              <a:rPr lang="en-US" sz="1300" dirty="0">
+                <a:solidFill>
+                  <a:srgbClr val="5A5A72"/>
                 </a:solidFill>
                 <a:latin typeface="Calibri" pitchFamily="34" charset="0"/>
                 <a:ea typeface="Calibri" pitchFamily="34" charset="-122"/>
                 <a:cs typeface="Calibri" pitchFamily="34" charset="-120"/>
               </a:rPr>
-              <a:t>1</a:t>
-            </a:r>
-            <a:endParaRPr lang="en-US" sz="2200" dirty="0"/>
-          </a:p>
-        </p:txBody>
-      </p:sp>
-      <p:sp>
-        <p:nvSpPr>
-          <p:cNvPr id="17" name="Text 15"/>
-          <p:cNvSpPr txBox="1"/>
-          <p:nvPr/>
-        </p:nvSpPr>
-        <p:spPr>
-          <a:xfrm>
-            <a:off x="868680" y="3310128"/>
-            <a:ext cx="4846320" cy="457200"/>
+              <a:t>Il manque les 4 espaces</a:t>
+            </a:r>
+            <a:endParaRPr lang="en-US" sz="1300" dirty="0"/>
+          </a:p>
+        </p:txBody>
+      </p:sp>
+      <p:sp>
+        <p:nvSpPr>
+          <p:cNvPr id="18" name="Text 16"/>
+          <p:cNvSpPr txBox="1"/>
+          <p:nvPr/>
+        </p:nvSpPr>
+        <p:spPr>
+          <a:xfrm>
+            <a:off x="8275320" y="2313432"/>
+            <a:ext cx="3291840" cy="320040"/>
           </a:xfrm>
           <a:prstGeom prst="rect">
             <a:avLst/>
@@ -12699,59 +12642,17 @@
               <a:buNone/>
             </a:pPr>
             <a:r>
-              <a:rPr lang="en-US" sz="2200" b="1" dirty="0">
-                <a:solidFill>
-                  <a:srgbClr val="6B2D8F"/>
+              <a:rPr lang="en-US" sz="1300" b="1" dirty="0">
+                <a:solidFill>
+                  <a:srgbClr val="0C5C29"/>
                 </a:solidFill>
                 <a:latin typeface="Calibri" pitchFamily="34" charset="0"/>
                 <a:ea typeface="Calibri" pitchFamily="34" charset="-122"/>
                 <a:cs typeface="Calibri" pitchFamily="34" charset="-120"/>
               </a:rPr>
-              <a:t>Le Mur de Mission</a:t>
-            </a:r>
-            <a:endParaRPr lang="en-US" sz="2200" dirty="0"/>
-          </a:p>
-        </p:txBody>
-      </p:sp>
-      <p:sp>
-        <p:nvSpPr>
-          <p:cNvPr id="18" name="Text 16"/>
-          <p:cNvSpPr txBox="1"/>
-          <p:nvPr/>
-        </p:nvSpPr>
-        <p:spPr>
-          <a:xfrm>
-            <a:off x="868680" y="3822192"/>
-            <a:ext cx="4846320" cy="777240"/>
-          </a:xfrm>
-          <a:prstGeom prst="rect">
-            <a:avLst/>
-          </a:prstGeom>
-          <a:noFill/>
-          <a:ln/>
-        </p:spPr>
-        <p:txBody>
-          <a:bodyPr wrap="square" lIns="0" tIns="0" rIns="0" bIns="0" rtlCol="0" anchor="t"/>
-          <a:lstStyle/>
-          <a:p>
-            <a:pPr indent="0" marL="0">
-              <a:lnSpc>
-                <a:spcPts val="2000"/>
-              </a:lnSpc>
-              <a:buNone/>
-            </a:pPr>
-            <a:r>
-              <a:rPr lang="en-US" sz="1600" dirty="0">
-                <a:solidFill>
-                  <a:srgbClr val="5A5A72"/>
-                </a:solidFill>
-                <a:latin typeface="Calibri" pitchFamily="34" charset="0"/>
-                <a:ea typeface="Calibri" pitchFamily="34" charset="-122"/>
-                <a:cs typeface="Calibri" pitchFamily="34" charset="-120"/>
-              </a:rPr>
-              <a:t>La classe avance d'une case. Tout le monde vient l'écrire.</a:t>
-            </a:r>
-            <a:endParaRPr lang="en-US" sz="1600" dirty="0"/>
+              <a:t>→  Après deux-points, on décale</a:t>
+            </a:r>
+            <a:endParaRPr lang="en-US" sz="1300" dirty="0"/>
           </a:p>
         </p:txBody>
       </p:sp>
@@ -12763,18 +12664,23 @@
         </p:nvSpPr>
         <p:spPr>
           <a:xfrm>
-            <a:off x="6217920" y="2377440"/>
-            <a:ext cx="5303520" cy="2377440"/>
-          </a:xfrm>
-          <a:prstGeom prst="roundRect">
-            <a:avLst>
-              <a:gd name="adj" fmla="val 3077"/>
+            <a:off x="640080" y="2761488"/>
+            <a:ext cx="10881360" cy="475488"/>
+          </a:xfrm>
+          <a:prstGeom prst="roundRect">
+            <a:avLst>
+              <a:gd name="adj" fmla="val 15385"/>
             </a:avLst>
           </a:prstGeom>
           <a:solidFill>
             <a:srgbClr val="FFFFFF"/>
           </a:solidFill>
-          <a:ln/>
+          <a:ln w="19050">
+            <a:solidFill>
+              <a:srgbClr val="E4E4EE"/>
+            </a:solidFill>
+            <a:prstDash val="solid"/>
+          </a:ln>
           <a:effectLst>
             <a:outerShdw sx="100000" sy="100000" kx="0" ky="0" algn="bl" rotWithShape="0" blurRad="127000" dist="25400" dir="5400000">
               <a:srgbClr val="20204A">
@@ -12786,23 +12692,42 @@
       </p:sp>
       <p:sp>
         <p:nvSpPr>
-          <p:cNvPr id="20" name="Shape 18"/>
-          <p:cNvSpPr/>
-          <p:nvPr/>
-        </p:nvSpPr>
-        <p:spPr>
-          <a:xfrm>
-            <a:off x="6446520" y="2606040"/>
-            <a:ext cx="566928" cy="566928"/>
-          </a:xfrm>
-          <a:prstGeom prst="ellipse">
-            <a:avLst/>
-          </a:prstGeom>
-          <a:solidFill>
-            <a:srgbClr val="13678F"/>
-          </a:solidFill>
-          <a:ln/>
-        </p:spPr>
+          <p:cNvPr id="20" name="Text 18"/>
+          <p:cNvSpPr txBox="1"/>
+          <p:nvPr/>
+        </p:nvSpPr>
+        <p:spPr>
+          <a:xfrm>
+            <a:off x="914400" y="2862072"/>
+            <a:ext cx="3200400" cy="320040"/>
+          </a:xfrm>
+          <a:prstGeom prst="rect">
+            <a:avLst/>
+          </a:prstGeom>
+          <a:noFill/>
+          <a:ln/>
+        </p:spPr>
+        <p:txBody>
+          <a:bodyPr wrap="square" lIns="0" tIns="0" rIns="0" bIns="0" rtlCol="0" anchor="t"/>
+          <a:lstStyle/>
+          <a:p>
+            <a:pPr indent="0" marL="0">
+              <a:buNone/>
+            </a:pPr>
+            <a:r>
+              <a:rPr lang="en-US" sz="1400" b="1" dirty="0">
+                <a:solidFill>
+                  <a:srgbClr val="B01B20"/>
+                </a:solidFill>
+                <a:latin typeface="Courier New" pitchFamily="34" charset="0"/>
+                <a:ea typeface="Courier New" pitchFamily="34" charset="-122"/>
+                <a:cs typeface="Courier New" pitchFamily="34" charset="-120"/>
+              </a:rPr>
+              <a:t>SyntaxError</a:t>
+            </a:r>
+            <a:endParaRPr lang="en-US" sz="1400" dirty="0"/>
+          </a:p>
+        </p:txBody>
       </p:sp>
       <p:sp>
         <p:nvSpPr>
@@ -12812,34 +12737,34 @@
         </p:nvSpPr>
         <p:spPr>
           <a:xfrm>
-            <a:off x="6446520" y="2606040"/>
-            <a:ext cx="566928" cy="566928"/>
-          </a:xfrm>
-          <a:prstGeom prst="rect">
-            <a:avLst/>
-          </a:prstGeom>
-          <a:noFill/>
-          <a:ln/>
-        </p:spPr>
-        <p:txBody>
-          <a:bodyPr wrap="square" lIns="0" tIns="0" rIns="0" bIns="0" rtlCol="0" anchor="ctr"/>
-          <a:lstStyle/>
-          <a:p>
-            <a:pPr algn="ctr" indent="0" marL="0">
-              <a:buNone/>
-            </a:pPr>
-            <a:r>
-              <a:rPr lang="en-US" sz="2200" b="1" dirty="0">
-                <a:solidFill>
-                  <a:srgbClr val="FFFFFF"/>
+            <a:off x="4251960" y="2871216"/>
+            <a:ext cx="3931920" cy="320040"/>
+          </a:xfrm>
+          <a:prstGeom prst="rect">
+            <a:avLst/>
+          </a:prstGeom>
+          <a:noFill/>
+          <a:ln/>
+        </p:spPr>
+        <p:txBody>
+          <a:bodyPr wrap="square" lIns="0" tIns="0" rIns="0" bIns="0" rtlCol="0" anchor="t"/>
+          <a:lstStyle/>
+          <a:p>
+            <a:pPr indent="0" marL="0">
+              <a:buNone/>
+            </a:pPr>
+            <a:r>
+              <a:rPr lang="en-US" sz="1300" dirty="0">
+                <a:solidFill>
+                  <a:srgbClr val="5A5A72"/>
                 </a:solidFill>
                 <a:latin typeface="Calibri" pitchFamily="34" charset="0"/>
                 <a:ea typeface="Calibri" pitchFamily="34" charset="-122"/>
                 <a:cs typeface="Calibri" pitchFamily="34" charset="-120"/>
               </a:rPr>
-              <a:t>2</a:t>
-            </a:r>
-            <a:endParaRPr lang="en-US" sz="2200" dirty="0"/>
+              <a:t>Deux-points oubliés, ou = au lieu de ==</a:t>
+            </a:r>
+            <a:endParaRPr lang="en-US" sz="1300" dirty="0"/>
           </a:p>
         </p:txBody>
       </p:sp>
@@ -12851,8 +12776,8 @@
         </p:nvSpPr>
         <p:spPr>
           <a:xfrm>
-            <a:off x="6446520" y="3310128"/>
-            <a:ext cx="4846320" cy="457200"/>
+            <a:off x="8275320" y="2862072"/>
+            <a:ext cx="3291840" cy="320040"/>
           </a:xfrm>
           <a:prstGeom prst="rect">
             <a:avLst/>
@@ -12868,30 +12793,64 @@
               <a:buNone/>
             </a:pPr>
             <a:r>
-              <a:rPr lang="en-US" sz="2200" b="1" dirty="0">
-                <a:solidFill>
-                  <a:srgbClr val="13678F"/>
+              <a:rPr lang="en-US" sz="1300" b="1" dirty="0">
+                <a:solidFill>
+                  <a:srgbClr val="0C5C29"/>
                 </a:solidFill>
                 <a:latin typeface="Calibri" pitchFamily="34" charset="0"/>
                 <a:ea typeface="Calibri" pitchFamily="34" charset="-122"/>
                 <a:cs typeface="Calibri" pitchFamily="34" charset="-120"/>
               </a:rPr>
-              <a:t>La question</a:t>
-            </a:r>
-            <a:endParaRPr lang="en-US" sz="2200" dirty="0"/>
-          </a:p>
-        </p:txBody>
-      </p:sp>
-      <p:sp>
-        <p:nvSpPr>
-          <p:cNvPr id="23" name="Text 21"/>
-          <p:cNvSpPr txBox="1"/>
-          <p:nvPr/>
-        </p:nvSpPr>
-        <p:spPr>
-          <a:xfrm>
-            <a:off x="6446520" y="3822192"/>
-            <a:ext cx="4846320" cy="777240"/>
+              <a:t>→  Un ordre, ou une question ?</a:t>
+            </a:r>
+            <a:endParaRPr lang="en-US" sz="1300" dirty="0"/>
+          </a:p>
+        </p:txBody>
+      </p:sp>
+      <p:sp>
+        <p:nvSpPr>
+          <p:cNvPr id="23" name="Shape 21"/>
+          <p:cNvSpPr/>
+          <p:nvPr/>
+        </p:nvSpPr>
+        <p:spPr>
+          <a:xfrm>
+            <a:off x="640080" y="3310128"/>
+            <a:ext cx="10881360" cy="475488"/>
+          </a:xfrm>
+          <a:prstGeom prst="roundRect">
+            <a:avLst>
+              <a:gd name="adj" fmla="val 15385"/>
+            </a:avLst>
+          </a:prstGeom>
+          <a:solidFill>
+            <a:srgbClr val="FFFFFF"/>
+          </a:solidFill>
+          <a:ln w="19050">
+            <a:solidFill>
+              <a:srgbClr val="E4E4EE"/>
+            </a:solidFill>
+            <a:prstDash val="solid"/>
+          </a:ln>
+          <a:effectLst>
+            <a:outerShdw sx="100000" sy="100000" kx="0" ky="0" algn="bl" rotWithShape="0" blurRad="127000" dist="25400" dir="5400000">
+              <a:srgbClr val="20204A">
+                <a:alpha val="12000"/>
+              </a:srgbClr>
+            </a:outerShdw>
+          </a:effectLst>
+        </p:spPr>
+      </p:sp>
+      <p:sp>
+        <p:nvSpPr>
+          <p:cNvPr id="24" name="Text 22"/>
+          <p:cNvSpPr txBox="1"/>
+          <p:nvPr/>
+        </p:nvSpPr>
+        <p:spPr>
+          <a:xfrm>
+            <a:off x="914400" y="3410712"/>
+            <a:ext cx="3200400" cy="320040"/>
           </a:xfrm>
           <a:prstGeom prst="rect">
             <a:avLst/>
@@ -12904,13 +12863,49 @@
           <a:lstStyle/>
           <a:p>
             <a:pPr indent="0" marL="0">
-              <a:lnSpc>
-                <a:spcPts val="2000"/>
-              </a:lnSpc>
-              <a:buNone/>
-            </a:pPr>
-            <a:r>
-              <a:rPr lang="en-US" sz="1600" dirty="0">
+              <a:buNone/>
+            </a:pPr>
+            <a:r>
+              <a:rPr lang="en-US" sz="1400" b="1" dirty="0">
+                <a:solidFill>
+                  <a:srgbClr val="B01B20"/>
+                </a:solidFill>
+                <a:latin typeface="Courier New" pitchFamily="34" charset="0"/>
+                <a:ea typeface="Courier New" pitchFamily="34" charset="-122"/>
+                <a:cs typeface="Courier New" pitchFamily="34" charset="-120"/>
+              </a:rPr>
+              <a:t>Les DEUX messages</a:t>
+            </a:r>
+            <a:endParaRPr lang="en-US" sz="1400" dirty="0"/>
+          </a:p>
+        </p:txBody>
+      </p:sp>
+      <p:sp>
+        <p:nvSpPr>
+          <p:cNvPr id="25" name="Text 23"/>
+          <p:cNvSpPr txBox="1"/>
+          <p:nvPr/>
+        </p:nvSpPr>
+        <p:spPr>
+          <a:xfrm>
+            <a:off x="4251960" y="3419856"/>
+            <a:ext cx="3931920" cy="320040"/>
+          </a:xfrm>
+          <a:prstGeom prst="rect">
+            <a:avLst/>
+          </a:prstGeom>
+          <a:noFill/>
+          <a:ln/>
+        </p:spPr>
+        <p:txBody>
+          <a:bodyPr wrap="square" lIns="0" tIns="0" rIns="0" bIns="0" rtlCol="0" anchor="t"/>
+          <a:lstStyle/>
+          <a:p>
+            <a:pPr indent="0" marL="0">
+              <a:buNone/>
+            </a:pPr>
+            <a:r>
+              <a:rPr lang="en-US" sz="1300" dirty="0">
                 <a:solidFill>
                   <a:srgbClr val="5A5A72"/>
                 </a:solidFill>
@@ -12918,22 +12913,22 @@
                 <a:ea typeface="Calibri" pitchFamily="34" charset="-122"/>
                 <a:cs typeface="Calibri" pitchFamily="34" charset="-120"/>
               </a:rPr>
-              <a:t>Qu'avez-vous compris aujourd'hui ? De quoi n'êtes-vous pas encore sûrs ?</a:t>
-            </a:r>
-            <a:endParaRPr lang="en-US" sz="1600" dirty="0"/>
-          </a:p>
-        </p:txBody>
-      </p:sp>
-      <p:sp>
-        <p:nvSpPr>
-          <p:cNvPr id="24" name="Text 22"/>
-          <p:cNvSpPr txBox="1"/>
-          <p:nvPr/>
-        </p:nvSpPr>
-        <p:spPr>
-          <a:xfrm>
-            <a:off x="640080" y="5440680"/>
-            <a:ext cx="10881360" cy="640080"/>
+              <a:t>Deux print dans le if, zéro dans le else</a:t>
+            </a:r>
+            <a:endParaRPr lang="en-US" sz="1300" dirty="0"/>
+          </a:p>
+        </p:txBody>
+      </p:sp>
+      <p:sp>
+        <p:nvSpPr>
+          <p:cNvPr id="26" name="Text 24"/>
+          <p:cNvSpPr txBox="1"/>
+          <p:nvPr/>
+        </p:nvSpPr>
+        <p:spPr>
+          <a:xfrm>
+            <a:off x="8275320" y="3410712"/>
+            <a:ext cx="3291840" cy="320040"/>
           </a:xfrm>
           <a:prstGeom prst="rect">
             <a:avLst/>
@@ -12949,17 +12944,621 @@
               <a:buNone/>
             </a:pPr>
             <a:r>
-              <a:rPr lang="en-US" sz="2100" b="1" dirty="0">
-                <a:solidFill>
-                  <a:srgbClr val="6B2D8F"/>
+              <a:rPr lang="en-US" sz="1300" b="1" dirty="0">
+                <a:solidFill>
+                  <a:srgbClr val="0C5C29"/>
                 </a:solidFill>
                 <a:latin typeface="Calibri" pitchFamily="34" charset="0"/>
                 <a:ea typeface="Calibri" pitchFamily="34" charset="-122"/>
                 <a:cs typeface="Calibri" pitchFamily="34" charset="-120"/>
               </a:rPr>
-              <a:t>On écoute, on ne corrige pas. Ce qui revient le plus ouvrira samedi prochain.</a:t>
-            </a:r>
-            <a:endParaRPr lang="en-US" sz="2100" dirty="0"/>
+              <a:t>→  Relis le décalage</a:t>
+            </a:r>
+            <a:endParaRPr lang="en-US" sz="1300" dirty="0"/>
+          </a:p>
+        </p:txBody>
+      </p:sp>
+      <p:sp>
+        <p:nvSpPr>
+          <p:cNvPr id="27" name="Shape 25"/>
+          <p:cNvSpPr/>
+          <p:nvPr/>
+        </p:nvSpPr>
+        <p:spPr>
+          <a:xfrm>
+            <a:off x="640080" y="3858768"/>
+            <a:ext cx="10881360" cy="475488"/>
+          </a:xfrm>
+          <a:prstGeom prst="roundRect">
+            <a:avLst>
+              <a:gd name="adj" fmla="val 15385"/>
+            </a:avLst>
+          </a:prstGeom>
+          <a:solidFill>
+            <a:srgbClr val="FFFFFF"/>
+          </a:solidFill>
+          <a:ln w="19050">
+            <a:solidFill>
+              <a:srgbClr val="E4E4EE"/>
+            </a:solidFill>
+            <a:prstDash val="solid"/>
+          </a:ln>
+          <a:effectLst>
+            <a:outerShdw sx="100000" sy="100000" kx="0" ky="0" algn="bl" rotWithShape="0" blurRad="127000" dist="25400" dir="5400000">
+              <a:srgbClr val="20204A">
+                <a:alpha val="12000"/>
+              </a:srgbClr>
+            </a:outerShdw>
+          </a:effectLst>
+        </p:spPr>
+      </p:sp>
+      <p:sp>
+        <p:nvSpPr>
+          <p:cNvPr id="28" name="Text 26"/>
+          <p:cNvSpPr txBox="1"/>
+          <p:nvPr/>
+        </p:nvSpPr>
+        <p:spPr>
+          <a:xfrm>
+            <a:off x="914400" y="3959352"/>
+            <a:ext cx="3200400" cy="320040"/>
+          </a:xfrm>
+          <a:prstGeom prst="rect">
+            <a:avLst/>
+          </a:prstGeom>
+          <a:noFill/>
+          <a:ln/>
+        </p:spPr>
+        <p:txBody>
+          <a:bodyPr wrap="square" lIns="0" tIns="0" rIns="0" bIns="0" rtlCol="0" anchor="t"/>
+          <a:lstStyle/>
+          <a:p>
+            <a:pPr indent="0" marL="0">
+              <a:buNone/>
+            </a:pPr>
+            <a:r>
+              <a:rPr lang="en-US" sz="1400" b="1" dirty="0">
+                <a:solidFill>
+                  <a:srgbClr val="B01B20"/>
+                </a:solidFill>
+                <a:latin typeface="Courier New" pitchFamily="34" charset="0"/>
+                <a:ea typeface="Courier New" pitchFamily="34" charset="-122"/>
+                <a:cs typeface="Courier New" pitchFamily="34" charset="-120"/>
+              </a:rPr>
+              <a:t>TypeError</a:t>
+            </a:r>
+            <a:endParaRPr lang="en-US" sz="1400" dirty="0"/>
+          </a:p>
+        </p:txBody>
+      </p:sp>
+      <p:sp>
+        <p:nvSpPr>
+          <p:cNvPr id="29" name="Text 27"/>
+          <p:cNvSpPr txBox="1"/>
+          <p:nvPr/>
+        </p:nvSpPr>
+        <p:spPr>
+          <a:xfrm>
+            <a:off x="4251960" y="3968496"/>
+            <a:ext cx="3931920" cy="320040"/>
+          </a:xfrm>
+          <a:prstGeom prst="rect">
+            <a:avLst/>
+          </a:prstGeom>
+          <a:noFill/>
+          <a:ln/>
+        </p:spPr>
+        <p:txBody>
+          <a:bodyPr wrap="square" lIns="0" tIns="0" rIns="0" bIns="0" rtlCol="0" anchor="t"/>
+          <a:lstStyle/>
+          <a:p>
+            <a:pPr indent="0" marL="0">
+              <a:buNone/>
+            </a:pPr>
+            <a:r>
+              <a:rPr lang="en-US" sz="1300" dirty="0">
+                <a:solidFill>
+                  <a:srgbClr val="5A5A72"/>
+                </a:solidFill>
+                <a:latin typeface="Calibri" pitchFamily="34" charset="0"/>
+                <a:ea typeface="Calibri" pitchFamily="34" charset="-122"/>
+                <a:cs typeface="Calibri" pitchFamily="34" charset="-120"/>
+              </a:rPr>
+              <a:t>Du texte et un nombre mélangés</a:t>
+            </a:r>
+            <a:endParaRPr lang="en-US" sz="1300" dirty="0"/>
+          </a:p>
+        </p:txBody>
+      </p:sp>
+      <p:sp>
+        <p:nvSpPr>
+          <p:cNvPr id="30" name="Text 28"/>
+          <p:cNvSpPr txBox="1"/>
+          <p:nvPr/>
+        </p:nvSpPr>
+        <p:spPr>
+          <a:xfrm>
+            <a:off x="8275320" y="3959352"/>
+            <a:ext cx="3291840" cy="320040"/>
+          </a:xfrm>
+          <a:prstGeom prst="rect">
+            <a:avLst/>
+          </a:prstGeom>
+          <a:noFill/>
+          <a:ln/>
+        </p:spPr>
+        <p:txBody>
+          <a:bodyPr wrap="square" lIns="0" tIns="0" rIns="0" bIns="0" rtlCol="0" anchor="t"/>
+          <a:lstStyle/>
+          <a:p>
+            <a:pPr indent="0" marL="0">
+              <a:buNone/>
+            </a:pPr>
+            <a:r>
+              <a:rPr lang="en-US" sz="1300" b="1" dirty="0">
+                <a:solidFill>
+                  <a:srgbClr val="0C5C29"/>
+                </a:solidFill>
+                <a:latin typeface="Calibri" pitchFamily="34" charset="0"/>
+                <a:ea typeface="Calibri" pitchFamily="34" charset="-122"/>
+                <a:cs typeface="Calibri" pitchFamily="34" charset="-120"/>
+              </a:rPr>
+              <a:t>→  int() pour calculer · str() pour coller</a:t>
+            </a:r>
+            <a:endParaRPr lang="en-US" sz="1300" dirty="0"/>
+          </a:p>
+        </p:txBody>
+      </p:sp>
+      <p:sp>
+        <p:nvSpPr>
+          <p:cNvPr id="31" name="Shape 29"/>
+          <p:cNvSpPr/>
+          <p:nvPr/>
+        </p:nvSpPr>
+        <p:spPr>
+          <a:xfrm>
+            <a:off x="640080" y="4407408"/>
+            <a:ext cx="10881360" cy="475488"/>
+          </a:xfrm>
+          <a:prstGeom prst="roundRect">
+            <a:avLst>
+              <a:gd name="adj" fmla="val 15385"/>
+            </a:avLst>
+          </a:prstGeom>
+          <a:solidFill>
+            <a:srgbClr val="FFFFFF"/>
+          </a:solidFill>
+          <a:ln w="19050">
+            <a:solidFill>
+              <a:srgbClr val="E4E4EE"/>
+            </a:solidFill>
+            <a:prstDash val="solid"/>
+          </a:ln>
+          <a:effectLst>
+            <a:outerShdw sx="100000" sy="100000" kx="0" ky="0" algn="bl" rotWithShape="0" blurRad="127000" dist="25400" dir="5400000">
+              <a:srgbClr val="20204A">
+                <a:alpha val="12000"/>
+              </a:srgbClr>
+            </a:outerShdw>
+          </a:effectLst>
+        </p:spPr>
+      </p:sp>
+      <p:sp>
+        <p:nvSpPr>
+          <p:cNvPr id="32" name="Text 30"/>
+          <p:cNvSpPr txBox="1"/>
+          <p:nvPr/>
+        </p:nvSpPr>
+        <p:spPr>
+          <a:xfrm>
+            <a:off x="914400" y="4507992"/>
+            <a:ext cx="3200400" cy="320040"/>
+          </a:xfrm>
+          <a:prstGeom prst="rect">
+            <a:avLst/>
+          </a:prstGeom>
+          <a:noFill/>
+          <a:ln/>
+        </p:spPr>
+        <p:txBody>
+          <a:bodyPr wrap="square" lIns="0" tIns="0" rIns="0" bIns="0" rtlCol="0" anchor="t"/>
+          <a:lstStyle/>
+          <a:p>
+            <a:pPr indent="0" marL="0">
+              <a:buNone/>
+            </a:pPr>
+            <a:r>
+              <a:rPr lang="en-US" sz="1400" b="1" dirty="0">
+                <a:solidFill>
+                  <a:srgbClr val="B01B20"/>
+                </a:solidFill>
+                <a:latin typeface="Courier New" pitchFamily="34" charset="0"/>
+                <a:ea typeface="Courier New" pitchFamily="34" charset="-122"/>
+                <a:cs typeface="Courier New" pitchFamily="34" charset="-120"/>
+              </a:rPr>
+              <a:t>ValueError</a:t>
+            </a:r>
+            <a:endParaRPr lang="en-US" sz="1400" dirty="0"/>
+          </a:p>
+        </p:txBody>
+      </p:sp>
+      <p:sp>
+        <p:nvSpPr>
+          <p:cNvPr id="33" name="Text 31"/>
+          <p:cNvSpPr txBox="1"/>
+          <p:nvPr/>
+        </p:nvSpPr>
+        <p:spPr>
+          <a:xfrm>
+            <a:off x="4251960" y="4517136"/>
+            <a:ext cx="3931920" cy="320040"/>
+          </a:xfrm>
+          <a:prstGeom prst="rect">
+            <a:avLst/>
+          </a:prstGeom>
+          <a:noFill/>
+          <a:ln/>
+        </p:spPr>
+        <p:txBody>
+          <a:bodyPr wrap="square" lIns="0" tIns="0" rIns="0" bIns="0" rtlCol="0" anchor="t"/>
+          <a:lstStyle/>
+          <a:p>
+            <a:pPr indent="0" marL="0">
+              <a:buNone/>
+            </a:pPr>
+            <a:r>
+              <a:rPr lang="en-US" sz="1300" dirty="0">
+                <a:solidFill>
+                  <a:srgbClr val="5A5A72"/>
+                </a:solidFill>
+                <a:latin typeface="Calibri" pitchFamily="34" charset="0"/>
+                <a:ea typeface="Calibri" pitchFamily="34" charset="-122"/>
+                <a:cs typeface="Calibri" pitchFamily="34" charset="-120"/>
+              </a:rPr>
+              <a:t>int() sur autre chose qu'un nombre</a:t>
+            </a:r>
+            <a:endParaRPr lang="en-US" sz="1300" dirty="0"/>
+          </a:p>
+        </p:txBody>
+      </p:sp>
+      <p:sp>
+        <p:nvSpPr>
+          <p:cNvPr id="34" name="Text 32"/>
+          <p:cNvSpPr txBox="1"/>
+          <p:nvPr/>
+        </p:nvSpPr>
+        <p:spPr>
+          <a:xfrm>
+            <a:off x="8275320" y="4507992"/>
+            <a:ext cx="3291840" cy="320040"/>
+          </a:xfrm>
+          <a:prstGeom prst="rect">
+            <a:avLst/>
+          </a:prstGeom>
+          <a:noFill/>
+          <a:ln/>
+        </p:spPr>
+        <p:txBody>
+          <a:bodyPr wrap="square" lIns="0" tIns="0" rIns="0" bIns="0" rtlCol="0" anchor="t"/>
+          <a:lstStyle/>
+          <a:p>
+            <a:pPr indent="0" marL="0">
+              <a:buNone/>
+            </a:pPr>
+            <a:r>
+              <a:rPr lang="en-US" sz="1300" b="1" dirty="0">
+                <a:solidFill>
+                  <a:srgbClr val="0C5C29"/>
+                </a:solidFill>
+                <a:latin typeface="Calibri" pitchFamily="34" charset="0"/>
+                <a:ea typeface="Calibri" pitchFamily="34" charset="-122"/>
+                <a:cs typeface="Calibri" pitchFamily="34" charset="-120"/>
+              </a:rPr>
+              <a:t>→  Relance, et tape un chiffre</a:t>
+            </a:r>
+            <a:endParaRPr lang="en-US" sz="1300" dirty="0"/>
+          </a:p>
+        </p:txBody>
+      </p:sp>
+      <p:sp>
+        <p:nvSpPr>
+          <p:cNvPr id="35" name="Shape 33"/>
+          <p:cNvSpPr/>
+          <p:nvPr/>
+        </p:nvSpPr>
+        <p:spPr>
+          <a:xfrm>
+            <a:off x="640080" y="4956048"/>
+            <a:ext cx="10881360" cy="475488"/>
+          </a:xfrm>
+          <a:prstGeom prst="roundRect">
+            <a:avLst>
+              <a:gd name="adj" fmla="val 15385"/>
+            </a:avLst>
+          </a:prstGeom>
+          <a:solidFill>
+            <a:srgbClr val="FFFFFF"/>
+          </a:solidFill>
+          <a:ln w="19050">
+            <a:solidFill>
+              <a:srgbClr val="E4E4EE"/>
+            </a:solidFill>
+            <a:prstDash val="solid"/>
+          </a:ln>
+          <a:effectLst>
+            <a:outerShdw sx="100000" sy="100000" kx="0" ky="0" algn="bl" rotWithShape="0" blurRad="127000" dist="25400" dir="5400000">
+              <a:srgbClr val="20204A">
+                <a:alpha val="12000"/>
+              </a:srgbClr>
+            </a:outerShdw>
+          </a:effectLst>
+        </p:spPr>
+      </p:sp>
+      <p:sp>
+        <p:nvSpPr>
+          <p:cNvPr id="36" name="Text 34"/>
+          <p:cNvSpPr txBox="1"/>
+          <p:nvPr/>
+        </p:nvSpPr>
+        <p:spPr>
+          <a:xfrm>
+            <a:off x="914400" y="5056632"/>
+            <a:ext cx="3200400" cy="320040"/>
+          </a:xfrm>
+          <a:prstGeom prst="rect">
+            <a:avLst/>
+          </a:prstGeom>
+          <a:noFill/>
+          <a:ln/>
+        </p:spPr>
+        <p:txBody>
+          <a:bodyPr wrap="square" lIns="0" tIns="0" rIns="0" bIns="0" rtlCol="0" anchor="t"/>
+          <a:lstStyle/>
+          <a:p>
+            <a:pPr indent="0" marL="0">
+              <a:buNone/>
+            </a:pPr>
+            <a:r>
+              <a:rPr lang="en-US" sz="1400" b="1" dirty="0">
+                <a:solidFill>
+                  <a:srgbClr val="B01B20"/>
+                </a:solidFill>
+                <a:latin typeface="Courier New" pitchFamily="34" charset="0"/>
+                <a:ea typeface="Courier New" pitchFamily="34" charset="-122"/>
+                <a:cs typeface="Courier New" pitchFamily="34" charset="-120"/>
+              </a:rPr>
+              <a:t>Le compteur reste à 1</a:t>
+            </a:r>
+            <a:endParaRPr lang="en-US" sz="1400" dirty="0"/>
+          </a:p>
+        </p:txBody>
+      </p:sp>
+      <p:sp>
+        <p:nvSpPr>
+          <p:cNvPr id="37" name="Text 35"/>
+          <p:cNvSpPr txBox="1"/>
+          <p:nvPr/>
+        </p:nvSpPr>
+        <p:spPr>
+          <a:xfrm>
+            <a:off x="4251960" y="5065776"/>
+            <a:ext cx="3931920" cy="320040"/>
+          </a:xfrm>
+          <a:prstGeom prst="rect">
+            <a:avLst/>
+          </a:prstGeom>
+          <a:noFill/>
+          <a:ln/>
+        </p:spPr>
+        <p:txBody>
+          <a:bodyPr wrap="square" lIns="0" tIns="0" rIns="0" bIns="0" rtlCol="0" anchor="t"/>
+          <a:lstStyle/>
+          <a:p>
+            <a:pPr indent="0" marL="0">
+              <a:buNone/>
+            </a:pPr>
+            <a:r>
+              <a:rPr lang="en-US" sz="1300" dirty="0">
+                <a:solidFill>
+                  <a:srgbClr val="5A5A72"/>
+                </a:solidFill>
+                <a:latin typeface="Calibri" pitchFamily="34" charset="0"/>
+                <a:ea typeface="Calibri" pitchFamily="34" charset="-122"/>
+                <a:cs typeface="Calibri" pitchFamily="34" charset="-120"/>
+              </a:rPr>
+              <a:t>Tu as écrit  tour = 1</a:t>
+            </a:r>
+            <a:endParaRPr lang="en-US" sz="1300" dirty="0"/>
+          </a:p>
+        </p:txBody>
+      </p:sp>
+      <p:sp>
+        <p:nvSpPr>
+          <p:cNvPr id="38" name="Text 36"/>
+          <p:cNvSpPr txBox="1"/>
+          <p:nvPr/>
+        </p:nvSpPr>
+        <p:spPr>
+          <a:xfrm>
+            <a:off x="8275320" y="5056632"/>
+            <a:ext cx="3291840" cy="320040"/>
+          </a:xfrm>
+          <a:prstGeom prst="rect">
+            <a:avLst/>
+          </a:prstGeom>
+          <a:noFill/>
+          <a:ln/>
+        </p:spPr>
+        <p:txBody>
+          <a:bodyPr wrap="square" lIns="0" tIns="0" rIns="0" bIns="0" rtlCol="0" anchor="t"/>
+          <a:lstStyle/>
+          <a:p>
+            <a:pPr indent="0" marL="0">
+              <a:buNone/>
+            </a:pPr>
+            <a:r>
+              <a:rPr lang="en-US" sz="1300" b="1" dirty="0">
+                <a:solidFill>
+                  <a:srgbClr val="0C5C29"/>
+                </a:solidFill>
+                <a:latin typeface="Calibri" pitchFamily="34" charset="0"/>
+                <a:ea typeface="Calibri" pitchFamily="34" charset="-122"/>
+                <a:cs typeface="Calibri" pitchFamily="34" charset="-120"/>
+              </a:rPr>
+              <a:t>→  C'est  tour = tour + 1</a:t>
+            </a:r>
+            <a:endParaRPr lang="en-US" sz="1300" dirty="0"/>
+          </a:p>
+        </p:txBody>
+      </p:sp>
+      <p:sp>
+        <p:nvSpPr>
+          <p:cNvPr id="39" name="Shape 37"/>
+          <p:cNvSpPr/>
+          <p:nvPr/>
+        </p:nvSpPr>
+        <p:spPr>
+          <a:xfrm>
+            <a:off x="640080" y="5504688"/>
+            <a:ext cx="10881360" cy="475488"/>
+          </a:xfrm>
+          <a:prstGeom prst="roundRect">
+            <a:avLst>
+              <a:gd name="adj" fmla="val 15385"/>
+            </a:avLst>
+          </a:prstGeom>
+          <a:solidFill>
+            <a:srgbClr val="FFFFFF"/>
+          </a:solidFill>
+          <a:ln w="19050">
+            <a:solidFill>
+              <a:srgbClr val="E4E4EE"/>
+            </a:solidFill>
+            <a:prstDash val="solid"/>
+          </a:ln>
+          <a:effectLst>
+            <a:outerShdw sx="100000" sy="100000" kx="0" ky="0" algn="bl" rotWithShape="0" blurRad="127000" dist="25400" dir="5400000">
+              <a:srgbClr val="20204A">
+                <a:alpha val="12000"/>
+              </a:srgbClr>
+            </a:outerShdw>
+          </a:effectLst>
+        </p:spPr>
+      </p:sp>
+      <p:sp>
+        <p:nvSpPr>
+          <p:cNvPr id="40" name="Text 38"/>
+          <p:cNvSpPr txBox="1"/>
+          <p:nvPr/>
+        </p:nvSpPr>
+        <p:spPr>
+          <a:xfrm>
+            <a:off x="914400" y="5605272"/>
+            <a:ext cx="3200400" cy="320040"/>
+          </a:xfrm>
+          <a:prstGeom prst="rect">
+            <a:avLst/>
+          </a:prstGeom>
+          <a:noFill/>
+          <a:ln/>
+        </p:spPr>
+        <p:txBody>
+          <a:bodyPr wrap="square" lIns="0" tIns="0" rIns="0" bIns="0" rtlCol="0" anchor="t"/>
+          <a:lstStyle/>
+          <a:p>
+            <a:pPr indent="0" marL="0">
+              <a:buNone/>
+            </a:pPr>
+            <a:r>
+              <a:rPr lang="en-US" sz="1400" b="1" dirty="0">
+                <a:solidFill>
+                  <a:srgbClr val="B01B20"/>
+                </a:solidFill>
+                <a:latin typeface="Courier New" pitchFamily="34" charset="0"/>
+                <a:ea typeface="Courier New" pitchFamily="34" charset="-122"/>
+                <a:cs typeface="Courier New" pitchFamily="34" charset="-120"/>
+              </a:rPr>
+              <a:t>Le coup refusé est compté</a:t>
+            </a:r>
+            <a:endParaRPr lang="en-US" sz="1400" dirty="0"/>
+          </a:p>
+        </p:txBody>
+      </p:sp>
+      <p:sp>
+        <p:nvSpPr>
+          <p:cNvPr id="41" name="Text 39"/>
+          <p:cNvSpPr txBox="1"/>
+          <p:nvPr/>
+        </p:nvSpPr>
+        <p:spPr>
+          <a:xfrm>
+            <a:off x="4251960" y="5614416"/>
+            <a:ext cx="3931920" cy="320040"/>
+          </a:xfrm>
+          <a:prstGeom prst="rect">
+            <a:avLst/>
+          </a:prstGeom>
+          <a:noFill/>
+          <a:ln/>
+        </p:spPr>
+        <p:txBody>
+          <a:bodyPr wrap="square" lIns="0" tIns="0" rIns="0" bIns="0" rtlCol="0" anchor="t"/>
+          <a:lstStyle/>
+          <a:p>
+            <a:pPr indent="0" marL="0">
+              <a:buNone/>
+            </a:pPr>
+            <a:r>
+              <a:rPr lang="en-US" sz="1300" dirty="0">
+                <a:solidFill>
+                  <a:srgbClr val="5A5A72"/>
+                </a:solidFill>
+                <a:latin typeface="Calibri" pitchFamily="34" charset="0"/>
+                <a:ea typeface="Calibri" pitchFamily="34" charset="-122"/>
+                <a:cs typeface="Calibri" pitchFamily="34" charset="-120"/>
+              </a:rPr>
+              <a:t>tour = tour + 1 est au-dessus du if</a:t>
+            </a:r>
+            <a:endParaRPr lang="en-US" sz="1300" dirty="0"/>
+          </a:p>
+        </p:txBody>
+      </p:sp>
+      <p:sp>
+        <p:nvSpPr>
+          <p:cNvPr id="42" name="Text 40"/>
+          <p:cNvSpPr txBox="1"/>
+          <p:nvPr/>
+        </p:nvSpPr>
+        <p:spPr>
+          <a:xfrm>
+            <a:off x="8275320" y="5605272"/>
+            <a:ext cx="3291840" cy="320040"/>
+          </a:xfrm>
+          <a:prstGeom prst="rect">
+            <a:avLst/>
+          </a:prstGeom>
+          <a:noFill/>
+          <a:ln/>
+        </p:spPr>
+        <p:txBody>
+          <a:bodyPr wrap="square" lIns="0" tIns="0" rIns="0" bIns="0" rtlCol="0" anchor="t"/>
+          <a:lstStyle/>
+          <a:p>
+            <a:pPr indent="0" marL="0">
+              <a:buNone/>
+            </a:pPr>
+            <a:r>
+              <a:rPr lang="en-US" sz="1300" b="1" dirty="0">
+                <a:solidFill>
+                  <a:srgbClr val="0C5C29"/>
+                </a:solidFill>
+                <a:latin typeface="Calibri" pitchFamily="34" charset="0"/>
+                <a:ea typeface="Calibri" pitchFamily="34" charset="-122"/>
+                <a:cs typeface="Calibri" pitchFamily="34" charset="-120"/>
+              </a:rPr>
+              <a:t>→  Il va DANS le else, décalé</a:t>
+            </a:r>
+            <a:endParaRPr lang="en-US" sz="1300" dirty="0"/>
           </a:p>
         </p:txBody>
       </p:sp>
@@ -12974,6 +13573,751 @@
 <file path=ppt/slides/slide22.xml><?xml version="1.0" encoding="utf-8"?>
 <p:sld xmlns:a="http://schemas.openxmlformats.org/drawingml/2006/main" xmlns:r="http://schemas.openxmlformats.org/officeDocument/2006/relationships" xmlns:p="http://schemas.openxmlformats.org/presentationml/2006/main">
   <p:cSld name="Slide 22">
+    <p:bg>
+      <p:bgPr>
+        <a:solidFill>
+          <a:srgbClr val="F7F7FB"/>
+        </a:solidFill>
+      </p:bgPr>
+    </p:bg>
+    <p:spTree>
+      <p:nvGrpSpPr>
+        <p:cNvPr id="1" name=""/>
+        <p:cNvGrpSpPr/>
+        <p:nvPr/>
+      </p:nvGrpSpPr>
+      <p:grpSpPr>
+        <a:xfrm>
+          <a:off x="0" y="0"/>
+          <a:ext cx="0" cy="0"/>
+          <a:chOff x="0" y="0"/>
+          <a:chExt cx="0" cy="0"/>
+        </a:xfrm>
+      </p:grpSpPr>
+      <p:sp>
+        <p:nvSpPr>
+          <p:cNvPr id="2" name="Text 0"/>
+          <p:cNvSpPr txBox="1"/>
+          <p:nvPr/>
+        </p:nvSpPr>
+        <p:spPr>
+          <a:xfrm>
+            <a:off x="9509760" y="6181344"/>
+            <a:ext cx="2011680" cy="310896"/>
+          </a:xfrm>
+          <a:prstGeom prst="rect">
+            <a:avLst/>
+          </a:prstGeom>
+          <a:noFill/>
+          <a:ln/>
+        </p:spPr>
+        <p:txBody>
+          <a:bodyPr wrap="square" lIns="0" tIns="0" rIns="0" bIns="0" rtlCol="0" anchor="ctr"/>
+          <a:lstStyle/>
+          <a:p>
+            <a:pPr algn="r" indent="0" marL="0">
+              <a:buNone/>
+            </a:pPr>
+            <a:r>
+              <a:rPr lang="en-US" sz="1100" dirty="0">
+                <a:solidFill>
+                  <a:srgbClr val="5A5A72"/>
+                </a:solidFill>
+                <a:latin typeface="Courier New" pitchFamily="34" charset="0"/>
+                <a:ea typeface="Courier New" pitchFamily="34" charset="-122"/>
+                <a:cs typeface="Courier New" pitchFamily="34" charset="-120"/>
+              </a:rPr>
+              <a:t>13 h 52</a:t>
+            </a:r>
+            <a:endParaRPr lang="en-US" sz="1100" dirty="0"/>
+          </a:p>
+        </p:txBody>
+      </p:sp>
+      <p:sp>
+        <p:nvSpPr>
+          <p:cNvPr id="3" name="Shape 1"/>
+          <p:cNvSpPr/>
+          <p:nvPr/>
+        </p:nvSpPr>
+        <p:spPr>
+          <a:xfrm>
+            <a:off x="11558016" y="6217920"/>
+            <a:ext cx="68580" cy="68580"/>
+          </a:xfrm>
+          <a:prstGeom prst="roundRect">
+            <a:avLst>
+              <a:gd name="adj" fmla="val 26667"/>
+            </a:avLst>
+          </a:prstGeom>
+          <a:solidFill>
+            <a:srgbClr val="6B2D8F">
+              <a:alpha val="30000"/>
+            </a:srgbClr>
+          </a:solidFill>
+          <a:ln/>
+        </p:spPr>
+      </p:sp>
+      <p:sp>
+        <p:nvSpPr>
+          <p:cNvPr id="4" name="Shape 2"/>
+          <p:cNvSpPr/>
+          <p:nvPr/>
+        </p:nvSpPr>
+        <p:spPr>
+          <a:xfrm>
+            <a:off x="11650599" y="6217920"/>
+            <a:ext cx="68580" cy="68580"/>
+          </a:xfrm>
+          <a:prstGeom prst="roundRect">
+            <a:avLst>
+              <a:gd name="adj" fmla="val 26667"/>
+            </a:avLst>
+          </a:prstGeom>
+          <a:solidFill>
+            <a:srgbClr val="6B2D8F">
+              <a:alpha val="30000"/>
+            </a:srgbClr>
+          </a:solidFill>
+          <a:ln/>
+        </p:spPr>
+      </p:sp>
+      <p:sp>
+        <p:nvSpPr>
+          <p:cNvPr id="5" name="Shape 3"/>
+          <p:cNvSpPr/>
+          <p:nvPr/>
+        </p:nvSpPr>
+        <p:spPr>
+          <a:xfrm>
+            <a:off x="11743182" y="6217920"/>
+            <a:ext cx="68580" cy="68580"/>
+          </a:xfrm>
+          <a:prstGeom prst="roundRect">
+            <a:avLst>
+              <a:gd name="adj" fmla="val 26667"/>
+            </a:avLst>
+          </a:prstGeom>
+          <a:solidFill>
+            <a:srgbClr val="6B2D8F">
+              <a:alpha val="30000"/>
+            </a:srgbClr>
+          </a:solidFill>
+          <a:ln/>
+        </p:spPr>
+      </p:sp>
+      <p:sp>
+        <p:nvSpPr>
+          <p:cNvPr id="6" name="Shape 4"/>
+          <p:cNvSpPr/>
+          <p:nvPr/>
+        </p:nvSpPr>
+        <p:spPr>
+          <a:xfrm>
+            <a:off x="11558016" y="6310503"/>
+            <a:ext cx="68580" cy="68580"/>
+          </a:xfrm>
+          <a:prstGeom prst="roundRect">
+            <a:avLst>
+              <a:gd name="adj" fmla="val 26667"/>
+            </a:avLst>
+          </a:prstGeom>
+          <a:solidFill>
+            <a:srgbClr val="6B2D8F">
+              <a:alpha val="30000"/>
+            </a:srgbClr>
+          </a:solidFill>
+          <a:ln/>
+        </p:spPr>
+      </p:sp>
+      <p:sp>
+        <p:nvSpPr>
+          <p:cNvPr id="7" name="Shape 5"/>
+          <p:cNvSpPr/>
+          <p:nvPr/>
+        </p:nvSpPr>
+        <p:spPr>
+          <a:xfrm>
+            <a:off x="11650599" y="6310503"/>
+            <a:ext cx="68580" cy="68580"/>
+          </a:xfrm>
+          <a:prstGeom prst="roundRect">
+            <a:avLst>
+              <a:gd name="adj" fmla="val 26667"/>
+            </a:avLst>
+          </a:prstGeom>
+          <a:solidFill>
+            <a:srgbClr val="6B2D8F">
+              <a:alpha val="30000"/>
+            </a:srgbClr>
+          </a:solidFill>
+          <a:ln/>
+        </p:spPr>
+      </p:sp>
+      <p:sp>
+        <p:nvSpPr>
+          <p:cNvPr id="8" name="Shape 6"/>
+          <p:cNvSpPr/>
+          <p:nvPr/>
+        </p:nvSpPr>
+        <p:spPr>
+          <a:xfrm>
+            <a:off x="11743182" y="6310503"/>
+            <a:ext cx="68580" cy="68580"/>
+          </a:xfrm>
+          <a:prstGeom prst="roundRect">
+            <a:avLst>
+              <a:gd name="adj" fmla="val 26667"/>
+            </a:avLst>
+          </a:prstGeom>
+          <a:solidFill>
+            <a:srgbClr val="6B2D8F">
+              <a:alpha val="30000"/>
+            </a:srgbClr>
+          </a:solidFill>
+          <a:ln/>
+        </p:spPr>
+      </p:sp>
+      <p:sp>
+        <p:nvSpPr>
+          <p:cNvPr id="9" name="Shape 7"/>
+          <p:cNvSpPr/>
+          <p:nvPr/>
+        </p:nvSpPr>
+        <p:spPr>
+          <a:xfrm>
+            <a:off x="11558016" y="6403086"/>
+            <a:ext cx="68580" cy="68580"/>
+          </a:xfrm>
+          <a:prstGeom prst="roundRect">
+            <a:avLst>
+              <a:gd name="adj" fmla="val 26667"/>
+            </a:avLst>
+          </a:prstGeom>
+          <a:solidFill>
+            <a:srgbClr val="6B2D8F">
+              <a:alpha val="30000"/>
+            </a:srgbClr>
+          </a:solidFill>
+          <a:ln/>
+        </p:spPr>
+      </p:sp>
+      <p:sp>
+        <p:nvSpPr>
+          <p:cNvPr id="10" name="Shape 8"/>
+          <p:cNvSpPr/>
+          <p:nvPr/>
+        </p:nvSpPr>
+        <p:spPr>
+          <a:xfrm>
+            <a:off x="11650599" y="6403086"/>
+            <a:ext cx="68580" cy="68580"/>
+          </a:xfrm>
+          <a:prstGeom prst="roundRect">
+            <a:avLst>
+              <a:gd name="adj" fmla="val 26667"/>
+            </a:avLst>
+          </a:prstGeom>
+          <a:solidFill>
+            <a:srgbClr val="6B2D8F">
+              <a:alpha val="30000"/>
+            </a:srgbClr>
+          </a:solidFill>
+          <a:ln/>
+        </p:spPr>
+      </p:sp>
+      <p:sp>
+        <p:nvSpPr>
+          <p:cNvPr id="11" name="Shape 9"/>
+          <p:cNvSpPr/>
+          <p:nvPr/>
+        </p:nvSpPr>
+        <p:spPr>
+          <a:xfrm>
+            <a:off x="11743182" y="6403086"/>
+            <a:ext cx="68580" cy="68580"/>
+          </a:xfrm>
+          <a:prstGeom prst="roundRect">
+            <a:avLst>
+              <a:gd name="adj" fmla="val 26667"/>
+            </a:avLst>
+          </a:prstGeom>
+          <a:solidFill>
+            <a:srgbClr val="6B2D8F">
+              <a:alpha val="30000"/>
+            </a:srgbClr>
+          </a:solidFill>
+          <a:ln/>
+        </p:spPr>
+      </p:sp>
+      <p:sp>
+        <p:nvSpPr>
+          <p:cNvPr id="12" name="Text 10"/>
+          <p:cNvSpPr txBox="1"/>
+          <p:nvPr/>
+        </p:nvSpPr>
+        <p:spPr>
+          <a:xfrm>
+            <a:off x="640080" y="457200"/>
+            <a:ext cx="10881360" cy="310896"/>
+          </a:xfrm>
+          <a:prstGeom prst="rect">
+            <a:avLst/>
+          </a:prstGeom>
+          <a:noFill/>
+          <a:ln/>
+        </p:spPr>
+        <p:txBody>
+          <a:bodyPr wrap="square" lIns="0" tIns="0" rIns="0" bIns="0" rtlCol="0" anchor="ctr"/>
+          <a:lstStyle/>
+          <a:p>
+            <a:pPr indent="0" marL="0">
+              <a:buNone/>
+            </a:pPr>
+            <a:r>
+              <a:rPr lang="en-US" sz="1300" b="1" spc="300" kern="0" dirty="0">
+                <a:solidFill>
+                  <a:srgbClr val="6B2D8F"/>
+                </a:solidFill>
+                <a:latin typeface="Calibri" pitchFamily="34" charset="0"/>
+                <a:ea typeface="Calibri" pitchFamily="34" charset="-122"/>
+                <a:cs typeface="Calibri" pitchFamily="34" charset="-120"/>
+              </a:rPr>
+              <a:t>CLÔTURE</a:t>
+            </a:r>
+            <a:endParaRPr lang="en-US" sz="1300" dirty="0"/>
+          </a:p>
+        </p:txBody>
+      </p:sp>
+      <p:sp>
+        <p:nvSpPr>
+          <p:cNvPr id="13" name="Text 11"/>
+          <p:cNvSpPr txBox="1"/>
+          <p:nvPr/>
+        </p:nvSpPr>
+        <p:spPr>
+          <a:xfrm>
+            <a:off x="640080" y="868680"/>
+            <a:ext cx="10881360" cy="914400"/>
+          </a:xfrm>
+          <a:prstGeom prst="rect">
+            <a:avLst/>
+          </a:prstGeom>
+          <a:noFill/>
+          <a:ln/>
+        </p:spPr>
+        <p:txBody>
+          <a:bodyPr wrap="square" lIns="0" tIns="0" rIns="0" bIns="0" rtlCol="0" anchor="t"/>
+          <a:lstStyle/>
+          <a:p>
+            <a:pPr indent="0" marL="0">
+              <a:lnSpc>
+                <a:spcPts val="4400"/>
+              </a:lnSpc>
+              <a:buNone/>
+            </a:pPr>
+            <a:r>
+              <a:rPr lang="en-US" sz="4000" b="1" dirty="0">
+                <a:solidFill>
+                  <a:srgbClr val="14142B"/>
+                </a:solidFill>
+                <a:latin typeface="Calibri" pitchFamily="34" charset="0"/>
+                <a:ea typeface="Calibri" pitchFamily="34" charset="-122"/>
+                <a:cs typeface="Calibri" pitchFamily="34" charset="-120"/>
+              </a:rPr>
+              <a:t>Votre jeu sait compter, et il sait refuser.</a:t>
+            </a:r>
+            <a:endParaRPr lang="en-US" sz="4000" dirty="0"/>
+          </a:p>
+        </p:txBody>
+      </p:sp>
+      <p:sp>
+        <p:nvSpPr>
+          <p:cNvPr id="14" name="Shape 12"/>
+          <p:cNvSpPr/>
+          <p:nvPr/>
+        </p:nvSpPr>
+        <p:spPr>
+          <a:xfrm>
+            <a:off x="640080" y="2377440"/>
+            <a:ext cx="5303520" cy="2377440"/>
+          </a:xfrm>
+          <a:prstGeom prst="roundRect">
+            <a:avLst>
+              <a:gd name="adj" fmla="val 3077"/>
+            </a:avLst>
+          </a:prstGeom>
+          <a:solidFill>
+            <a:srgbClr val="FFFFFF"/>
+          </a:solidFill>
+          <a:ln/>
+          <a:effectLst>
+            <a:outerShdw sx="100000" sy="100000" kx="0" ky="0" algn="bl" rotWithShape="0" blurRad="127000" dist="25400" dir="5400000">
+              <a:srgbClr val="20204A">
+                <a:alpha val="12000"/>
+              </a:srgbClr>
+            </a:outerShdw>
+          </a:effectLst>
+        </p:spPr>
+      </p:sp>
+      <p:sp>
+        <p:nvSpPr>
+          <p:cNvPr id="15" name="Shape 13"/>
+          <p:cNvSpPr/>
+          <p:nvPr/>
+        </p:nvSpPr>
+        <p:spPr>
+          <a:xfrm>
+            <a:off x="868680" y="2606040"/>
+            <a:ext cx="566928" cy="566928"/>
+          </a:xfrm>
+          <a:prstGeom prst="ellipse">
+            <a:avLst/>
+          </a:prstGeom>
+          <a:solidFill>
+            <a:srgbClr val="6B2D8F"/>
+          </a:solidFill>
+          <a:ln/>
+        </p:spPr>
+      </p:sp>
+      <p:sp>
+        <p:nvSpPr>
+          <p:cNvPr id="16" name="Text 14"/>
+          <p:cNvSpPr txBox="1"/>
+          <p:nvPr/>
+        </p:nvSpPr>
+        <p:spPr>
+          <a:xfrm>
+            <a:off x="868680" y="2606040"/>
+            <a:ext cx="566928" cy="566928"/>
+          </a:xfrm>
+          <a:prstGeom prst="rect">
+            <a:avLst/>
+          </a:prstGeom>
+          <a:noFill/>
+          <a:ln/>
+        </p:spPr>
+        <p:txBody>
+          <a:bodyPr wrap="square" lIns="0" tIns="0" rIns="0" bIns="0" rtlCol="0" anchor="ctr"/>
+          <a:lstStyle/>
+          <a:p>
+            <a:pPr algn="ctr" indent="0" marL="0">
+              <a:buNone/>
+            </a:pPr>
+            <a:r>
+              <a:rPr lang="en-US" sz="2200" b="1" dirty="0">
+                <a:solidFill>
+                  <a:srgbClr val="FFFFFF"/>
+                </a:solidFill>
+                <a:latin typeface="Calibri" pitchFamily="34" charset="0"/>
+                <a:ea typeface="Calibri" pitchFamily="34" charset="-122"/>
+                <a:cs typeface="Calibri" pitchFamily="34" charset="-120"/>
+              </a:rPr>
+              <a:t>1</a:t>
+            </a:r>
+            <a:endParaRPr lang="en-US" sz="2200" dirty="0"/>
+          </a:p>
+        </p:txBody>
+      </p:sp>
+      <p:sp>
+        <p:nvSpPr>
+          <p:cNvPr id="17" name="Text 15"/>
+          <p:cNvSpPr txBox="1"/>
+          <p:nvPr/>
+        </p:nvSpPr>
+        <p:spPr>
+          <a:xfrm>
+            <a:off x="868680" y="3310128"/>
+            <a:ext cx="4846320" cy="457200"/>
+          </a:xfrm>
+          <a:prstGeom prst="rect">
+            <a:avLst/>
+          </a:prstGeom>
+          <a:noFill/>
+          <a:ln/>
+        </p:spPr>
+        <p:txBody>
+          <a:bodyPr wrap="square" lIns="0" tIns="0" rIns="0" bIns="0" rtlCol="0" anchor="t"/>
+          <a:lstStyle/>
+          <a:p>
+            <a:pPr indent="0" marL="0">
+              <a:buNone/>
+            </a:pPr>
+            <a:r>
+              <a:rPr lang="en-US" sz="2200" b="1" dirty="0">
+                <a:solidFill>
+                  <a:srgbClr val="6B2D8F"/>
+                </a:solidFill>
+                <a:latin typeface="Calibri" pitchFamily="34" charset="0"/>
+                <a:ea typeface="Calibri" pitchFamily="34" charset="-122"/>
+                <a:cs typeface="Calibri" pitchFamily="34" charset="-120"/>
+              </a:rPr>
+              <a:t>Le Mur de Mission</a:t>
+            </a:r>
+            <a:endParaRPr lang="en-US" sz="2200" dirty="0"/>
+          </a:p>
+        </p:txBody>
+      </p:sp>
+      <p:sp>
+        <p:nvSpPr>
+          <p:cNvPr id="18" name="Text 16"/>
+          <p:cNvSpPr txBox="1"/>
+          <p:nvPr/>
+        </p:nvSpPr>
+        <p:spPr>
+          <a:xfrm>
+            <a:off x="868680" y="3822192"/>
+            <a:ext cx="4846320" cy="777240"/>
+          </a:xfrm>
+          <a:prstGeom prst="rect">
+            <a:avLst/>
+          </a:prstGeom>
+          <a:noFill/>
+          <a:ln/>
+        </p:spPr>
+        <p:txBody>
+          <a:bodyPr wrap="square" lIns="0" tIns="0" rIns="0" bIns="0" rtlCol="0" anchor="t"/>
+          <a:lstStyle/>
+          <a:p>
+            <a:pPr indent="0" marL="0">
+              <a:lnSpc>
+                <a:spcPts val="2000"/>
+              </a:lnSpc>
+              <a:buNone/>
+            </a:pPr>
+            <a:r>
+              <a:rPr lang="en-US" sz="1600" dirty="0">
+                <a:solidFill>
+                  <a:srgbClr val="5A5A72"/>
+                </a:solidFill>
+                <a:latin typeface="Calibri" pitchFamily="34" charset="0"/>
+                <a:ea typeface="Calibri" pitchFamily="34" charset="-122"/>
+                <a:cs typeface="Calibri" pitchFamily="34" charset="-120"/>
+              </a:rPr>
+              <a:t>La classe avance d'une case. Tout le monde vient l'écrire.</a:t>
+            </a:r>
+            <a:endParaRPr lang="en-US" sz="1600" dirty="0"/>
+          </a:p>
+        </p:txBody>
+      </p:sp>
+      <p:sp>
+        <p:nvSpPr>
+          <p:cNvPr id="19" name="Shape 17"/>
+          <p:cNvSpPr/>
+          <p:nvPr/>
+        </p:nvSpPr>
+        <p:spPr>
+          <a:xfrm>
+            <a:off x="6217920" y="2377440"/>
+            <a:ext cx="5303520" cy="2377440"/>
+          </a:xfrm>
+          <a:prstGeom prst="roundRect">
+            <a:avLst>
+              <a:gd name="adj" fmla="val 3077"/>
+            </a:avLst>
+          </a:prstGeom>
+          <a:solidFill>
+            <a:srgbClr val="FFFFFF"/>
+          </a:solidFill>
+          <a:ln/>
+          <a:effectLst>
+            <a:outerShdw sx="100000" sy="100000" kx="0" ky="0" algn="bl" rotWithShape="0" blurRad="127000" dist="25400" dir="5400000">
+              <a:srgbClr val="20204A">
+                <a:alpha val="12000"/>
+              </a:srgbClr>
+            </a:outerShdw>
+          </a:effectLst>
+        </p:spPr>
+      </p:sp>
+      <p:sp>
+        <p:nvSpPr>
+          <p:cNvPr id="20" name="Shape 18"/>
+          <p:cNvSpPr/>
+          <p:nvPr/>
+        </p:nvSpPr>
+        <p:spPr>
+          <a:xfrm>
+            <a:off x="6446520" y="2606040"/>
+            <a:ext cx="566928" cy="566928"/>
+          </a:xfrm>
+          <a:prstGeom prst="ellipse">
+            <a:avLst/>
+          </a:prstGeom>
+          <a:solidFill>
+            <a:srgbClr val="13678F"/>
+          </a:solidFill>
+          <a:ln/>
+        </p:spPr>
+      </p:sp>
+      <p:sp>
+        <p:nvSpPr>
+          <p:cNvPr id="21" name="Text 19"/>
+          <p:cNvSpPr txBox="1"/>
+          <p:nvPr/>
+        </p:nvSpPr>
+        <p:spPr>
+          <a:xfrm>
+            <a:off x="6446520" y="2606040"/>
+            <a:ext cx="566928" cy="566928"/>
+          </a:xfrm>
+          <a:prstGeom prst="rect">
+            <a:avLst/>
+          </a:prstGeom>
+          <a:noFill/>
+          <a:ln/>
+        </p:spPr>
+        <p:txBody>
+          <a:bodyPr wrap="square" lIns="0" tIns="0" rIns="0" bIns="0" rtlCol="0" anchor="ctr"/>
+          <a:lstStyle/>
+          <a:p>
+            <a:pPr algn="ctr" indent="0" marL="0">
+              <a:buNone/>
+            </a:pPr>
+            <a:r>
+              <a:rPr lang="en-US" sz="2200" b="1" dirty="0">
+                <a:solidFill>
+                  <a:srgbClr val="FFFFFF"/>
+                </a:solidFill>
+                <a:latin typeface="Calibri" pitchFamily="34" charset="0"/>
+                <a:ea typeface="Calibri" pitchFamily="34" charset="-122"/>
+                <a:cs typeface="Calibri" pitchFamily="34" charset="-120"/>
+              </a:rPr>
+              <a:t>2</a:t>
+            </a:r>
+            <a:endParaRPr lang="en-US" sz="2200" dirty="0"/>
+          </a:p>
+        </p:txBody>
+      </p:sp>
+      <p:sp>
+        <p:nvSpPr>
+          <p:cNvPr id="22" name="Text 20"/>
+          <p:cNvSpPr txBox="1"/>
+          <p:nvPr/>
+        </p:nvSpPr>
+        <p:spPr>
+          <a:xfrm>
+            <a:off x="6446520" y="3310128"/>
+            <a:ext cx="4846320" cy="457200"/>
+          </a:xfrm>
+          <a:prstGeom prst="rect">
+            <a:avLst/>
+          </a:prstGeom>
+          <a:noFill/>
+          <a:ln/>
+        </p:spPr>
+        <p:txBody>
+          <a:bodyPr wrap="square" lIns="0" tIns="0" rIns="0" bIns="0" rtlCol="0" anchor="t"/>
+          <a:lstStyle/>
+          <a:p>
+            <a:pPr indent="0" marL="0">
+              <a:buNone/>
+            </a:pPr>
+            <a:r>
+              <a:rPr lang="en-US" sz="2200" b="1" dirty="0">
+                <a:solidFill>
+                  <a:srgbClr val="13678F"/>
+                </a:solidFill>
+                <a:latin typeface="Calibri" pitchFamily="34" charset="0"/>
+                <a:ea typeface="Calibri" pitchFamily="34" charset="-122"/>
+                <a:cs typeface="Calibri" pitchFamily="34" charset="-120"/>
+              </a:rPr>
+              <a:t>La question</a:t>
+            </a:r>
+            <a:endParaRPr lang="en-US" sz="2200" dirty="0"/>
+          </a:p>
+        </p:txBody>
+      </p:sp>
+      <p:sp>
+        <p:nvSpPr>
+          <p:cNvPr id="23" name="Text 21"/>
+          <p:cNvSpPr txBox="1"/>
+          <p:nvPr/>
+        </p:nvSpPr>
+        <p:spPr>
+          <a:xfrm>
+            <a:off x="6446520" y="3822192"/>
+            <a:ext cx="4846320" cy="777240"/>
+          </a:xfrm>
+          <a:prstGeom prst="rect">
+            <a:avLst/>
+          </a:prstGeom>
+          <a:noFill/>
+          <a:ln/>
+        </p:spPr>
+        <p:txBody>
+          <a:bodyPr wrap="square" lIns="0" tIns="0" rIns="0" bIns="0" rtlCol="0" anchor="t"/>
+          <a:lstStyle/>
+          <a:p>
+            <a:pPr indent="0" marL="0">
+              <a:lnSpc>
+                <a:spcPts val="2000"/>
+              </a:lnSpc>
+              <a:buNone/>
+            </a:pPr>
+            <a:r>
+              <a:rPr lang="en-US" sz="1600" dirty="0">
+                <a:solidFill>
+                  <a:srgbClr val="5A5A72"/>
+                </a:solidFill>
+                <a:latin typeface="Calibri" pitchFamily="34" charset="0"/>
+                <a:ea typeface="Calibri" pitchFamily="34" charset="-122"/>
+                <a:cs typeface="Calibri" pitchFamily="34" charset="-120"/>
+              </a:rPr>
+              <a:t>Qu'avez-vous compris aujourd'hui ? De quoi n'êtes-vous pas encore sûrs ?</a:t>
+            </a:r>
+            <a:endParaRPr lang="en-US" sz="1600" dirty="0"/>
+          </a:p>
+        </p:txBody>
+      </p:sp>
+      <p:sp>
+        <p:nvSpPr>
+          <p:cNvPr id="24" name="Text 22"/>
+          <p:cNvSpPr txBox="1"/>
+          <p:nvPr/>
+        </p:nvSpPr>
+        <p:spPr>
+          <a:xfrm>
+            <a:off x="640080" y="5440680"/>
+            <a:ext cx="10881360" cy="640080"/>
+          </a:xfrm>
+          <a:prstGeom prst="rect">
+            <a:avLst/>
+          </a:prstGeom>
+          <a:noFill/>
+          <a:ln/>
+        </p:spPr>
+        <p:txBody>
+          <a:bodyPr wrap="square" lIns="0" tIns="0" rIns="0" bIns="0" rtlCol="0" anchor="t"/>
+          <a:lstStyle/>
+          <a:p>
+            <a:pPr indent="0" marL="0">
+              <a:buNone/>
+            </a:pPr>
+            <a:r>
+              <a:rPr lang="en-US" sz="2100" b="1" dirty="0">
+                <a:solidFill>
+                  <a:srgbClr val="6B2D8F"/>
+                </a:solidFill>
+                <a:latin typeface="Calibri" pitchFamily="34" charset="0"/>
+                <a:ea typeface="Calibri" pitchFamily="34" charset="-122"/>
+                <a:cs typeface="Calibri" pitchFamily="34" charset="-120"/>
+              </a:rPr>
+              <a:t>On écoute, on ne corrige pas. Ce qui revient le plus ouvrira samedi prochain.</a:t>
+            </a:r>
+            <a:endParaRPr lang="en-US" sz="2100" dirty="0"/>
+          </a:p>
+        </p:txBody>
+      </p:sp>
+    </p:spTree>
+  </p:cSld>
+  <p:clrMapOvr>
+    <a:masterClrMapping/>
+  </p:clrMapOvr>
+</p:sld>
+</file>
+
+<file path=ppt/slides/slide23.xml><?xml version="1.0" encoding="utf-8"?>
+<p:sld xmlns:a="http://schemas.openxmlformats.org/drawingml/2006/main" xmlns:r="http://schemas.openxmlformats.org/officeDocument/2006/relationships" xmlns:p="http://schemas.openxmlformats.org/presentationml/2006/main">
+  <p:cSld name="Slide 23">
     <p:bg>
       <p:bgPr>
         <a:solidFill>
@@ -14495,7 +15839,7 @@
                 <a:ea typeface="Calibri" pitchFamily="34" charset="-122"/>
                 <a:cs typeface="Calibri" pitchFamily="34" charset="-120"/>
               </a:rPr>
-              <a:t>Décider</a:t>
+              <a:t>Les opérateurs</a:t>
             </a:r>
             <a:endParaRPr lang="en-US" sz="1900" dirty="0"/>
           </a:p>
@@ -14537,7 +15881,7 @@
                 <a:ea typeface="Calibri" pitchFamily="34" charset="-122"/>
                 <a:cs typeface="Calibri" pitchFamily="34" charset="-120"/>
               </a:rPr>
-              <a:t>if / else : le programme choisit tout seul. LA grande nouveauté.</a:t>
+              <a:t>Comparer, puis décider avec if / else. LA grande nouveauté.</a:t>
             </a:r>
             <a:endParaRPr lang="en-US" sz="1500" dirty="0"/>
           </a:p>
